--- a/vector-legal-presentation.pptx
+++ b/vector-legal-presentation.pptx
@@ -3202,260 +3202,35 @@
           </a:ln>
         </p:spPr>
       </p:sp>
-      <p:grpSp>
-        <p:nvGrpSpPr>
-          <p:cNvPr id="13" name="Group 13"/>
-          <p:cNvGrpSpPr/>
+      <p:pic>
+        <p:nvPicPr>
+          <p:cNvPr id="5" name="Image 5"/>
+          <p:cNvPicPr>
+            <a:picLocks noChangeAspect="1"/>
+          </p:cNvPicPr>
           <p:nvPr/>
-        </p:nvGrpSpPr>
-        <p:grpSpPr>
-          <a:xfrm>
-            <a:off x="5648325" y="1181100"/>
-            <a:ext cx="981075" cy="781050"/>
-            <a:chOff x="5648325" y="1181100"/>
-            <a:chExt cx="981075" cy="781050"/>
-          </a:xfrm>
-        </p:grpSpPr>
-        <p:sp>
-          <p:nvSpPr>
-            <p:cNvPr id="5" name="Rectangle 5"/>
-            <p:cNvSpPr/>
-            <p:nvPr/>
-          </p:nvSpPr>
-          <p:spPr>
-            <a:xfrm>
-              <a:off x="5753100" y="1181100"/>
-              <a:ext cx="876300" cy="171450"/>
-            </a:xfrm>
-            <a:prstGeom prst="roundRect">
-              <a:avLst>
-                <a:gd name="adj" fmla="val 50000"/>
-              </a:avLst>
-            </a:prstGeom>
-            <a:gradFill>
-              <a:gsLst>
-                <a:gs pos="0">
-                  <a:srgbClr val="38BDF8">
-                    <a:alpha val="40000"/>
-                  </a:srgbClr>
-                </a:gs>
-                <a:gs pos="100000">
-                  <a:srgbClr val="0EA5E9">
-                    <a:alpha val="40000"/>
-                  </a:srgbClr>
-                </a:gs>
-              </a:gsLst>
-              <a:lin ang="0" scaled="1"/>
-            </a:gradFill>
-            <a:ln>
-              <a:noFill/>
-            </a:ln>
-          </p:spPr>
-        </p:sp>
-        <p:sp>
-          <p:nvSpPr>
-            <p:cNvPr id="6" name="Rectangle 6"/>
-            <p:cNvSpPr/>
-            <p:nvPr/>
-          </p:nvSpPr>
-          <p:spPr>
-            <a:xfrm>
-              <a:off x="5657850" y="1181100"/>
-              <a:ext cx="114300" cy="114300"/>
-            </a:xfrm>
-            <a:prstGeom prst="roundRect">
-              <a:avLst>
-                <a:gd name="adj" fmla="val 33333"/>
-              </a:avLst>
-            </a:prstGeom>
-            <a:solidFill>
-              <a:srgbClr val="38BDF8"/>
-            </a:solidFill>
-            <a:ln>
-              <a:noFill/>
-            </a:ln>
-          </p:spPr>
-        </p:sp>
-        <p:sp>
-          <p:nvSpPr>
-            <p:cNvPr id="7" name="Rectangle 7"/>
-            <p:cNvSpPr/>
-            <p:nvPr/>
-          </p:nvSpPr>
-          <p:spPr>
-            <a:xfrm>
-              <a:off x="6419850" y="1181100"/>
-              <a:ext cx="114300" cy="114300"/>
-            </a:xfrm>
-            <a:prstGeom prst="roundRect">
-              <a:avLst>
-                <a:gd name="adj" fmla="val 33333"/>
-              </a:avLst>
-            </a:prstGeom>
-            <a:solidFill>
-              <a:srgbClr val="0EA5E9"/>
-            </a:solidFill>
-            <a:ln>
-              <a:noFill/>
-            </a:ln>
-          </p:spPr>
-        </p:sp>
-        <p:sp>
-          <p:nvSpPr>
-            <p:cNvPr id="8" name="Line 8"/>
-            <p:cNvSpPr/>
-            <p:nvPr/>
-          </p:nvSpPr>
-          <p:spPr>
-            <a:xfrm>
-              <a:off x="6096000" y="1238250"/>
-              <a:ext cx="9525" cy="723900"/>
-            </a:xfrm>
-            <a:custGeom>
-              <a:avLst/>
-              <a:gdLst/>
-              <a:ahLst/>
-              <a:cxnLst/>
-              <a:rect l="l" t="t" r="r" b="b"/>
-              <a:pathLst>
-                <a:path w="9525" h="723900">
-                  <a:moveTo>
-                    <a:pt x="0" y="0"/>
-                  </a:moveTo>
-                  <a:lnTo>
-                    <a:pt x="0" y="723900"/>
-                  </a:lnTo>
-                </a:path>
-              </a:pathLst>
-            </a:custGeom>
-            <a:noFill/>
-            <a:ln w="28575">
-              <a:solidFill>
-                <a:srgbClr val="94A3B8"/>
-              </a:solidFill>
-            </a:ln>
-          </p:spPr>
-        </p:sp>
-        <p:sp>
-          <p:nvSpPr>
-            <p:cNvPr id="9" name="Line 9"/>
-            <p:cNvSpPr/>
-            <p:nvPr/>
-          </p:nvSpPr>
-          <p:spPr>
-            <a:xfrm>
-              <a:off x="5715000" y="1428750"/>
-              <a:ext cx="762000" cy="9525"/>
-            </a:xfrm>
-            <a:custGeom>
-              <a:avLst/>
-              <a:gdLst/>
-              <a:ahLst/>
-              <a:cxnLst/>
-              <a:rect l="l" t="t" r="r" b="b"/>
-              <a:pathLst>
-                <a:path w="762000" h="9525">
-                  <a:moveTo>
-                    <a:pt x="0" y="0"/>
-                  </a:moveTo>
-                  <a:lnTo>
-                    <a:pt x="762000" y="0"/>
-                  </a:lnTo>
-                </a:path>
-              </a:pathLst>
-            </a:custGeom>
-            <a:noFill/>
-            <a:ln w="19050">
-              <a:solidFill>
-                <a:srgbClr val="60A5FA"/>
-              </a:solidFill>
-            </a:ln>
-          </p:spPr>
-        </p:sp>
-        <p:sp>
-          <p:nvSpPr>
-            <p:cNvPr id="10" name="Line 10"/>
-            <p:cNvSpPr/>
-            <p:nvPr/>
-          </p:nvSpPr>
-          <p:spPr>
-            <a:xfrm>
-              <a:off x="5734050" y="1695450"/>
-              <a:ext cx="723900" cy="9525"/>
-            </a:xfrm>
-            <a:custGeom>
-              <a:avLst/>
-              <a:gdLst/>
-              <a:ahLst/>
-              <a:cxnLst/>
-              <a:rect l="l" t="t" r="r" b="b"/>
-              <a:pathLst>
-                <a:path w="723900" h="9525">
-                  <a:moveTo>
-                    <a:pt x="0" y="0"/>
-                  </a:moveTo>
-                  <a:lnTo>
-                    <a:pt x="723900" y="0"/>
-                  </a:lnTo>
-                </a:path>
-              </a:pathLst>
-            </a:custGeom>
-            <a:noFill/>
-            <a:ln w="19050">
-              <a:solidFill>
-                <a:srgbClr val="60A5FA"/>
-              </a:solidFill>
-            </a:ln>
-          </p:spPr>
-        </p:sp>
-        <p:sp>
-          <p:nvSpPr>
-            <p:cNvPr id="11" name="Ellipse 11"/>
-            <p:cNvSpPr/>
-            <p:nvPr/>
-          </p:nvSpPr>
-          <p:spPr>
-            <a:xfrm>
-              <a:off x="5648325" y="1400175"/>
-              <a:ext cx="95250" cy="95250"/>
-            </a:xfrm>
-            <a:prstGeom prst="ellipse">
-              <a:avLst/>
-            </a:prstGeom>
-            <a:solidFill>
-              <a:srgbClr val="38BDF8"/>
-            </a:solidFill>
-            <a:ln>
-              <a:noFill/>
-            </a:ln>
-          </p:spPr>
-        </p:sp>
-        <p:sp>
-          <p:nvSpPr>
-            <p:cNvPr id="12" name="Ellipse 12"/>
-            <p:cNvSpPr/>
-            <p:nvPr/>
-          </p:nvSpPr>
-          <p:spPr>
-            <a:xfrm>
-              <a:off x="6410325" y="1400175"/>
-              <a:ext cx="95250" cy="95250"/>
-            </a:xfrm>
-            <a:prstGeom prst="ellipse">
-              <a:avLst/>
-            </a:prstGeom>
-            <a:solidFill>
-              <a:srgbClr val="0EA5E9"/>
-            </a:solidFill>
-            <a:ln>
-              <a:noFill/>
-            </a:ln>
-          </p:spPr>
-        </p:sp>
-      </p:grpSp>
-      <p:sp>
-        <p:nvSpPr>
-          <p:cNvPr id="14" name="TextBox 14"/>
+        </p:nvPicPr>
+        <p:blipFill>
+          <a:blip r:embed="rId2"/>
+          <a:stretch>
+            <a:fillRect/>
+          </a:stretch>
+        </p:blipFill>
+        <p:spPr>
+          <a:xfrm>
+            <a:off x="5143500" y="666750"/>
+            <a:ext cx="1905000" cy="1238250"/>
+          </a:xfrm>
+          <a:prstGeom prst="roundRect">
+            <a:avLst>
+              <a:gd name="adj" fmla="val 6153"/>
+            </a:avLst>
+          </a:prstGeom>
+        </p:spPr>
+      </p:pic>
+      <p:sp>
+        <p:nvSpPr>
+          <p:cNvPr id="6" name="TextBox 6"/>
           <p:cNvSpPr txBox="1"/>
           <p:nvPr/>
         </p:nvSpPr>
@@ -3495,7 +3270,7 @@
       </p:sp>
       <p:sp>
         <p:nvSpPr>
-          <p:cNvPr id="15" name="TextBox 15"/>
+          <p:cNvPr id="7" name="TextBox 7"/>
           <p:cNvSpPr txBox="1"/>
           <p:nvPr/>
         </p:nvSpPr>
@@ -3535,7 +3310,7 @@
       </p:sp>
       <p:sp>
         <p:nvSpPr>
-          <p:cNvPr id="16" name="Rectangle 16"/>
+          <p:cNvPr id="8" name="Rectangle 8"/>
           <p:cNvSpPr/>
           <p:nvPr/>
         </p:nvSpPr>
@@ -3568,7 +3343,7 @@
       </p:sp>
       <p:sp>
         <p:nvSpPr>
-          <p:cNvPr id="17" name="TextBox 17"/>
+          <p:cNvPr id="9" name="TextBox 9"/>
           <p:cNvSpPr txBox="1"/>
           <p:nvPr/>
         </p:nvSpPr>
@@ -3608,7 +3383,7 @@
       </p:sp>
       <p:grpSp>
         <p:nvGrpSpPr>
-          <p:cNvPr id="21" name="Group 21"/>
+          <p:cNvPr id="13" name="Group 13"/>
           <p:cNvGrpSpPr/>
           <p:nvPr/>
         </p:nvGrpSpPr>
@@ -3622,7 +3397,7 @@
         </p:grpSpPr>
         <p:sp>
           <p:nvSpPr>
-            <p:cNvPr id="18" name="Rectangle 18"/>
+            <p:cNvPr id="10" name="Rectangle 10"/>
             <p:cNvSpPr/>
             <p:nvPr/>
           </p:nvSpPr>
@@ -3648,7 +3423,7 @@
         </p:sp>
         <p:sp>
           <p:nvSpPr>
-            <p:cNvPr id="19" name="TextBox 19"/>
+            <p:cNvPr id="11" name="TextBox 11"/>
             <p:cNvSpPr txBox="1"/>
             <p:nvPr/>
           </p:nvSpPr>
@@ -3688,7 +3463,7 @@
         </p:sp>
         <p:sp>
           <p:nvSpPr>
-            <p:cNvPr id="20" name="TextBox 20"/>
+            <p:cNvPr id="12" name="TextBox 12"/>
             <p:cNvSpPr txBox="1"/>
             <p:nvPr/>
           </p:nvSpPr>
@@ -3729,7 +3504,7 @@
       </p:grpSp>
       <p:grpSp>
         <p:nvGrpSpPr>
-          <p:cNvPr id="25" name="Group 25"/>
+          <p:cNvPr id="17" name="Group 17"/>
           <p:cNvGrpSpPr/>
           <p:nvPr/>
         </p:nvGrpSpPr>
@@ -3743,7 +3518,7 @@
         </p:grpSpPr>
         <p:sp>
           <p:nvSpPr>
-            <p:cNvPr id="22" name="Rectangle 22"/>
+            <p:cNvPr id="14" name="Rectangle 14"/>
             <p:cNvSpPr/>
             <p:nvPr/>
           </p:nvSpPr>
@@ -3769,7 +3544,7 @@
         </p:sp>
         <p:sp>
           <p:nvSpPr>
-            <p:cNvPr id="23" name="TextBox 23"/>
+            <p:cNvPr id="15" name="TextBox 15"/>
             <p:cNvSpPr txBox="1"/>
             <p:nvPr/>
           </p:nvSpPr>
@@ -3809,7 +3584,7 @@
         </p:sp>
         <p:sp>
           <p:nvSpPr>
-            <p:cNvPr id="24" name="TextBox 24"/>
+            <p:cNvPr id="16" name="TextBox 16"/>
             <p:cNvSpPr txBox="1"/>
             <p:nvPr/>
           </p:nvSpPr>
@@ -3850,7 +3625,7 @@
       </p:grpSp>
       <p:grpSp>
         <p:nvGrpSpPr>
-          <p:cNvPr id="29" name="Group 29"/>
+          <p:cNvPr id="21" name="Group 21"/>
           <p:cNvGrpSpPr/>
           <p:nvPr/>
         </p:nvGrpSpPr>
@@ -3864,7 +3639,7 @@
         </p:grpSpPr>
         <p:sp>
           <p:nvSpPr>
-            <p:cNvPr id="26" name="Rectangle 26"/>
+            <p:cNvPr id="18" name="Rectangle 18"/>
             <p:cNvSpPr/>
             <p:nvPr/>
           </p:nvSpPr>
@@ -3890,7 +3665,7 @@
         </p:sp>
         <p:sp>
           <p:nvSpPr>
-            <p:cNvPr id="27" name="TextBox 27"/>
+            <p:cNvPr id="19" name="TextBox 19"/>
             <p:cNvSpPr txBox="1"/>
             <p:nvPr/>
           </p:nvSpPr>
@@ -3930,7 +3705,7 @@
         </p:sp>
         <p:sp>
           <p:nvSpPr>
-            <p:cNvPr id="28" name="TextBox 28"/>
+            <p:cNvPr id="20" name="TextBox 20"/>
             <p:cNvSpPr txBox="1"/>
             <p:nvPr/>
           </p:nvSpPr>
@@ -3971,7 +3746,7 @@
       </p:grpSp>
       <p:sp>
         <p:nvSpPr>
-          <p:cNvPr id="30" name="TextBox 30"/>
+          <p:cNvPr id="22" name="TextBox 22"/>
           <p:cNvSpPr txBox="1"/>
           <p:nvPr/>
         </p:nvSpPr>
@@ -4011,7 +3786,7 @@
       </p:sp>
       <p:sp>
         <p:nvSpPr>
-          <p:cNvPr id="31" name="TextBox 31"/>
+          <p:cNvPr id="23" name="TextBox 23"/>
           <p:cNvSpPr txBox="1"/>
           <p:nvPr/>
         </p:nvSpPr>
@@ -4051,7 +3826,7 @@
       </p:sp>
       <p:sp>
         <p:nvSpPr>
-          <p:cNvPr id="32" name="Rectangle 32"/>
+          <p:cNvPr id="24" name="Rectangle 24"/>
           <p:cNvSpPr/>
           <p:nvPr/>
         </p:nvSpPr>
@@ -12555,9 +12330,9 @@
         <p:grpSpPr>
           <a:xfrm>
             <a:off x="762000" y="2190750"/>
-            <a:ext cx="10668000" cy="1765459"/>
+            <a:ext cx="10668000" cy="1927384"/>
             <a:chOff x="762000" y="2190750"/>
-            <a:chExt cx="10668000" cy="1765459"/>
+            <a:chExt cx="10668000" cy="1927384"/>
           </a:xfrm>
         </p:grpSpPr>
         <p:sp>
@@ -12569,11 +12344,11 @@
           <p:spPr>
             <a:xfrm>
               <a:off x="762000" y="2190750"/>
-              <a:ext cx="10668000" cy="1714500"/>
+              <a:ext cx="10668000" cy="1905000"/>
             </a:xfrm>
             <a:prstGeom prst="roundRect">
               <a:avLst>
-                <a:gd name="adj" fmla="val 8889"/>
+                <a:gd name="adj" fmla="val 8000"/>
               </a:avLst>
             </a:prstGeom>
             <a:solidFill>
@@ -12635,7 +12410,7 @@
           <p:spPr>
             <a:xfrm>
               <a:off x="1137285" y="2878931"/>
-              <a:ext cx="6980756" cy="220028"/>
+              <a:ext cx="5844649" cy="220028"/>
             </a:xfrm>
             <a:prstGeom prst="rect">
               <a:avLst/>
@@ -12661,7 +12436,7 @@
                   <a:ea typeface="Inter"/>
                   <a:cs typeface="Inter"/>
                 </a:rPr>
-                <a:t>• Внутренние позиции (лимит ответственности, indemnity, 152-ФЗ, сроки, суд) — обе стороны</a:t>
+                <a:t>• Внутренние правила: лимит ответственности, indemnity, 152-ФЗ, сроки, суд</a:t>
               </a:r>
             </a:p>
           </p:txBody>
@@ -12714,8 +12489,8 @@
           </p:nvSpPr>
           <p:spPr>
             <a:xfrm>
-              <a:off x="1137285" y="3164681"/>
-              <a:ext cx="7347173" cy="220028"/>
+              <a:off x="1137285" y="3450431"/>
+              <a:ext cx="4795008" cy="220028"/>
             </a:xfrm>
             <a:prstGeom prst="rect">
               <a:avLst/>
@@ -12741,7 +12516,7 @@
                   <a:ea typeface="Inter"/>
                   <a:cs typeface="Inter"/>
                 </a:rPr>
-                <a:t>• Общий стиль, seed-документы (реальные подписанные договоры), главная «штука» / deal-breaker</a:t>
+                <a:t>• Стиль работы, реальные договоры как основа, главная позиция</a:t>
               </a:r>
             </a:p>
           </p:txBody>
@@ -12754,7 +12529,7 @@
           </p:nvSpPr>
           <p:spPr>
             <a:xfrm>
-              <a:off x="1137285" y="3736181"/>
+              <a:off x="1137285" y="3898106"/>
               <a:ext cx="6180881" cy="220028"/>
             </a:xfrm>
             <a:prstGeom prst="rect">
@@ -12795,9 +12570,9 @@
         </p:nvGrpSpPr>
         <p:grpSpPr>
           <a:xfrm>
-            <a:off x="762000" y="4191000"/>
+            <a:off x="762000" y="4381500"/>
             <a:ext cx="5143500" cy="2095500"/>
-            <a:chOff x="762000" y="4191000"/>
+            <a:chOff x="762000" y="4381500"/>
             <a:chExt cx="5143500" cy="2095500"/>
           </a:xfrm>
         </p:grpSpPr>
@@ -12809,7 +12584,7 @@
           </p:nvSpPr>
           <p:spPr>
             <a:xfrm>
-              <a:off x="762000" y="4191000"/>
+              <a:off x="762000" y="4381500"/>
               <a:ext cx="5143500" cy="2095500"/>
             </a:xfrm>
             <a:prstGeom prst="roundRect">
@@ -12835,7 +12610,7 @@
           </p:nvSpPr>
           <p:spPr>
             <a:xfrm>
-              <a:off x="1040892" y="4473892"/>
+              <a:off x="1040892" y="4664392"/>
               <a:ext cx="3035559" cy="264033"/>
             </a:xfrm>
             <a:prstGeom prst="rect">
@@ -12875,8 +12650,8 @@
           </p:nvSpPr>
           <p:spPr>
             <a:xfrm>
-              <a:off x="1042416" y="4887278"/>
-              <a:ext cx="3422301" cy="205359"/>
+              <a:off x="1042416" y="5077778"/>
+              <a:ext cx="3697945" cy="205359"/>
             </a:xfrm>
             <a:prstGeom prst="rect">
               <a:avLst/>
@@ -12902,7 +12677,7 @@
                   <a:ea typeface="Inter"/>
                   <a:cs typeface="Inter"/>
                 </a:rPr>
-                <a:t>• Замечание ревизору — один блок над документом</a:t>
+                <a:t>• Замечание для ревизора — один блок над документом</a:t>
               </a:r>
             </a:p>
           </p:txBody>
@@ -12915,8 +12690,8 @@
           </p:nvSpPr>
           <p:spPr>
             <a:xfrm>
-              <a:off x="1042416" y="5173028"/>
-              <a:ext cx="2248402" cy="205359"/>
+              <a:off x="1042416" y="5363528"/>
+              <a:ext cx="2051359" cy="205359"/>
             </a:xfrm>
             <a:prstGeom prst="rect">
               <a:avLst/>
@@ -12942,7 +12717,7 @@
                   <a:ea typeface="Inter"/>
                   <a:cs typeface="Inter"/>
                 </a:rPr>
-                <a:t>• Решение-дерево «Что дальше?»</a:t>
+                <a:t>• Дальше — варианты развития</a:t>
               </a:r>
             </a:p>
           </p:txBody>
@@ -12955,8 +12730,8 @@
           </p:nvSpPr>
           <p:spPr>
             <a:xfrm>
-              <a:off x="1042416" y="5458778"/>
-              <a:ext cx="3815707" cy="205359"/>
+              <a:off x="1042416" y="5649278"/>
+              <a:ext cx="3294771" cy="205359"/>
             </a:xfrm>
             <a:prstGeom prst="rect">
               <a:avLst/>
@@ -12982,7 +12757,7 @@
                   <a:ea typeface="Inter"/>
                   <a:cs typeface="Inter"/>
                 </a:rPr>
-                <a:t>• Проверка на конфиденциальность (Destination check)</a:t>
+                <a:t>• Проверка на конфиденциальность содержимого</a:t>
               </a:r>
             </a:p>
           </p:txBody>
@@ -12995,8 +12770,8 @@
           </p:nvSpPr>
           <p:spPr>
             <a:xfrm>
-              <a:off x="1042416" y="5744528"/>
-              <a:ext cx="4079510" cy="205359"/>
+              <a:off x="1042416" y="5935028"/>
+              <a:ext cx="4001780" cy="205359"/>
             </a:xfrm>
             <a:prstGeom prst="rect">
               <a:avLst/>
@@ -13022,7 +12797,7 @@
                   <a:ea typeface="Inter"/>
                   <a:cs typeface="Inter"/>
                 </a:rPr>
-                <a:t>• Указание источника цитаты, большой ввод, актуальность</a:t>
+                <a:t>• Указание источника цитаты, объём, актуальность нормы</a:t>
               </a:r>
             </a:p>
           </p:txBody>
@@ -13036,9 +12811,9 @@
         </p:nvGrpSpPr>
         <p:grpSpPr>
           <a:xfrm>
-            <a:off x="6286500" y="4191000"/>
+            <a:off x="6286500" y="4381500"/>
             <a:ext cx="5143500" cy="2095500"/>
-            <a:chOff x="6286500" y="4191000"/>
+            <a:chOff x="6286500" y="4381500"/>
             <a:chExt cx="5143500" cy="2095500"/>
           </a:xfrm>
         </p:grpSpPr>
@@ -13050,7 +12825,7 @@
           </p:nvSpPr>
           <p:spPr>
             <a:xfrm>
-              <a:off x="6286500" y="4191000"/>
+              <a:off x="6286500" y="4381500"/>
               <a:ext cx="5143500" cy="2095500"/>
             </a:xfrm>
             <a:prstGeom prst="roundRect">
@@ -13076,7 +12851,7 @@
           </p:nvSpPr>
           <p:spPr>
             <a:xfrm>
-              <a:off x="6565392" y="4473892"/>
+              <a:off x="6565392" y="4664392"/>
               <a:ext cx="1966240" cy="264033"/>
             </a:xfrm>
             <a:prstGeom prst="rect">
@@ -13116,8 +12891,8 @@
           </p:nvSpPr>
           <p:spPr>
             <a:xfrm>
-              <a:off x="6566916" y="4887278"/>
-              <a:ext cx="4659202" cy="205359"/>
+              <a:off x="6566916" y="5077778"/>
+              <a:ext cx="4284721" cy="205359"/>
             </a:xfrm>
             <a:prstGeom prst="rect">
               <a:avLst/>
@@ -13143,7 +12918,7 @@
                   <a:ea typeface="Inter"/>
                   <a:cs typeface="Inter"/>
                 </a:rPr>
-                <a:t>• Takedown, претензия, подписание — плагин только готовит драфт</a:t>
+                <a:t>• Удаление контента / претензия / подписание — только драфт</a:t>
               </a:r>
             </a:p>
           </p:txBody>
@@ -13156,7 +12931,7 @@
           </p:nvSpPr>
           <p:spPr>
             <a:xfrm>
-              <a:off x="6566916" y="5173028"/>
+              <a:off x="6566916" y="5363528"/>
               <a:ext cx="2638226" cy="205359"/>
             </a:xfrm>
             <a:prstGeom prst="rect">
@@ -13196,7 +12971,7 @@
           </p:nvSpPr>
           <p:spPr>
             <a:xfrm>
-              <a:off x="6566916" y="5458778"/>
+              <a:off x="6566916" y="5649278"/>
               <a:ext cx="3350044" cy="205359"/>
             </a:xfrm>
             <a:prstGeom prst="rect">
@@ -13236,8 +13011,8 @@
           </p:nvSpPr>
           <p:spPr>
             <a:xfrm>
-              <a:off x="6566916" y="5744528"/>
-              <a:ext cx="4352377" cy="205359"/>
+              <a:off x="6566916" y="5935028"/>
+              <a:ext cx="4111633" cy="205359"/>
             </a:xfrm>
             <a:prstGeom prst="rect">
               <a:avLst/>
@@ -13263,7 +13038,7 @@
                   <a:ea typeface="Inter"/>
                   <a:cs typeface="Inter"/>
                 </a:rPr>
-                <a:t>Заявки в Роспатент, споры СИПН — только intake, дальше юрист</a:t>
+                <a:t>Заявки Росpatent, споры СИПН — intake, дальше специалист</a:t>
               </a:r>
             </a:p>
           </p:txBody>

--- a/vector-legal-presentation.pptx
+++ b/vector-legal-presentation.pptx
@@ -3145,7 +3145,43 @@
         <p:spPr>
           <a:xfrm>
             <a:off x="0" y="0"/>
-            <a:ext cx="12192000" cy="38100"/>
+            <a:ext cx="12192000" cy="6858000"/>
+          </a:xfrm>
+          <a:prstGeom prst="rect">
+            <a:avLst/>
+          </a:prstGeom>
+          <a:gradFill>
+            <a:gsLst>
+              <a:gs pos="0">
+                <a:srgbClr val="0EA5E9">
+                  <a:alpha val="14000"/>
+                </a:srgbClr>
+              </a:gs>
+              <a:gs pos="100000">
+                <a:srgbClr val="0EA5E9">
+                  <a:alpha val="0"/>
+                </a:srgbClr>
+              </a:gs>
+            </a:gsLst>
+            <a:path path="circle">
+              <a:fillToRect l="50000" t="50000" r="50000" b="50000"/>
+            </a:path>
+          </a:gradFill>
+          <a:ln>
+            <a:noFill/>
+          </a:ln>
+        </p:spPr>
+      </p:sp>
+      <p:sp>
+        <p:nvSpPr>
+          <p:cNvPr id="4" name="Rectangle 4"/>
+          <p:cNvSpPr/>
+          <p:nvPr/>
+        </p:nvSpPr>
+        <p:spPr>
+          <a:xfrm>
+            <a:off x="0" y="0"/>
+            <a:ext cx="12192000" cy="28575"/>
           </a:xfrm>
           <a:prstGeom prst="rect">
             <a:avLst/>
@@ -3171,14 +3207,14 @@
       </p:sp>
       <p:sp>
         <p:nvSpPr>
-          <p:cNvPr id="4" name="Rectangle 4"/>
+          <p:cNvPr id="5" name="Rectangle 5"/>
           <p:cNvSpPr/>
           <p:nvPr/>
         </p:nvSpPr>
         <p:spPr>
           <a:xfrm>
-            <a:off x="0" y="6819900"/>
-            <a:ext cx="12192000" cy="38100"/>
+            <a:off x="0" y="6829425"/>
+            <a:ext cx="12192000" cy="28575"/>
           </a:xfrm>
           <a:prstGeom prst="rect">
             <a:avLst/>
@@ -3204,7 +3240,7 @@
       </p:sp>
       <p:pic>
         <p:nvPicPr>
-          <p:cNvPr id="5" name="Image 5"/>
+          <p:cNvPr id="6" name="Image 6"/>
           <p:cNvPicPr>
             <a:picLocks noChangeAspect="1"/>
           </p:cNvPicPr>
@@ -3218,26 +3254,105 @@
         </p:blipFill>
         <p:spPr>
           <a:xfrm>
-            <a:off x="5143500" y="666750"/>
-            <a:ext cx="1905000" cy="1238250"/>
-          </a:xfrm>
-          <a:prstGeom prst="roundRect">
-            <a:avLst>
-              <a:gd name="adj" fmla="val 6153"/>
-            </a:avLst>
+            <a:off x="5538788" y="457200"/>
+            <a:ext cx="1114425" cy="742950"/>
+          </a:xfrm>
+          <a:prstGeom prst="rect">
+            <a:avLst/>
           </a:prstGeom>
         </p:spPr>
       </p:pic>
-      <p:sp>
-        <p:nvSpPr>
-          <p:cNvPr id="6" name="TextBox 6"/>
+      <p:grpSp>
+        <p:nvGrpSpPr>
+          <p:cNvPr id="9" name="Group 9"/>
+          <p:cNvGrpSpPr/>
+          <p:nvPr/>
+        </p:nvGrpSpPr>
+        <p:grpSpPr>
+          <a:xfrm>
+            <a:off x="4762500" y="1457325"/>
+            <a:ext cx="2667000" cy="285750"/>
+            <a:chOff x="4762500" y="1457325"/>
+            <a:chExt cx="2667000" cy="285750"/>
+          </a:xfrm>
+        </p:grpSpPr>
+        <p:sp>
+          <p:nvSpPr>
+            <p:cNvPr id="7" name="Rectangle 7"/>
+            <p:cNvSpPr/>
+            <p:nvPr/>
+          </p:nvSpPr>
+          <p:spPr>
+            <a:xfrm>
+              <a:off x="4762500" y="1457325"/>
+              <a:ext cx="2667000" cy="285750"/>
+            </a:xfrm>
+            <a:prstGeom prst="roundRect">
+              <a:avLst>
+                <a:gd name="adj" fmla="val 50000"/>
+              </a:avLst>
+            </a:prstGeom>
+            <a:solidFill>
+              <a:srgbClr val="1E293B"/>
+            </a:solidFill>
+            <a:ln w="9525">
+              <a:solidFill>
+                <a:srgbClr val="334155"/>
+              </a:solidFill>
+            </a:ln>
+          </p:spPr>
+        </p:sp>
+        <p:sp>
+          <p:nvSpPr>
+            <p:cNvPr id="8" name="TextBox 8"/>
+            <p:cNvSpPr txBox="1"/>
+            <p:nvPr/>
+          </p:nvSpPr>
+          <p:spPr>
+            <a:xfrm>
+              <a:off x="4813478" y="1566862"/>
+              <a:ext cx="2565044" cy="147638"/>
+            </a:xfrm>
+            <a:prstGeom prst="rect">
+              <a:avLst/>
+            </a:prstGeom>
+            <a:noFill/>
+            <a:ln>
+              <a:noFill/>
+            </a:ln>
+          </p:spPr>
+          <p:txBody>
+            <a:bodyPr wrap="none" lIns="0" tIns="0" rIns="0" bIns="0" anchor="t" anchorCtr="0">
+              <a:spAutoFit/>
+            </a:bodyPr>
+            <a:lstStyle/>
+            <a:p>
+              <a:pPr algn="ctr"/>
+              <a:r>
+                <a:rPr lang="en-US" sz="750" b="1" spc="180" dirty="0">
+                  <a:solidFill>
+                    <a:srgbClr val="94A3B8"/>
+                  </a:solidFill>
+                  <a:latin typeface="Inter"/>
+                  <a:ea typeface="Inter"/>
+                  <a:cs typeface="Inter"/>
+                </a:rPr>
+                <a:t>ЮРИДИЧЕСКИЙ AI-ДЕПАРТАМЕНТ</a:t>
+              </a:r>
+            </a:p>
+          </p:txBody>
+        </p:sp>
+      </p:grpSp>
+      <p:sp>
+        <p:nvSpPr>
+          <p:cNvPr id="10" name="TextBox 10"/>
           <p:cNvSpPr txBox="1"/>
           <p:nvPr/>
         </p:nvSpPr>
         <p:spPr>
           <a:xfrm>
-            <a:off x="3594272" y="2242185"/>
-            <a:ext cx="5003455" cy="1104900"/>
+            <a:off x="3809093" y="1845945"/>
+            <a:ext cx="4573814" cy="1047750"/>
           </a:xfrm>
           <a:prstGeom prst="rect">
             <a:avLst/>
@@ -3255,10 +3370,21 @@
           <a:p>
             <a:pPr algn="ctr"/>
             <a:r>
-              <a:rPr lang="en-US" sz="5700" b="1" dirty="0">
-                <a:solidFill>
-                  <a:srgbClr val="38BDF8"/>
-                </a:solidFill>
+              <a:rPr lang="en-US" sz="5400" b="1" spc="-112" dirty="0">
+                <a:gradFill>
+                  <a:gsLst>
+                    <a:gs pos="0">
+                      <a:srgbClr val="38BDF8"/>
+                    </a:gs>
+                    <a:gs pos="55000">
+                      <a:srgbClr val="60A5FA"/>
+                    </a:gs>
+                    <a:gs pos="100000">
+                      <a:srgbClr val="818CF8"/>
+                    </a:gs>
+                  </a:gsLst>
+                  <a:lin ang="0" scaled="1"/>
+                </a:gradFill>
                 <a:latin typeface="Inter"/>
                 <a:ea typeface="Inter"/>
                 <a:cs typeface="Inter"/>
@@ -3270,14 +3396,14 @@
       </p:sp>
       <p:sp>
         <p:nvSpPr>
-          <p:cNvPr id="7" name="TextBox 7"/>
+          <p:cNvPr id="11" name="TextBox 11"/>
           <p:cNvSpPr txBox="1"/>
           <p:nvPr/>
         </p:nvSpPr>
         <p:spPr>
           <a:xfrm>
-            <a:off x="2405722" y="3169920"/>
-            <a:ext cx="7380556" cy="469392"/>
+            <a:off x="3302902" y="3206115"/>
+            <a:ext cx="5586195" cy="352044"/>
           </a:xfrm>
           <a:prstGeom prst="rect">
             <a:avLst/>
@@ -3295,7 +3421,7 @@
           <a:p>
             <a:pPr algn="ctr"/>
             <a:r>
-              <a:rPr lang="en-US" sz="2400" dirty="0">
+              <a:rPr lang="en-US" sz="1800" spc="22" dirty="0">
                 <a:solidFill>
                   <a:srgbClr val="E2E8F0"/>
                 </a:solidFill>
@@ -3303,24 +3429,26 @@
                 <a:ea typeface="Inter"/>
                 <a:cs typeface="Inter"/>
               </a:rPr>
-              <a:t>Юридический AI-департамент для Hermes Agent</a:t>
+              <a:t>Навыки российского права для Hermes Agent</a:t>
             </a:r>
           </a:p>
         </p:txBody>
       </p:sp>
       <p:sp>
         <p:nvSpPr>
-          <p:cNvPr id="8" name="Rectangle 8"/>
+          <p:cNvPr id="12" name="Rectangle 12"/>
           <p:cNvSpPr/>
           <p:nvPr/>
         </p:nvSpPr>
         <p:spPr>
           <a:xfrm>
-            <a:off x="4191000" y="3714750"/>
-            <a:ext cx="3810000" cy="19050"/>
-          </a:xfrm>
-          <a:prstGeom prst="rect">
-            <a:avLst/>
+            <a:off x="5143500" y="3714750"/>
+            <a:ext cx="1905000" cy="19050"/>
+          </a:xfrm>
+          <a:prstGeom prst="roundRect">
+            <a:avLst>
+              <a:gd name="adj" fmla="val 50000"/>
+            </a:avLst>
           </a:prstGeom>
           <a:gradFill>
             <a:gsLst>
@@ -3341,16 +3469,530 @@
           </a:ln>
         </p:spPr>
       </p:sp>
-      <p:sp>
-        <p:nvSpPr>
-          <p:cNvPr id="9" name="TextBox 9"/>
+      <p:grpSp>
+        <p:nvGrpSpPr>
+          <p:cNvPr id="17" name="Group 17"/>
+          <p:cNvGrpSpPr/>
+          <p:nvPr/>
+        </p:nvGrpSpPr>
+        <p:grpSpPr>
+          <a:xfrm>
+            <a:off x="3143250" y="3952875"/>
+            <a:ext cx="1714500" cy="990600"/>
+            <a:chOff x="3143250" y="3952875"/>
+            <a:chExt cx="1714500" cy="990600"/>
+          </a:xfrm>
+        </p:grpSpPr>
+        <p:sp>
+          <p:nvSpPr>
+            <p:cNvPr id="13" name="Rectangle 13"/>
+            <p:cNvSpPr/>
+            <p:nvPr/>
+          </p:nvSpPr>
+          <p:spPr>
+            <a:xfrm>
+              <a:off x="3143250" y="3952875"/>
+              <a:ext cx="1714500" cy="990600"/>
+            </a:xfrm>
+            <a:prstGeom prst="roundRect">
+              <a:avLst>
+                <a:gd name="adj" fmla="val 17308"/>
+              </a:avLst>
+            </a:prstGeom>
+            <a:solidFill>
+              <a:srgbClr val="0F172A"/>
+            </a:solidFill>
+            <a:ln w="9525">
+              <a:solidFill>
+                <a:srgbClr val="334155"/>
+              </a:solidFill>
+            </a:ln>
+          </p:spPr>
+        </p:sp>
+        <p:sp>
+          <p:nvSpPr>
+            <p:cNvPr id="14" name="Rectangle 14"/>
+            <p:cNvSpPr/>
+            <p:nvPr/>
+          </p:nvSpPr>
+          <p:spPr>
+            <a:xfrm>
+              <a:off x="3171825" y="3981450"/>
+              <a:ext cx="1657350" cy="933450"/>
+            </a:xfrm>
+            <a:prstGeom prst="roundRect">
+              <a:avLst>
+                <a:gd name="adj" fmla="val 15306"/>
+              </a:avLst>
+            </a:prstGeom>
+            <a:solidFill>
+              <a:srgbClr val="1E293B"/>
+            </a:solidFill>
+            <a:ln>
+              <a:noFill/>
+            </a:ln>
+          </p:spPr>
+        </p:sp>
+        <p:sp>
+          <p:nvSpPr>
+            <p:cNvPr id="15" name="TextBox 15"/>
+            <p:cNvSpPr txBox="1"/>
+            <p:nvPr/>
+          </p:nvSpPr>
+          <p:spPr>
+            <a:xfrm>
+              <a:off x="3794349" y="4039552"/>
+              <a:ext cx="412301" cy="498729"/>
+            </a:xfrm>
+            <a:prstGeom prst="rect">
+              <a:avLst/>
+            </a:prstGeom>
+            <a:noFill/>
+            <a:ln>
+              <a:noFill/>
+            </a:ln>
+          </p:spPr>
+          <p:txBody>
+            <a:bodyPr wrap="none" lIns="0" tIns="0" rIns="0" bIns="0" anchor="t" anchorCtr="0">
+              <a:spAutoFit/>
+            </a:bodyPr>
+            <a:lstStyle/>
+            <a:p>
+              <a:pPr algn="ctr"/>
+              <a:r>
+                <a:rPr lang="en-US" sz="2550" b="1" spc="-75" dirty="0">
+                  <a:solidFill>
+                    <a:srgbClr val="38BDF8"/>
+                  </a:solidFill>
+                  <a:latin typeface="Inter"/>
+                  <a:ea typeface="Inter"/>
+                  <a:cs typeface="Inter"/>
+                </a:rPr>
+                <a:t>12</a:t>
+              </a:r>
+            </a:p>
+          </p:txBody>
+        </p:sp>
+        <p:sp>
+          <p:nvSpPr>
+            <p:cNvPr id="16" name="TextBox 16"/>
+            <p:cNvSpPr txBox="1"/>
+            <p:nvPr/>
+          </p:nvSpPr>
+          <p:spPr>
+            <a:xfrm>
+              <a:off x="3667232" y="4639628"/>
+              <a:ext cx="666537" cy="205359"/>
+            </a:xfrm>
+            <a:prstGeom prst="rect">
+              <a:avLst/>
+            </a:prstGeom>
+            <a:noFill/>
+            <a:ln>
+              <a:noFill/>
+            </a:ln>
+          </p:spPr>
+          <p:txBody>
+            <a:bodyPr wrap="none" lIns="0" tIns="0" rIns="0" bIns="0" anchor="t" anchorCtr="0">
+              <a:spAutoFit/>
+            </a:bodyPr>
+            <a:lstStyle/>
+            <a:p>
+              <a:pPr algn="ctr"/>
+              <a:r>
+                <a:rPr lang="en-US" sz="1050" dirty="0">
+                  <a:solidFill>
+                    <a:srgbClr val="94A3B8"/>
+                  </a:solidFill>
+                  <a:latin typeface="Inter"/>
+                  <a:ea typeface="Inter"/>
+                  <a:cs typeface="Inter"/>
+                </a:rPr>
+                <a:t>плагинов</a:t>
+              </a:r>
+            </a:p>
+          </p:txBody>
+        </p:sp>
+      </p:grpSp>
+      <p:grpSp>
+        <p:nvGrpSpPr>
+          <p:cNvPr id="22" name="Group 22"/>
+          <p:cNvGrpSpPr/>
+          <p:nvPr/>
+        </p:nvGrpSpPr>
+        <p:grpSpPr>
+          <a:xfrm>
+            <a:off x="5238750" y="3952875"/>
+            <a:ext cx="1714500" cy="990600"/>
+            <a:chOff x="5238750" y="3952875"/>
+            <a:chExt cx="1714500" cy="990600"/>
+          </a:xfrm>
+        </p:grpSpPr>
+        <p:sp>
+          <p:nvSpPr>
+            <p:cNvPr id="18" name="Rectangle 18"/>
+            <p:cNvSpPr/>
+            <p:nvPr/>
+          </p:nvSpPr>
+          <p:spPr>
+            <a:xfrm>
+              <a:off x="5238750" y="3952875"/>
+              <a:ext cx="1714500" cy="990600"/>
+            </a:xfrm>
+            <a:prstGeom prst="roundRect">
+              <a:avLst>
+                <a:gd name="adj" fmla="val 17308"/>
+              </a:avLst>
+            </a:prstGeom>
+            <a:solidFill>
+              <a:srgbClr val="0F172A"/>
+            </a:solidFill>
+            <a:ln w="9525">
+              <a:solidFill>
+                <a:srgbClr val="334155"/>
+              </a:solidFill>
+            </a:ln>
+          </p:spPr>
+        </p:sp>
+        <p:sp>
+          <p:nvSpPr>
+            <p:cNvPr id="19" name="Rectangle 19"/>
+            <p:cNvSpPr/>
+            <p:nvPr/>
+          </p:nvSpPr>
+          <p:spPr>
+            <a:xfrm>
+              <a:off x="5267325" y="3981450"/>
+              <a:ext cx="1657350" cy="933450"/>
+            </a:xfrm>
+            <a:prstGeom prst="roundRect">
+              <a:avLst>
+                <a:gd name="adj" fmla="val 15306"/>
+              </a:avLst>
+            </a:prstGeom>
+            <a:solidFill>
+              <a:srgbClr val="1E293B"/>
+            </a:solidFill>
+            <a:ln>
+              <a:noFill/>
+            </a:ln>
+          </p:spPr>
+        </p:sp>
+        <p:sp>
+          <p:nvSpPr>
+            <p:cNvPr id="20" name="TextBox 20"/>
+            <p:cNvSpPr txBox="1"/>
+            <p:nvPr/>
+          </p:nvSpPr>
+          <p:spPr>
+            <a:xfrm>
+              <a:off x="5795775" y="4039552"/>
+              <a:ext cx="600449" cy="498729"/>
+            </a:xfrm>
+            <a:prstGeom prst="rect">
+              <a:avLst/>
+            </a:prstGeom>
+            <a:noFill/>
+            <a:ln>
+              <a:noFill/>
+            </a:ln>
+          </p:spPr>
+          <p:txBody>
+            <a:bodyPr wrap="none" lIns="0" tIns="0" rIns="0" bIns="0" anchor="t" anchorCtr="0">
+              <a:spAutoFit/>
+            </a:bodyPr>
+            <a:lstStyle/>
+            <a:p>
+              <a:pPr algn="ctr"/>
+              <a:r>
+                <a:rPr lang="en-US" sz="2550" b="1" spc="-75" dirty="0">
+                  <a:solidFill>
+                    <a:srgbClr val="38BDF8"/>
+                  </a:solidFill>
+                  <a:latin typeface="Inter"/>
+                  <a:ea typeface="Inter"/>
+                  <a:cs typeface="Inter"/>
+                </a:rPr>
+                <a:t>167</a:t>
+              </a:r>
+            </a:p>
+          </p:txBody>
+        </p:sp>
+        <p:sp>
+          <p:nvSpPr>
+            <p:cNvPr id="21" name="TextBox 21"/>
+            <p:cNvSpPr txBox="1"/>
+            <p:nvPr/>
+          </p:nvSpPr>
+          <p:spPr>
+            <a:xfrm>
+              <a:off x="5803723" y="4639628"/>
+              <a:ext cx="584553" cy="205359"/>
+            </a:xfrm>
+            <a:prstGeom prst="rect">
+              <a:avLst/>
+            </a:prstGeom>
+            <a:noFill/>
+            <a:ln>
+              <a:noFill/>
+            </a:ln>
+          </p:spPr>
+          <p:txBody>
+            <a:bodyPr wrap="none" lIns="0" tIns="0" rIns="0" bIns="0" anchor="t" anchorCtr="0">
+              <a:spAutoFit/>
+            </a:bodyPr>
+            <a:lstStyle/>
+            <a:p>
+              <a:pPr algn="ctr"/>
+              <a:r>
+                <a:rPr lang="en-US" sz="1050" dirty="0">
+                  <a:solidFill>
+                    <a:srgbClr val="94A3B8"/>
+                  </a:solidFill>
+                  <a:latin typeface="Inter"/>
+                  <a:ea typeface="Inter"/>
+                  <a:cs typeface="Inter"/>
+                </a:rPr>
+                <a:t>навыков</a:t>
+              </a:r>
+            </a:p>
+          </p:txBody>
+        </p:sp>
+      </p:grpSp>
+      <p:grpSp>
+        <p:nvGrpSpPr>
+          <p:cNvPr id="27" name="Group 27"/>
+          <p:cNvGrpSpPr/>
+          <p:nvPr/>
+        </p:nvGrpSpPr>
+        <p:grpSpPr>
+          <a:xfrm>
+            <a:off x="7334250" y="3952875"/>
+            <a:ext cx="1714500" cy="990600"/>
+            <a:chOff x="7334250" y="3952875"/>
+            <a:chExt cx="1714500" cy="990600"/>
+          </a:xfrm>
+        </p:grpSpPr>
+        <p:sp>
+          <p:nvSpPr>
+            <p:cNvPr id="23" name="Rectangle 23"/>
+            <p:cNvSpPr/>
+            <p:nvPr/>
+          </p:nvSpPr>
+          <p:spPr>
+            <a:xfrm>
+              <a:off x="7334250" y="3952875"/>
+              <a:ext cx="1714500" cy="990600"/>
+            </a:xfrm>
+            <a:prstGeom prst="roundRect">
+              <a:avLst>
+                <a:gd name="adj" fmla="val 17308"/>
+              </a:avLst>
+            </a:prstGeom>
+            <a:solidFill>
+              <a:srgbClr val="0F172A"/>
+            </a:solidFill>
+            <a:ln w="9525">
+              <a:solidFill>
+                <a:srgbClr val="334155"/>
+              </a:solidFill>
+            </a:ln>
+          </p:spPr>
+        </p:sp>
+        <p:sp>
+          <p:nvSpPr>
+            <p:cNvPr id="24" name="Rectangle 24"/>
+            <p:cNvSpPr/>
+            <p:nvPr/>
+          </p:nvSpPr>
+          <p:spPr>
+            <a:xfrm>
+              <a:off x="7362825" y="3981450"/>
+              <a:ext cx="1657350" cy="933450"/>
+            </a:xfrm>
+            <a:prstGeom prst="roundRect">
+              <a:avLst>
+                <a:gd name="adj" fmla="val 15306"/>
+              </a:avLst>
+            </a:prstGeom>
+            <a:solidFill>
+              <a:srgbClr val="1E293B"/>
+            </a:solidFill>
+            <a:ln>
+              <a:noFill/>
+            </a:ln>
+          </p:spPr>
+        </p:sp>
+        <p:sp>
+          <p:nvSpPr>
+            <p:cNvPr id="25" name="TextBox 25"/>
+            <p:cNvSpPr txBox="1"/>
+            <p:nvPr/>
+          </p:nvSpPr>
+          <p:spPr>
+            <a:xfrm>
+              <a:off x="7928397" y="4055745"/>
+              <a:ext cx="526207" cy="469392"/>
+            </a:xfrm>
+            <a:prstGeom prst="rect">
+              <a:avLst/>
+            </a:prstGeom>
+            <a:noFill/>
+            <a:ln>
+              <a:noFill/>
+            </a:ln>
+          </p:spPr>
+          <p:txBody>
+            <a:bodyPr wrap="none" lIns="0" tIns="0" rIns="0" bIns="0" anchor="t" anchorCtr="0">
+              <a:spAutoFit/>
+            </a:bodyPr>
+            <a:lstStyle/>
+            <a:p>
+              <a:pPr algn="ctr"/>
+              <a:r>
+                <a:rPr lang="en-US" sz="2400" b="1" dirty="0">
+                  <a:solidFill>
+                    <a:srgbClr val="38BDF8"/>
+                  </a:solidFill>
+                  <a:latin typeface="Inter"/>
+                  <a:ea typeface="Inter"/>
+                  <a:cs typeface="Inter"/>
+                </a:rPr>
+                <a:t>РФ</a:t>
+              </a:r>
+            </a:p>
+          </p:txBody>
+        </p:sp>
+        <p:sp>
+          <p:nvSpPr>
+            <p:cNvPr id="26" name="TextBox 26"/>
+            <p:cNvSpPr txBox="1"/>
+            <p:nvPr/>
+          </p:nvSpPr>
+          <p:spPr>
+            <a:xfrm>
+              <a:off x="7981207" y="4639628"/>
+              <a:ext cx="420586" cy="205359"/>
+            </a:xfrm>
+            <a:prstGeom prst="rect">
+              <a:avLst/>
+            </a:prstGeom>
+            <a:noFill/>
+            <a:ln>
+              <a:noFill/>
+            </a:ln>
+          </p:spPr>
+          <p:txBody>
+            <a:bodyPr wrap="none" lIns="0" tIns="0" rIns="0" bIns="0" anchor="t" anchorCtr="0">
+              <a:spAutoFit/>
+            </a:bodyPr>
+            <a:lstStyle/>
+            <a:p>
+              <a:pPr algn="ctr"/>
+              <a:r>
+                <a:rPr lang="en-US" sz="1050" dirty="0">
+                  <a:solidFill>
+                    <a:srgbClr val="94A3B8"/>
+                  </a:solidFill>
+                  <a:latin typeface="Inter"/>
+                  <a:ea typeface="Inter"/>
+                  <a:cs typeface="Inter"/>
+                </a:rPr>
+                <a:t>право</a:t>
+              </a:r>
+            </a:p>
+          </p:txBody>
+        </p:sp>
+      </p:grpSp>
+      <p:grpSp>
+        <p:nvGrpSpPr>
+          <p:cNvPr id="30" name="Group 30"/>
+          <p:cNvGrpSpPr/>
+          <p:nvPr/>
+        </p:nvGrpSpPr>
+        <p:grpSpPr>
+          <a:xfrm>
+            <a:off x="4539637" y="5276850"/>
+            <a:ext cx="3112725" cy="495300"/>
+            <a:chOff x="4539637" y="5276850"/>
+            <a:chExt cx="3112725" cy="495300"/>
+          </a:xfrm>
+        </p:grpSpPr>
+        <p:sp>
+          <p:nvSpPr>
+            <p:cNvPr id="28" name="Rectangle 28"/>
+            <p:cNvSpPr/>
+            <p:nvPr/>
+          </p:nvSpPr>
+          <p:spPr>
+            <a:xfrm>
+              <a:off x="4667250" y="5276850"/>
+              <a:ext cx="2857500" cy="495300"/>
+            </a:xfrm>
+            <a:prstGeom prst="roundRect">
+              <a:avLst>
+                <a:gd name="adj" fmla="val 50000"/>
+              </a:avLst>
+            </a:prstGeom>
+            <a:solidFill>
+              <a:srgbClr val="0EA5E9"/>
+            </a:solidFill>
+            <a:ln>
+              <a:noFill/>
+            </a:ln>
+          </p:spPr>
+        </p:sp>
+        <p:sp>
+          <p:nvSpPr>
+            <p:cNvPr id="29" name="TextBox 29"/>
+            <p:cNvSpPr txBox="1"/>
+            <p:nvPr/>
+          </p:nvSpPr>
+          <p:spPr>
+            <a:xfrm>
+              <a:off x="4539637" y="5453539"/>
+              <a:ext cx="3112725" cy="249364"/>
+            </a:xfrm>
+            <a:prstGeom prst="rect">
+              <a:avLst/>
+            </a:prstGeom>
+            <a:noFill/>
+            <a:ln>
+              <a:noFill/>
+            </a:ln>
+          </p:spPr>
+          <p:txBody>
+            <a:bodyPr wrap="none" lIns="0" tIns="0" rIns="0" bIns="0" anchor="t" anchorCtr="0">
+              <a:spAutoFit/>
+            </a:bodyPr>
+            <a:lstStyle/>
+            <a:p>
+              <a:pPr algn="ctr"/>
+              <a:r>
+                <a:rPr lang="en-US" sz="1280" b="1" spc="38" dirty="0">
+                  <a:solidFill>
+                    <a:srgbClr val="0F172A"/>
+                  </a:solidFill>
+                  <a:latin typeface="Inter"/>
+                  <a:ea typeface="Inter"/>
+                  <a:cs typeface="Inter"/>
+                </a:rPr>
+                <a:t>github.com/Osmosy/vector-legal</a:t>
+              </a:r>
+            </a:p>
+          </p:txBody>
+        </p:sp>
+      </p:grpSp>
+      <p:sp>
+        <p:nvSpPr>
+          <p:cNvPr id="31" name="TextBox 31"/>
           <p:cNvSpPr txBox="1"/>
           <p:nvPr/>
         </p:nvSpPr>
         <p:spPr>
           <a:xfrm>
-            <a:off x="3888701" y="4044315"/>
-            <a:ext cx="4414599" cy="352044"/>
+            <a:off x="4134636" y="6173152"/>
+            <a:ext cx="3922728" cy="205359"/>
           </a:xfrm>
           <a:prstGeom prst="rect">
             <a:avLst/>
@@ -3368,7 +4010,7 @@
           <a:p>
             <a:pPr algn="ctr"/>
             <a:r>
-              <a:rPr lang="en-US" sz="1800" dirty="0">
+              <a:rPr lang="en-US" sz="1050" dirty="0">
                 <a:solidFill>
                   <a:srgbClr val="94A3B8"/>
                 </a:solidFill>
@@ -3376,384 +4018,21 @@
                 <a:ea typeface="Inter"/>
                 <a:cs typeface="Inter"/>
               </a:rPr>
-              <a:t>12 плагинов · 167 навыков · право РФ</a:t>
+              <a:t>Адаптация из anthropics/claude-for-legal · Apache-2.0</a:t>
             </a:r>
           </a:p>
         </p:txBody>
       </p:sp>
-      <p:grpSp>
-        <p:nvGrpSpPr>
-          <p:cNvPr id="13" name="Group 13"/>
-          <p:cNvGrpSpPr/>
-          <p:nvPr/>
-        </p:nvGrpSpPr>
-        <p:grpSpPr>
-          <a:xfrm>
-            <a:off x="3048000" y="4667250"/>
-            <a:ext cx="1828800" cy="580739"/>
-            <a:chOff x="3048000" y="4667250"/>
-            <a:chExt cx="1828800" cy="580739"/>
-          </a:xfrm>
-        </p:grpSpPr>
-        <p:sp>
-          <p:nvSpPr>
-            <p:cNvPr id="10" name="Rectangle 10"/>
-            <p:cNvSpPr/>
-            <p:nvPr/>
-          </p:nvSpPr>
-          <p:spPr>
-            <a:xfrm>
-              <a:off x="3048000" y="4667250"/>
-              <a:ext cx="1828800" cy="571500"/>
-            </a:xfrm>
-            <a:prstGeom prst="roundRect">
-              <a:avLst>
-                <a:gd name="adj" fmla="val 20000"/>
-              </a:avLst>
-            </a:prstGeom>
-            <a:solidFill>
-              <a:srgbClr val="1E293B"/>
-            </a:solidFill>
-            <a:ln w="9525">
-              <a:solidFill>
-                <a:srgbClr val="334155"/>
-              </a:solidFill>
-            </a:ln>
-          </p:spPr>
-        </p:sp>
-        <p:sp>
-          <p:nvSpPr>
-            <p:cNvPr id="11" name="TextBox 11"/>
-            <p:cNvSpPr txBox="1"/>
-            <p:nvPr/>
-          </p:nvSpPr>
-          <p:spPr>
-            <a:xfrm>
-              <a:off x="3306804" y="4831556"/>
-              <a:ext cx="1311192" cy="220028"/>
-            </a:xfrm>
-            <a:prstGeom prst="rect">
-              <a:avLst/>
-            </a:prstGeom>
-            <a:noFill/>
-            <a:ln>
-              <a:noFill/>
-            </a:ln>
-          </p:spPr>
-          <p:txBody>
-            <a:bodyPr wrap="none" lIns="0" tIns="0" rIns="0" bIns="0" anchor="t" anchorCtr="0">
-              <a:spAutoFit/>
-            </a:bodyPr>
-            <a:lstStyle/>
-            <a:p>
-              <a:pPr algn="ctr"/>
-              <a:r>
-                <a:rPr lang="en-US" sz="1120" dirty="0">
-                  <a:solidFill>
-                    <a:srgbClr val="94A3B8"/>
-                  </a:solidFill>
-                  <a:latin typeface="Inter"/>
-                  <a:ea typeface="Inter"/>
-                  <a:cs typeface="Inter"/>
-                </a:rPr>
-                <a:t>Профиль практики</a:t>
-              </a:r>
-            </a:p>
-          </p:txBody>
-        </p:sp>
-        <p:sp>
-          <p:nvSpPr>
-            <p:cNvPr id="12" name="TextBox 12"/>
-            <p:cNvSpPr txBox="1"/>
-            <p:nvPr/>
-          </p:nvSpPr>
-          <p:spPr>
-            <a:xfrm>
-              <a:off x="3230105" y="5057299"/>
-              <a:ext cx="1464589" cy="190690"/>
-            </a:xfrm>
-            <a:prstGeom prst="rect">
-              <a:avLst/>
-            </a:prstGeom>
-            <a:noFill/>
-            <a:ln>
-              <a:noFill/>
-            </a:ln>
-          </p:spPr>
-          <p:txBody>
-            <a:bodyPr wrap="none" lIns="0" tIns="0" rIns="0" bIns="0" anchor="t" anchorCtr="0">
-              <a:spAutoFit/>
-            </a:bodyPr>
-            <a:lstStyle/>
-            <a:p>
-              <a:pPr algn="ctr"/>
-              <a:r>
-                <a:rPr lang="en-US" sz="980" dirty="0">
-                  <a:solidFill>
-                    <a:srgbClr val="60A5FA"/>
-                  </a:solidFill>
-                  <a:latin typeface="Inter"/>
-                  <a:ea typeface="Inter"/>
-                  <a:cs typeface="Inter"/>
-                </a:rPr>
-                <a:t>Правила твоей команды</a:t>
-              </a:r>
-            </a:p>
-          </p:txBody>
-        </p:sp>
-      </p:grpSp>
-      <p:grpSp>
-        <p:nvGrpSpPr>
-          <p:cNvPr id="17" name="Group 17"/>
-          <p:cNvGrpSpPr/>
-          <p:nvPr/>
-        </p:nvGrpSpPr>
-        <p:grpSpPr>
-          <a:xfrm>
-            <a:off x="5181600" y="4667250"/>
-            <a:ext cx="1828800" cy="580739"/>
-            <a:chOff x="5181600" y="4667250"/>
-            <a:chExt cx="1828800" cy="580739"/>
-          </a:xfrm>
-        </p:grpSpPr>
-        <p:sp>
-          <p:nvSpPr>
-            <p:cNvPr id="14" name="Rectangle 14"/>
-            <p:cNvSpPr/>
-            <p:nvPr/>
-          </p:nvSpPr>
-          <p:spPr>
-            <a:xfrm>
-              <a:off x="5181600" y="4667250"/>
-              <a:ext cx="1828800" cy="571500"/>
-            </a:xfrm>
-            <a:prstGeom prst="roundRect">
-              <a:avLst>
-                <a:gd name="adj" fmla="val 20000"/>
-              </a:avLst>
-            </a:prstGeom>
-            <a:solidFill>
-              <a:srgbClr val="1E293B"/>
-            </a:solidFill>
-            <a:ln w="9525">
-              <a:solidFill>
-                <a:srgbClr val="334155"/>
-              </a:solidFill>
-            </a:ln>
-          </p:spPr>
-        </p:sp>
-        <p:sp>
-          <p:nvSpPr>
-            <p:cNvPr id="15" name="TextBox 15"/>
-            <p:cNvSpPr txBox="1"/>
-            <p:nvPr/>
-          </p:nvSpPr>
-          <p:spPr>
-            <a:xfrm>
-              <a:off x="5692735" y="4831556"/>
-              <a:ext cx="806529" cy="220028"/>
-            </a:xfrm>
-            <a:prstGeom prst="rect">
-              <a:avLst/>
-            </a:prstGeom>
-            <a:noFill/>
-            <a:ln>
-              <a:noFill/>
-            </a:ln>
-          </p:spPr>
-          <p:txBody>
-            <a:bodyPr wrap="none" lIns="0" tIns="0" rIns="0" bIns="0" anchor="t" anchorCtr="0">
-              <a:spAutoFit/>
-            </a:bodyPr>
-            <a:lstStyle/>
-            <a:p>
-              <a:pPr algn="ctr"/>
-              <a:r>
-                <a:rPr lang="en-US" sz="1120" dirty="0">
-                  <a:solidFill>
-                    <a:srgbClr val="94A3B8"/>
-                  </a:solidFill>
-                  <a:latin typeface="Inter"/>
-                  <a:ea typeface="Inter"/>
-                  <a:cs typeface="Inter"/>
-                </a:rPr>
-                <a:t>12 доменов</a:t>
-              </a:r>
-            </a:p>
-          </p:txBody>
-        </p:sp>
-        <p:sp>
-          <p:nvSpPr>
-            <p:cNvPr id="16" name="TextBox 16"/>
-            <p:cNvSpPr txBox="1"/>
-            <p:nvPr/>
-          </p:nvSpPr>
-          <p:spPr>
-            <a:xfrm>
-              <a:off x="5683923" y="5057299"/>
-              <a:ext cx="824154" cy="190690"/>
-            </a:xfrm>
-            <a:prstGeom prst="rect">
-              <a:avLst/>
-            </a:prstGeom>
-            <a:noFill/>
-            <a:ln>
-              <a:noFill/>
-            </a:ln>
-          </p:spPr>
-          <p:txBody>
-            <a:bodyPr wrap="none" lIns="0" tIns="0" rIns="0" bIns="0" anchor="t" anchorCtr="0">
-              <a:spAutoFit/>
-            </a:bodyPr>
-            <a:lstStyle/>
-            <a:p>
-              <a:pPr algn="ctr"/>
-              <a:r>
-                <a:rPr lang="en-US" sz="980" dirty="0">
-                  <a:solidFill>
-                    <a:srgbClr val="60A5FA"/>
-                  </a:solidFill>
-                  <a:latin typeface="Inter"/>
-                  <a:ea typeface="Inter"/>
-                  <a:cs typeface="Inter"/>
-                </a:rPr>
-                <a:t>Всё право РФ</a:t>
-              </a:r>
-            </a:p>
-          </p:txBody>
-        </p:sp>
-      </p:grpSp>
-      <p:grpSp>
-        <p:nvGrpSpPr>
-          <p:cNvPr id="21" name="Group 21"/>
-          <p:cNvGrpSpPr/>
-          <p:nvPr/>
-        </p:nvGrpSpPr>
-        <p:grpSpPr>
-          <a:xfrm>
-            <a:off x="7315200" y="4667250"/>
-            <a:ext cx="1828800" cy="580739"/>
-            <a:chOff x="7315200" y="4667250"/>
-            <a:chExt cx="1828800" cy="580739"/>
-          </a:xfrm>
-        </p:grpSpPr>
-        <p:sp>
-          <p:nvSpPr>
-            <p:cNvPr id="18" name="Rectangle 18"/>
-            <p:cNvSpPr/>
-            <p:nvPr/>
-          </p:nvSpPr>
-          <p:spPr>
-            <a:xfrm>
-              <a:off x="7315200" y="4667250"/>
-              <a:ext cx="1828800" cy="571500"/>
-            </a:xfrm>
-            <a:prstGeom prst="roundRect">
-              <a:avLst>
-                <a:gd name="adj" fmla="val 20000"/>
-              </a:avLst>
-            </a:prstGeom>
-            <a:solidFill>
-              <a:srgbClr val="1E293B"/>
-            </a:solidFill>
-            <a:ln w="9525">
-              <a:solidFill>
-                <a:srgbClr val="334155"/>
-              </a:solidFill>
-            </a:ln>
-          </p:spPr>
-        </p:sp>
-        <p:sp>
-          <p:nvSpPr>
-            <p:cNvPr id="19" name="TextBox 19"/>
-            <p:cNvSpPr txBox="1"/>
-            <p:nvPr/>
-          </p:nvSpPr>
-          <p:spPr>
-            <a:xfrm>
-              <a:off x="7698927" y="4831556"/>
-              <a:ext cx="1061347" cy="220028"/>
-            </a:xfrm>
-            <a:prstGeom prst="rect">
-              <a:avLst/>
-            </a:prstGeom>
-            <a:noFill/>
-            <a:ln>
-              <a:noFill/>
-            </a:ln>
-          </p:spPr>
-          <p:txBody>
-            <a:bodyPr wrap="none" lIns="0" tIns="0" rIns="0" bIns="0" anchor="t" anchorCtr="0">
-              <a:spAutoFit/>
-            </a:bodyPr>
-            <a:lstStyle/>
-            <a:p>
-              <a:pPr algn="ctr"/>
-              <a:r>
-                <a:rPr lang="en-US" sz="1120" dirty="0">
-                  <a:solidFill>
-                    <a:srgbClr val="94A3B8"/>
-                  </a:solidFill>
-                  <a:latin typeface="Inter"/>
-                  <a:ea typeface="Inter"/>
-                  <a:cs typeface="Inter"/>
-                </a:rPr>
-                <a:t>Правовые базы</a:t>
-              </a:r>
-            </a:p>
-          </p:txBody>
-        </p:sp>
-        <p:sp>
-          <p:nvSpPr>
-            <p:cNvPr id="20" name="TextBox 20"/>
-            <p:cNvSpPr txBox="1"/>
-            <p:nvPr/>
-          </p:nvSpPr>
-          <p:spPr>
-            <a:xfrm>
-              <a:off x="7674802" y="5057299"/>
-              <a:ext cx="1109596" cy="190690"/>
-            </a:xfrm>
-            <a:prstGeom prst="rect">
-              <a:avLst/>
-            </a:prstGeom>
-            <a:noFill/>
-            <a:ln>
-              <a:noFill/>
-            </a:ln>
-          </p:spPr>
-          <p:txBody>
-            <a:bodyPr wrap="none" lIns="0" tIns="0" rIns="0" bIns="0" anchor="t" anchorCtr="0">
-              <a:spAutoFit/>
-            </a:bodyPr>
-            <a:lstStyle/>
-            <a:p>
-              <a:pPr algn="ctr"/>
-              <a:r>
-                <a:rPr lang="en-US" sz="980" dirty="0">
-                  <a:solidFill>
-                    <a:srgbClr val="60A5FA"/>
-                  </a:solidFill>
-                  <a:latin typeface="Inter"/>
-                  <a:ea typeface="Inter"/>
-                  <a:cs typeface="Inter"/>
-                </a:rPr>
-                <a:t>13 источников РФ</a:t>
-              </a:r>
-            </a:p>
-          </p:txBody>
-        </p:sp>
-      </p:grpSp>
-      <p:sp>
-        <p:nvSpPr>
-          <p:cNvPr id="22" name="TextBox 22"/>
+      <p:sp>
+        <p:nvSpPr>
+          <p:cNvPr id="32" name="TextBox 32"/>
           <p:cNvSpPr txBox="1"/>
           <p:nvPr/>
         </p:nvSpPr>
         <p:spPr>
           <a:xfrm>
-            <a:off x="4009725" y="6212681"/>
-            <a:ext cx="4172549" cy="220028"/>
+            <a:off x="5119940" y="6475095"/>
+            <a:ext cx="1952121" cy="176212"/>
           </a:xfrm>
           <a:prstGeom prst="rect">
             <a:avLst/>
@@ -3771,47 +4050,7 @@
           <a:p>
             <a:pPr algn="ctr"/>
             <a:r>
-              <a:rPr lang="en-US" sz="1120" dirty="0">
-                <a:solidFill>
-                  <a:srgbClr val="94A3B8"/>
-                </a:solidFill>
-                <a:latin typeface="Inter"/>
-                <a:ea typeface="Inter"/>
-                <a:cs typeface="Inter"/>
-              </a:rPr>
-              <a:t>Адаптация из anthropics/claude-for-legal (Apache-2.0)</a:t>
-            </a:r>
-          </a:p>
-        </p:txBody>
-      </p:sp>
-      <p:sp>
-        <p:nvSpPr>
-          <p:cNvPr id="23" name="TextBox 23"/>
-          <p:cNvSpPr txBox="1"/>
-          <p:nvPr/>
-        </p:nvSpPr>
-        <p:spPr>
-          <a:xfrm>
-            <a:off x="5113376" y="6466999"/>
-            <a:ext cx="1965248" cy="190690"/>
-          </a:xfrm>
-          <a:prstGeom prst="rect">
-            <a:avLst/>
-          </a:prstGeom>
-          <a:noFill/>
-          <a:ln>
-            <a:noFill/>
-          </a:ln>
-        </p:spPr>
-        <p:txBody>
-          <a:bodyPr wrap="none" lIns="0" tIns="0" rIns="0" bIns="0" anchor="t" anchorCtr="0">
-            <a:spAutoFit/>
-          </a:bodyPr>
-          <a:lstStyle/>
-          <a:p>
-            <a:pPr algn="ctr"/>
-            <a:r>
-              <a:rPr lang="en-US" sz="980" dirty="0">
+              <a:rPr lang="en-US" sz="900" spc="38" dirty="0">
                 <a:solidFill>
                   <a:srgbClr val="64748B"/>
                 </a:solidFill>
@@ -3823,39 +4062,6 @@
             </a:r>
           </a:p>
         </p:txBody>
-      </p:sp>
-      <p:sp>
-        <p:nvSpPr>
-          <p:cNvPr id="24" name="Rectangle 24"/>
-          <p:cNvSpPr/>
-          <p:nvPr/>
-        </p:nvSpPr>
-        <p:spPr>
-          <a:xfrm>
-            <a:off x="0" y="6819900"/>
-            <a:ext cx="12192000" cy="38100"/>
-          </a:xfrm>
-          <a:prstGeom prst="rect">
-            <a:avLst/>
-          </a:prstGeom>
-          <a:gradFill>
-            <a:gsLst>
-              <a:gs pos="0">
-                <a:srgbClr val="38BDF8"/>
-              </a:gs>
-              <a:gs pos="50000">
-                <a:srgbClr val="60A5FA"/>
-              </a:gs>
-              <a:gs pos="100000">
-                <a:srgbClr val="38BDF8"/>
-              </a:gs>
-            </a:gsLst>
-            <a:lin ang="0" scaled="1"/>
-          </a:gradFill>
-          <a:ln>
-            <a:noFill/>
-          </a:ln>
-        </p:spPr>
       </p:sp>
     </p:spTree>
   </p:cSld>
@@ -3989,8 +4195,8 @@
         </p:nvSpPr>
         <p:spPr>
           <a:xfrm>
-            <a:off x="9548278" y="6570345"/>
-            <a:ext cx="2267485" cy="176212"/>
+            <a:off x="9523801" y="6570345"/>
+            <a:ext cx="2291961" cy="176212"/>
           </a:xfrm>
           <a:prstGeom prst="rect">
             <a:avLst/>
@@ -4016,7 +4222,7 @@
                 <a:ea typeface="Inter"/>
                 <a:cs typeface="Inter"/>
               </a:rPr>
-              <a:t>Vector Legal · Hermes Agent · Оsmosy</a:t>
+              <a:t>Vector Legal · Hermes Agent · Osmosy</a:t>
             </a:r>
           </a:p>
         </p:txBody>
@@ -4030,7 +4236,7 @@
         <p:spPr>
           <a:xfrm>
             <a:off x="566166" y="553402"/>
-            <a:ext cx="2164491" cy="205359"/>
+            <a:ext cx="2279267" cy="205359"/>
           </a:xfrm>
           <a:prstGeom prst="rect">
             <a:avLst/>
@@ -4070,7 +4276,7 @@
         <p:spPr>
           <a:xfrm>
             <a:off x="556260" y="819150"/>
-            <a:ext cx="3458970" cy="586740"/>
+            <a:ext cx="3676179" cy="586740"/>
           </a:xfrm>
           <a:prstGeom prst="rect">
             <a:avLst/>
@@ -4246,8 +4452,8 @@
           </p:nvSpPr>
           <p:spPr>
             <a:xfrm>
-              <a:off x="1808194" y="2807018"/>
-              <a:ext cx="1336611" cy="264033"/>
+              <a:off x="1762181" y="2807018"/>
+              <a:ext cx="1428639" cy="264033"/>
             </a:xfrm>
             <a:prstGeom prst="rect">
               <a:avLst/>
@@ -4286,8 +4492,8 @@
           </p:nvSpPr>
           <p:spPr>
             <a:xfrm>
-              <a:off x="1378853" y="3133249"/>
-              <a:ext cx="2195293" cy="190690"/>
+              <a:off x="1245653" y="3106102"/>
+              <a:ext cx="2461694" cy="205359"/>
             </a:xfrm>
             <a:prstGeom prst="rect">
               <a:avLst/>
@@ -4305,87 +4511,87 @@
             <a:p>
               <a:pPr algn="ctr"/>
               <a:r>
+                <a:rPr lang="en-US" sz="1050" dirty="0">
+                  <a:solidFill>
+                    <a:srgbClr val="94A3B8"/>
+                  </a:solidFill>
+                  <a:latin typeface="Inter"/>
+                  <a:ea typeface="Inter"/>
+                  <a:cs typeface="Inter"/>
+                </a:rPr>
+                <a:t>12 плагинов — не ставь все сразу,</a:t>
+              </a:r>
+            </a:p>
+          </p:txBody>
+        </p:sp>
+        <p:sp>
+          <p:nvSpPr>
+            <p:cNvPr id="14" name="TextBox 14"/>
+            <p:cNvSpPr txBox="1"/>
+            <p:nvPr/>
+          </p:nvSpPr>
+          <p:spPr>
+            <a:xfrm>
+              <a:off x="1531889" y="3391852"/>
+              <a:ext cx="1889223" cy="205359"/>
+            </a:xfrm>
+            <a:prstGeom prst="rect">
+              <a:avLst/>
+            </a:prstGeom>
+            <a:noFill/>
+            <a:ln>
+              <a:noFill/>
+            </a:ln>
+          </p:spPr>
+          <p:txBody>
+            <a:bodyPr wrap="none" lIns="0" tIns="0" rIns="0" bIns="0" anchor="t" anchorCtr="0">
+              <a:spAutoFit/>
+            </a:bodyPr>
+            <a:lstStyle/>
+            <a:p>
+              <a:pPr algn="ctr"/>
+              <a:r>
+                <a:rPr lang="en-US" sz="1050" dirty="0">
+                  <a:solidFill>
+                    <a:srgbClr val="94A3B8"/>
+                  </a:solidFill>
+                  <a:latin typeface="Inter"/>
+                  <a:ea typeface="Inter"/>
+                  <a:cs typeface="Inter"/>
+                </a:rPr>
+                <a:t>поставь 1-2 по своей роли</a:t>
+              </a:r>
+            </a:p>
+          </p:txBody>
+        </p:sp>
+        <p:sp>
+          <p:nvSpPr>
+            <p:cNvPr id="15" name="TextBox 15"/>
+            <p:cNvSpPr txBox="1"/>
+            <p:nvPr/>
+          </p:nvSpPr>
+          <p:spPr>
+            <a:xfrm>
+              <a:off x="1700992" y="3685699"/>
+              <a:ext cx="1551016" cy="190690"/>
+            </a:xfrm>
+            <a:prstGeom prst="rect">
+              <a:avLst/>
+            </a:prstGeom>
+            <a:noFill/>
+            <a:ln>
+              <a:noFill/>
+            </a:ln>
+          </p:spPr>
+          <p:txBody>
+            <a:bodyPr wrap="none" lIns="0" tIns="0" rIns="0" bIns="0" anchor="t" anchorCtr="0">
+              <a:spAutoFit/>
+            </a:bodyPr>
+            <a:lstStyle/>
+            <a:p>
+              <a:pPr algn="ctr"/>
+              <a:r>
                 <a:rPr lang="en-US" sz="980" dirty="0">
-                  <a:solidFill>
-                    <a:srgbClr val="94A3B8"/>
-                  </a:solidFill>
-                  <a:latin typeface="Inter"/>
-                  <a:ea typeface="Inter"/>
-                  <a:cs typeface="Inter"/>
-                </a:rPr>
-                <a:t>12 плагинов — не ставь все сразу,</a:t>
-              </a:r>
-            </a:p>
-          </p:txBody>
-        </p:sp>
-        <p:sp>
-          <p:nvSpPr>
-            <p:cNvPr id="14" name="TextBox 14"/>
-            <p:cNvSpPr txBox="1"/>
-            <p:nvPr/>
-          </p:nvSpPr>
-          <p:spPr>
-            <a:xfrm>
-              <a:off x="1634800" y="3342799"/>
-              <a:ext cx="1683401" cy="190690"/>
-            </a:xfrm>
-            <a:prstGeom prst="rect">
-              <a:avLst/>
-            </a:prstGeom>
-            <a:noFill/>
-            <a:ln>
-              <a:noFill/>
-            </a:ln>
-          </p:spPr>
-          <p:txBody>
-            <a:bodyPr wrap="none" lIns="0" tIns="0" rIns="0" bIns="0" anchor="t" anchorCtr="0">
-              <a:spAutoFit/>
-            </a:bodyPr>
-            <a:lstStyle/>
-            <a:p>
-              <a:pPr algn="ctr"/>
-              <a:r>
-                <a:rPr lang="en-US" sz="980" dirty="0">
-                  <a:solidFill>
-                    <a:srgbClr val="94A3B8"/>
-                  </a:solidFill>
-                  <a:latin typeface="Inter"/>
-                  <a:ea typeface="Inter"/>
-                  <a:cs typeface="Inter"/>
-                </a:rPr>
-                <a:t>поставь 1-2 по своей роли</a:t>
-              </a:r>
-            </a:p>
-          </p:txBody>
-        </p:sp>
-        <p:sp>
-          <p:nvSpPr>
-            <p:cNvPr id="15" name="TextBox 15"/>
-            <p:cNvSpPr txBox="1"/>
-            <p:nvPr/>
-          </p:nvSpPr>
-          <p:spPr>
-            <a:xfrm>
-              <a:off x="1796932" y="3617595"/>
-              <a:ext cx="1359137" cy="176212"/>
-            </a:xfrm>
-            <a:prstGeom prst="rect">
-              <a:avLst/>
-            </a:prstGeom>
-            <a:noFill/>
-            <a:ln>
-              <a:noFill/>
-            </a:ln>
-          </p:spPr>
-          <p:txBody>
-            <a:bodyPr wrap="none" lIns="0" tIns="0" rIns="0" bIns="0" anchor="t" anchorCtr="0">
-              <a:spAutoFit/>
-            </a:bodyPr>
-            <a:lstStyle/>
-            <a:p>
-              <a:pPr algn="ctr"/>
-              <a:r>
-                <a:rPr lang="en-US" sz="900" dirty="0">
                   <a:solidFill>
                     <a:srgbClr val="60A5FA"/>
                   </a:solidFill>
@@ -4511,8 +4717,8 @@
           </p:nvSpPr>
           <p:spPr>
             <a:xfrm>
-              <a:off x="5322760" y="2807018"/>
-              <a:ext cx="1546479" cy="264033"/>
+              <a:off x="5271030" y="2807018"/>
+              <a:ext cx="1649941" cy="264033"/>
             </a:xfrm>
             <a:prstGeom prst="rect">
               <a:avLst/>
@@ -4551,8 +4757,8 @@
           </p:nvSpPr>
           <p:spPr>
             <a:xfrm>
-              <a:off x="5267975" y="3133249"/>
-              <a:ext cx="1656050" cy="190690"/>
+              <a:off x="5197899" y="3106102"/>
+              <a:ext cx="1796203" cy="205359"/>
             </a:xfrm>
             <a:prstGeom prst="rect">
               <a:avLst/>
@@ -4570,87 +4776,87 @@
             <a:p>
               <a:pPr algn="ctr"/>
               <a:r>
+                <a:rPr lang="en-US" sz="1050" dirty="0">
+                  <a:solidFill>
+                    <a:srgbClr val="94A3B8"/>
+                  </a:solidFill>
+                  <a:latin typeface="Inter"/>
+                  <a:ea typeface="Inter"/>
+                  <a:cs typeface="Inter"/>
+                </a:rPr>
+                <a:t>Cold-start: 2 мин (quick)</a:t>
+              </a:r>
+            </a:p>
+          </p:txBody>
+        </p:sp>
+        <p:sp>
+          <p:nvSpPr>
+            <p:cNvPr id="22" name="TextBox 22"/>
+            <p:cNvSpPr txBox="1"/>
+            <p:nvPr/>
+          </p:nvSpPr>
+          <p:spPr>
+            <a:xfrm>
+              <a:off x="5505473" y="3391852"/>
+              <a:ext cx="1181054" cy="205359"/>
+            </a:xfrm>
+            <a:prstGeom prst="rect">
+              <a:avLst/>
+            </a:prstGeom>
+            <a:noFill/>
+            <a:ln>
+              <a:noFill/>
+            </a:ln>
+          </p:spPr>
+          <p:txBody>
+            <a:bodyPr wrap="none" lIns="0" tIns="0" rIns="0" bIns="0" anchor="t" anchorCtr="0">
+              <a:spAutoFit/>
+            </a:bodyPr>
+            <a:lstStyle/>
+            <a:p>
+              <a:pPr algn="ctr"/>
+              <a:r>
+                <a:rPr lang="en-US" sz="1050" dirty="0">
+                  <a:solidFill>
+                    <a:srgbClr val="94A3B8"/>
+                  </a:solidFill>
+                  <a:latin typeface="Inter"/>
+                  <a:ea typeface="Inter"/>
+                  <a:cs typeface="Inter"/>
+                </a:rPr>
+                <a:t>или 15 мин (full)</a:t>
+              </a:r>
+            </a:p>
+          </p:txBody>
+        </p:sp>
+        <p:sp>
+          <p:nvSpPr>
+            <p:cNvPr id="23" name="TextBox 23"/>
+            <p:cNvSpPr txBox="1"/>
+            <p:nvPr/>
+          </p:nvSpPr>
+          <p:spPr>
+            <a:xfrm>
+              <a:off x="5320135" y="3685699"/>
+              <a:ext cx="1551729" cy="190690"/>
+            </a:xfrm>
+            <a:prstGeom prst="rect">
+              <a:avLst/>
+            </a:prstGeom>
+            <a:noFill/>
+            <a:ln>
+              <a:noFill/>
+            </a:ln>
+          </p:spPr>
+          <p:txBody>
+            <a:bodyPr wrap="none" lIns="0" tIns="0" rIns="0" bIns="0" anchor="t" anchorCtr="0">
+              <a:spAutoFit/>
+            </a:bodyPr>
+            <a:lstStyle/>
+            <a:p>
+              <a:pPr algn="ctr"/>
+              <a:r>
                 <a:rPr lang="en-US" sz="980" dirty="0">
-                  <a:solidFill>
-                    <a:srgbClr val="94A3B8"/>
-                  </a:solidFill>
-                  <a:latin typeface="Inter"/>
-                  <a:ea typeface="Inter"/>
-                  <a:cs typeface="Inter"/>
-                </a:rPr>
-                <a:t>Cold-start: 2 мин (quick)</a:t>
-              </a:r>
-            </a:p>
-          </p:txBody>
-        </p:sp>
-        <p:sp>
-          <p:nvSpPr>
-            <p:cNvPr id="22" name="TextBox 22"/>
-            <p:cNvSpPr txBox="1"/>
-            <p:nvPr/>
-          </p:nvSpPr>
-          <p:spPr>
-            <a:xfrm>
-              <a:off x="5559466" y="3342799"/>
-              <a:ext cx="1073067" cy="190690"/>
-            </a:xfrm>
-            <a:prstGeom prst="rect">
-              <a:avLst/>
-            </a:prstGeom>
-            <a:noFill/>
-            <a:ln>
-              <a:noFill/>
-            </a:ln>
-          </p:spPr>
-          <p:txBody>
-            <a:bodyPr wrap="none" lIns="0" tIns="0" rIns="0" bIns="0" anchor="t" anchorCtr="0">
-              <a:spAutoFit/>
-            </a:bodyPr>
-            <a:lstStyle/>
-            <a:p>
-              <a:pPr algn="ctr"/>
-              <a:r>
-                <a:rPr lang="en-US" sz="980" dirty="0">
-                  <a:solidFill>
-                    <a:srgbClr val="94A3B8"/>
-                  </a:solidFill>
-                  <a:latin typeface="Inter"/>
-                  <a:ea typeface="Inter"/>
-                  <a:cs typeface="Inter"/>
-                </a:rPr>
-                <a:t>или 15 мин (full)</a:t>
-              </a:r>
-            </a:p>
-          </p:txBody>
-        </p:sp>
-        <p:sp>
-          <p:nvSpPr>
-            <p:cNvPr id="23" name="TextBox 23"/>
-            <p:cNvSpPr txBox="1"/>
-            <p:nvPr/>
-          </p:nvSpPr>
-          <p:spPr>
-            <a:xfrm>
-              <a:off x="5419735" y="3617595"/>
-              <a:ext cx="1352531" cy="176212"/>
-            </a:xfrm>
-            <a:prstGeom prst="rect">
-              <a:avLst/>
-            </a:prstGeom>
-            <a:noFill/>
-            <a:ln>
-              <a:noFill/>
-            </a:ln>
-          </p:spPr>
-          <p:txBody>
-            <a:bodyPr wrap="none" lIns="0" tIns="0" rIns="0" bIns="0" anchor="t" anchorCtr="0">
-              <a:spAutoFit/>
-            </a:bodyPr>
-            <a:lstStyle/>
-            <a:p>
-              <a:pPr algn="ctr"/>
-              <a:r>
-                <a:rPr lang="en-US" sz="900" dirty="0">
                   <a:solidFill>
                     <a:srgbClr val="60A5FA"/>
                   </a:solidFill>
@@ -4776,8 +4982,8 @@
           </p:nvSpPr>
           <p:spPr>
             <a:xfrm>
-              <a:off x="9075953" y="2807018"/>
-              <a:ext cx="1279094" cy="264033"/>
+              <a:off x="9029939" y="2807018"/>
+              <a:ext cx="1371122" cy="264033"/>
             </a:xfrm>
             <a:prstGeom prst="rect">
               <a:avLst/>
@@ -4816,8 +5022,8 @@
           </p:nvSpPr>
           <p:spPr>
             <a:xfrm>
-              <a:off x="8819109" y="3133249"/>
-              <a:ext cx="1792781" cy="190690"/>
+              <a:off x="8692768" y="3106102"/>
+              <a:ext cx="2045464" cy="205359"/>
             </a:xfrm>
             <a:prstGeom prst="rect">
               <a:avLst/>
@@ -4835,95 +5041,95 @@
             <a:p>
               <a:pPr algn="ctr"/>
               <a:r>
+                <a:rPr lang="en-US" sz="1050" dirty="0">
+                  <a:solidFill>
+                    <a:srgbClr val="94A3B8"/>
+                  </a:solidFill>
+                  <a:latin typeface="Inter"/>
+                  <a:ea typeface="Inter"/>
+                  <a:cs typeface="Inter"/>
+                </a:rPr>
+                <a:t>Все навыки домена работают</a:t>
+              </a:r>
+            </a:p>
+          </p:txBody>
+        </p:sp>
+        <p:sp>
+          <p:nvSpPr>
+            <p:cNvPr id="30" name="TextBox 30"/>
+            <p:cNvSpPr txBox="1"/>
+            <p:nvPr/>
+          </p:nvSpPr>
+          <p:spPr>
+            <a:xfrm>
+              <a:off x="8744739" y="3391852"/>
+              <a:ext cx="1941523" cy="205359"/>
+            </a:xfrm>
+            <a:prstGeom prst="rect">
+              <a:avLst/>
+            </a:prstGeom>
+            <a:noFill/>
+            <a:ln>
+              <a:noFill/>
+            </a:ln>
+          </p:spPr>
+          <p:txBody>
+            <a:bodyPr wrap="none" lIns="0" tIns="0" rIns="0" bIns="0" anchor="t" anchorCtr="0">
+              <a:spAutoFit/>
+            </a:bodyPr>
+            <a:lstStyle/>
+            <a:p>
+              <a:pPr algn="ctr"/>
+              <a:r>
+                <a:rPr lang="en-US" sz="1050" dirty="0">
+                  <a:solidFill>
+                    <a:srgbClr val="94A3B8"/>
+                  </a:solidFill>
+                  <a:latin typeface="Inter"/>
+                  <a:ea typeface="Inter"/>
+                  <a:cs typeface="Inter"/>
+                </a:rPr>
+                <a:t>по правилам твоей команды</a:t>
+              </a:r>
+            </a:p>
+          </p:txBody>
+        </p:sp>
+        <p:sp>
+          <p:nvSpPr>
+            <p:cNvPr id="31" name="TextBox 31"/>
+            <p:cNvSpPr txBox="1"/>
+            <p:nvPr/>
+          </p:nvSpPr>
+          <p:spPr>
+            <a:xfrm>
+              <a:off x="8453875" y="3685699"/>
+              <a:ext cx="2523250" cy="190690"/>
+            </a:xfrm>
+            <a:prstGeom prst="rect">
+              <a:avLst/>
+            </a:prstGeom>
+            <a:noFill/>
+            <a:ln>
+              <a:noFill/>
+            </a:ln>
+          </p:spPr>
+          <p:txBody>
+            <a:bodyPr wrap="none" lIns="0" tIns="0" rIns="0" bIns="0" anchor="t" anchorCtr="0">
+              <a:spAutoFit/>
+            </a:bodyPr>
+            <a:lstStyle/>
+            <a:p>
+              <a:pPr algn="ctr"/>
+              <a:r>
                 <a:rPr lang="en-US" sz="980" dirty="0">
                   <a:solidFill>
-                    <a:srgbClr val="94A3B8"/>
-                  </a:solidFill>
-                  <a:latin typeface="Inter"/>
-                  <a:ea typeface="Inter"/>
-                  <a:cs typeface="Inter"/>
-                </a:rPr>
-                <a:t>Все навыки домена работают</a:t>
-              </a:r>
-            </a:p>
-          </p:txBody>
-        </p:sp>
-        <p:sp>
-          <p:nvSpPr>
-            <p:cNvPr id="30" name="TextBox 30"/>
-            <p:cNvSpPr txBox="1"/>
-            <p:nvPr/>
-          </p:nvSpPr>
-          <p:spPr>
-            <a:xfrm>
-              <a:off x="8857393" y="3342799"/>
-              <a:ext cx="1716215" cy="190690"/>
-            </a:xfrm>
-            <a:prstGeom prst="rect">
-              <a:avLst/>
-            </a:prstGeom>
-            <a:noFill/>
-            <a:ln>
-              <a:noFill/>
-            </a:ln>
-          </p:spPr>
-          <p:txBody>
-            <a:bodyPr wrap="none" lIns="0" tIns="0" rIns="0" bIns="0" anchor="t" anchorCtr="0">
-              <a:spAutoFit/>
-            </a:bodyPr>
-            <a:lstStyle/>
-            <a:p>
-              <a:pPr algn="ctr"/>
-              <a:r>
-                <a:rPr lang="en-US" sz="980" dirty="0">
-                  <a:solidFill>
-                    <a:srgbClr val="94A3B8"/>
-                  </a:solidFill>
-                  <a:latin typeface="Inter"/>
-                  <a:ea typeface="Inter"/>
-                  <a:cs typeface="Inter"/>
-                </a:rPr>
-                <a:t>по правилам твоей команды</a:t>
-              </a:r>
-            </a:p>
-          </p:txBody>
-        </p:sp>
-        <p:sp>
-          <p:nvSpPr>
-            <p:cNvPr id="31" name="TextBox 31"/>
-            <p:cNvSpPr txBox="1"/>
-            <p:nvPr/>
-          </p:nvSpPr>
-          <p:spPr>
-            <a:xfrm>
-              <a:off x="9272324" y="3617595"/>
-              <a:ext cx="886351" cy="176212"/>
-            </a:xfrm>
-            <a:prstGeom prst="rect">
-              <a:avLst/>
-            </a:prstGeom>
-            <a:noFill/>
-            <a:ln>
-              <a:noFill/>
-            </a:ln>
-          </p:spPr>
-          <p:txBody>
-            <a:bodyPr wrap="none" lIns="0" tIns="0" rIns="0" bIns="0" anchor="t" anchorCtr="0">
-              <a:spAutoFit/>
-            </a:bodyPr>
-            <a:lstStyle/>
-            <a:p>
-              <a:pPr algn="ctr"/>
-              <a:r>
-                <a:rPr lang="en-US" sz="900" dirty="0">
-                  <a:solidFill>
                     <a:srgbClr val="60A5FA"/>
                   </a:solidFill>
                   <a:latin typeface="Inter"/>
                   <a:ea typeface="Inter"/>
                   <a:cs typeface="Inter"/>
                 </a:rPr>
-                <a:t>→ Выход вайлид</a:t>
+                <a:t>→ Выход — draft для проверки юристом</a:t>
               </a:r>
             </a:p>
           </p:txBody>
@@ -4978,7 +5184,7 @@
           <p:spPr>
             <a:xfrm>
               <a:off x="1040892" y="4712018"/>
-              <a:ext cx="2395877" cy="264033"/>
+              <a:ext cx="2539380" cy="264033"/>
             </a:xfrm>
             <a:prstGeom prst="rect">
               <a:avLst/>
@@ -5018,7 +5224,7 @@
           <p:spPr>
             <a:xfrm>
               <a:off x="1042035" y="5117306"/>
-              <a:ext cx="5179232" cy="220028"/>
+              <a:ext cx="5456973" cy="220028"/>
             </a:xfrm>
             <a:prstGeom prst="rect">
               <a:avLst/>
@@ -5058,7 +5264,7 @@
           <p:spPr>
             <a:xfrm>
               <a:off x="1042035" y="5403056"/>
-              <a:ext cx="5308238" cy="220028"/>
+              <a:ext cx="5585978" cy="220028"/>
             </a:xfrm>
             <a:prstGeom prst="rect">
               <a:avLst/>
@@ -5098,7 +5304,7 @@
           <p:spPr>
             <a:xfrm>
               <a:off x="1042035" y="5688806"/>
-              <a:ext cx="4140685" cy="220028"/>
+              <a:ext cx="4377946" cy="220028"/>
             </a:xfrm>
             <a:prstGeom prst="rect">
               <a:avLst/>
@@ -5138,7 +5344,7 @@
           <p:spPr>
             <a:xfrm>
               <a:off x="1042035" y="5974556"/>
-              <a:ext cx="3672792" cy="220028"/>
+              <a:ext cx="3873332" cy="220028"/>
             </a:xfrm>
             <a:prstGeom prst="rect">
               <a:avLst/>
@@ -5342,8 +5548,8 @@
         </p:nvSpPr>
         <p:spPr>
           <a:xfrm>
-            <a:off x="9548278" y="6570345"/>
-            <a:ext cx="2267485" cy="176212"/>
+            <a:off x="9523801" y="6570345"/>
+            <a:ext cx="2291961" cy="176212"/>
           </a:xfrm>
           <a:prstGeom prst="rect">
             <a:avLst/>
@@ -5369,7 +5575,7 @@
                 <a:ea typeface="Inter"/>
                 <a:cs typeface="Inter"/>
               </a:rPr>
-              <a:t>Vector Legal · Hermes Agent · Оsmosy</a:t>
+              <a:t>Vector Legal · Hermes Agent · Osmosy</a:t>
             </a:r>
           </a:p>
         </p:txBody>
@@ -5383,7 +5589,7 @@
         <p:spPr>
           <a:xfrm>
             <a:off x="566166" y="553402"/>
-            <a:ext cx="957303" cy="205359"/>
+            <a:ext cx="1008549" cy="205359"/>
           </a:xfrm>
           <a:prstGeom prst="rect">
             <a:avLst/>
@@ -5496,9 +5702,9 @@
         <p:grpSpPr>
           <a:xfrm>
             <a:off x="762000" y="1809750"/>
-            <a:ext cx="10668000" cy="1466564"/>
+            <a:ext cx="10668000" cy="1428750"/>
             <a:chOff x="762000" y="1809750"/>
-            <a:chExt cx="10668000" cy="1466564"/>
+            <a:chExt cx="10668000" cy="1428750"/>
           </a:xfrm>
         </p:grpSpPr>
         <p:sp>
@@ -5536,7 +5742,7 @@
           <p:spPr>
             <a:xfrm>
               <a:off x="1040892" y="2140268"/>
-              <a:ext cx="2826027" cy="264033"/>
+              <a:ext cx="2906930" cy="264033"/>
             </a:xfrm>
             <a:prstGeom prst="rect">
               <a:avLst/>
@@ -5576,7 +5782,7 @@
           <p:spPr>
             <a:xfrm>
               <a:off x="1042416" y="2534602"/>
-              <a:ext cx="5702294" cy="205359"/>
+              <a:ext cx="5894146" cy="205359"/>
             </a:xfrm>
             <a:prstGeom prst="rect">
               <a:avLst/>
@@ -5602,7 +5808,7 @@
                   <a:ea typeface="Inter"/>
                   <a:cs typeface="Inter"/>
                 </a:rPr>
-                <a:t>Единый сервер поверх существующих conneкторов: atomno-mcp + Russian-Law-MCP</a:t>
+                <a:t>Единый сервер поверх существующих коннекторов: atomno-mcp + Russian-Law-MCP</a:t>
               </a:r>
             </a:p>
           </p:txBody>
@@ -5616,7 +5822,7 @@
           <p:spPr>
             <a:xfrm>
               <a:off x="1042416" y="2820352"/>
-              <a:ext cx="5987948" cy="205359"/>
+              <a:ext cx="6280800" cy="205359"/>
             </a:xfrm>
             <a:prstGeom prst="rect">
               <a:avLst/>
@@ -5655,8 +5861,8 @@
           </p:nvSpPr>
           <p:spPr>
             <a:xfrm>
-              <a:off x="1042797" y="3085624"/>
-              <a:ext cx="4332706" cy="190690"/>
+              <a:off x="1042797" y="3009424"/>
+              <a:ext cx="4498260" cy="190690"/>
             </a:xfrm>
             <a:prstGeom prst="rect">
               <a:avLst/>
@@ -5697,9 +5903,9 @@
         <p:grpSpPr>
           <a:xfrm>
             <a:off x="762000" y="3524250"/>
-            <a:ext cx="10668000" cy="1466564"/>
+            <a:ext cx="10668000" cy="1428750"/>
             <a:chOff x="762000" y="3524250"/>
-            <a:chExt cx="10668000" cy="1466564"/>
+            <a:chExt cx="10668000" cy="1428750"/>
           </a:xfrm>
         </p:grpSpPr>
         <p:sp>
@@ -5737,7 +5943,7 @@
           <p:spPr>
             <a:xfrm>
               <a:off x="1040892" y="3854768"/>
-              <a:ext cx="2176128" cy="264033"/>
+              <a:ext cx="2313910" cy="264033"/>
             </a:xfrm>
             <a:prstGeom prst="rect">
               <a:avLst/>
@@ -5777,7 +5983,7 @@
           <p:spPr>
             <a:xfrm>
               <a:off x="1042416" y="4249102"/>
-              <a:ext cx="5807027" cy="205359"/>
+              <a:ext cx="6212347" cy="205359"/>
             </a:xfrm>
             <a:prstGeom prst="rect">
               <a:avLst/>
@@ -5803,7 +6009,7 @@
                   <a:ea typeface="Inter"/>
                   <a:cs typeface="Inter"/>
                 </a:rPr>
-                <a:t>Мясопереработка · сельское хозяйство · ФЗ-49 о сельскохозяйственной кооперации</a:t>
+                <a:t>Мясопереработка · сельское хозяйство · ФЗ-193 о сельскохозяйственной кооперации</a:t>
               </a:r>
             </a:p>
           </p:txBody>
@@ -5817,7 +6023,7 @@
           <p:spPr>
             <a:xfrm>
               <a:off x="1042416" y="4534852"/>
-              <a:ext cx="3756136" cy="205359"/>
+              <a:ext cx="4616409" cy="205359"/>
             </a:xfrm>
             <a:prstGeom prst="rect">
               <a:avLst/>
@@ -5843,7 +6049,7 @@
                   <a:ea typeface="Inter"/>
                   <a:cs typeface="Inter"/>
                 </a:rPr>
-                <a:t>Гос-контракты 44-ФЗ · Антимонопольный домен ФЗ-135</a:t>
+                <a:t>Гос-контракты 44-ФЗ/223-ФЗ · Антимонопольный домен ФЗ-135</a:t>
               </a:r>
             </a:p>
           </p:txBody>
@@ -5856,8 +6062,8 @@
           </p:nvSpPr>
           <p:spPr>
             <a:xfrm>
-              <a:off x="1042797" y="4800124"/>
-              <a:ext cx="3302061" cy="190690"/>
+              <a:off x="1042797" y="4723924"/>
+              <a:ext cx="3432170" cy="190690"/>
             </a:xfrm>
             <a:prstGeom prst="rect">
               <a:avLst/>
@@ -5937,8 +6143,8 @@
           </p:nvSpPr>
           <p:spPr>
             <a:xfrm>
-              <a:off x="1041273" y="5529739"/>
-              <a:ext cx="2566078" cy="249364"/>
+              <a:off x="1040892" y="5521642"/>
+              <a:ext cx="2843562" cy="264033"/>
             </a:xfrm>
             <a:prstGeom prst="rect">
               <a:avLst/>
@@ -5956,7 +6162,7 @@
             <a:p>
               <a:pPr algn="l"/>
               <a:r>
-                <a:rPr lang="en-US" sz="1280" b="1" dirty="0">
+                <a:rPr lang="en-US" sz="1350" b="1" dirty="0">
                   <a:solidFill>
                     <a:srgbClr val="38BDF8"/>
                   </a:solidFill>
@@ -5978,7 +6184,7 @@
           <p:spPr>
             <a:xfrm>
               <a:off x="1042416" y="5839778"/>
-              <a:ext cx="5822603" cy="205359"/>
+              <a:ext cx="5899337" cy="205359"/>
             </a:xfrm>
             <a:prstGeom prst="rect">
               <a:avLst/>
@@ -6222,8 +6428,8 @@
         </p:nvSpPr>
         <p:spPr>
           <a:xfrm>
-            <a:off x="2687955" y="2266950"/>
-            <a:ext cx="6816090" cy="293370"/>
+            <a:off x="2560439" y="2266950"/>
+            <a:ext cx="7071122" cy="293370"/>
           </a:xfrm>
           <a:prstGeom prst="rect">
             <a:avLst/>
@@ -6335,8 +6541,8 @@
         </p:nvSpPr>
         <p:spPr>
           <a:xfrm>
-            <a:off x="3358515" y="3879056"/>
-            <a:ext cx="5474970" cy="220028"/>
+            <a:off x="3324368" y="3879056"/>
+            <a:ext cx="5543264" cy="220028"/>
           </a:xfrm>
           <a:prstGeom prst="rect">
             <a:avLst/>
@@ -6375,8 +6581,8 @@
         </p:nvSpPr>
         <p:spPr>
           <a:xfrm>
-            <a:off x="4714335" y="4117181"/>
-            <a:ext cx="2763331" cy="220028"/>
+            <a:off x="4652759" y="4117181"/>
+            <a:ext cx="2886482" cy="220028"/>
           </a:xfrm>
           <a:prstGeom prst="rect">
             <a:avLst/>
@@ -6415,8 +6621,8 @@
         </p:nvSpPr>
         <p:spPr>
           <a:xfrm>
-            <a:off x="3585854" y="4926806"/>
-            <a:ext cx="5020291" cy="220028"/>
+            <a:off x="3556257" y="4926806"/>
+            <a:ext cx="5079487" cy="220028"/>
           </a:xfrm>
           <a:prstGeom prst="rect">
             <a:avLst/>
@@ -6455,8 +6661,8 @@
         </p:nvSpPr>
         <p:spPr>
           <a:xfrm>
-            <a:off x="4217247" y="5490210"/>
-            <a:ext cx="3757506" cy="234696"/>
+            <a:off x="4173565" y="5490210"/>
+            <a:ext cx="3844870" cy="234696"/>
           </a:xfrm>
           <a:prstGeom prst="rect">
             <a:avLst/>
@@ -6495,8 +6701,8 @@
         </p:nvSpPr>
         <p:spPr>
           <a:xfrm>
-            <a:off x="4729282" y="5800249"/>
-            <a:ext cx="2733437" cy="190690"/>
+            <a:off x="4666279" y="5800249"/>
+            <a:ext cx="2859441" cy="190690"/>
           </a:xfrm>
           <a:prstGeom prst="rect">
             <a:avLst/>
@@ -6535,8 +6741,8 @@
         </p:nvSpPr>
         <p:spPr>
           <a:xfrm>
-            <a:off x="3506338" y="6379845"/>
-            <a:ext cx="5179324" cy="176212"/>
+            <a:off x="3366171" y="6379845"/>
+            <a:ext cx="5459658" cy="176212"/>
           </a:xfrm>
           <a:prstGeom prst="rect">
             <a:avLst/>
@@ -6699,8 +6905,8 @@
         </p:nvSpPr>
         <p:spPr>
           <a:xfrm>
-            <a:off x="9548278" y="6570345"/>
-            <a:ext cx="2267485" cy="176212"/>
+            <a:off x="9523801" y="6570345"/>
+            <a:ext cx="2291961" cy="176212"/>
           </a:xfrm>
           <a:prstGeom prst="rect">
             <a:avLst/>
@@ -6726,7 +6932,7 @@
                 <a:ea typeface="Inter"/>
                 <a:cs typeface="Inter"/>
               </a:rPr>
-              <a:t>Vector Legal · Hermes Agent · Оsmosy</a:t>
+              <a:t>Vector Legal · Hermes Agent · Osmosy</a:t>
             </a:r>
           </a:p>
         </p:txBody>
@@ -6740,7 +6946,7 @@
         <p:spPr>
           <a:xfrm>
             <a:off x="566166" y="553402"/>
-            <a:ext cx="957303" cy="205359"/>
+            <a:ext cx="1008549" cy="205359"/>
           </a:xfrm>
           <a:prstGeom prst="rect">
             <a:avLst/>
@@ -6780,7 +6986,7 @@
         <p:spPr>
           <a:xfrm>
             <a:off x="556260" y="819150"/>
-            <a:ext cx="4779537" cy="586740"/>
+            <a:ext cx="4933560" cy="586740"/>
           </a:xfrm>
           <a:prstGeom prst="rect">
             <a:avLst/>
@@ -6853,7 +7059,7 @@
         <p:spPr>
           <a:xfrm>
             <a:off x="563118" y="1679258"/>
-            <a:ext cx="4937055" cy="322707"/>
+            <a:ext cx="5137883" cy="322707"/>
           </a:xfrm>
           <a:prstGeom prst="rect">
             <a:avLst/>
@@ -6893,7 +7099,7 @@
         <p:spPr>
           <a:xfrm>
             <a:off x="565023" y="2100739"/>
-            <a:ext cx="7184910" cy="249364"/>
+            <a:ext cx="7555962" cy="249364"/>
           </a:xfrm>
           <a:prstGeom prst="rect">
             <a:avLst/>
@@ -6933,7 +7139,7 @@
         <p:spPr>
           <a:xfrm>
             <a:off x="565023" y="2338864"/>
-            <a:ext cx="6337906" cy="249364"/>
+            <a:ext cx="6600516" cy="249364"/>
           </a:xfrm>
           <a:prstGeom prst="rect">
             <a:avLst/>
@@ -7013,7 +7219,7 @@
           <p:spPr>
             <a:xfrm>
               <a:off x="849630" y="3124200"/>
-              <a:ext cx="1834907" cy="293370"/>
+              <a:ext cx="1956219" cy="293370"/>
             </a:xfrm>
             <a:prstGeom prst="rect">
               <a:avLst/>
@@ -7053,7 +7259,7 @@
           <p:spPr>
             <a:xfrm>
               <a:off x="851916" y="3506152"/>
-              <a:ext cx="2750501" cy="205359"/>
+              <a:ext cx="2907670" cy="205359"/>
             </a:xfrm>
             <a:prstGeom prst="rect">
               <a:avLst/>
@@ -7093,7 +7299,7 @@
           <p:spPr>
             <a:xfrm>
               <a:off x="851916" y="3744278"/>
-              <a:ext cx="2159203" cy="205359"/>
+              <a:ext cx="2265216" cy="205359"/>
             </a:xfrm>
             <a:prstGeom prst="rect">
               <a:avLst/>
@@ -7133,7 +7339,7 @@
           <p:spPr>
             <a:xfrm>
               <a:off x="851916" y="3982402"/>
-              <a:ext cx="2272284" cy="205359"/>
+              <a:ext cx="2391019" cy="205359"/>
             </a:xfrm>
             <a:prstGeom prst="rect">
               <a:avLst/>
@@ -7214,7 +7420,7 @@
           <p:spPr>
             <a:xfrm>
               <a:off x="4469130" y="3124200"/>
-              <a:ext cx="1594837" cy="293370"/>
+              <a:ext cx="1664806" cy="293370"/>
             </a:xfrm>
             <a:prstGeom prst="rect">
               <a:avLst/>
@@ -7254,7 +7460,7 @@
           <p:spPr>
             <a:xfrm>
               <a:off x="4471416" y="3506152"/>
-              <a:ext cx="2182909" cy="205359"/>
+              <a:ext cx="2328200" cy="205359"/>
             </a:xfrm>
             <a:prstGeom prst="rect">
               <a:avLst/>
@@ -7294,7 +7500,7 @@
           <p:spPr>
             <a:xfrm>
               <a:off x="4471416" y="3744278"/>
-              <a:ext cx="2542371" cy="205359"/>
+              <a:ext cx="2717807" cy="205359"/>
             </a:xfrm>
             <a:prstGeom prst="rect">
               <a:avLst/>
@@ -7334,7 +7540,7 @@
           <p:spPr>
             <a:xfrm>
               <a:off x="4471416" y="3982402"/>
-              <a:ext cx="2371852" cy="205359"/>
+              <a:ext cx="2538273" cy="205359"/>
             </a:xfrm>
             <a:prstGeom prst="rect">
               <a:avLst/>
@@ -7415,7 +7621,7 @@
           <p:spPr>
             <a:xfrm>
               <a:off x="8088630" y="3124200"/>
-              <a:ext cx="2184711" cy="293370"/>
+              <a:ext cx="2325089" cy="293370"/>
             </a:xfrm>
             <a:prstGeom prst="rect">
               <a:avLst/>
@@ -7455,7 +7661,7 @@
           <p:spPr>
             <a:xfrm>
               <a:off x="8090916" y="3506152"/>
-              <a:ext cx="2552706" cy="205359"/>
+              <a:ext cx="2697156" cy="205359"/>
             </a:xfrm>
             <a:prstGeom prst="rect">
               <a:avLst/>
@@ -7495,7 +7701,7 @@
           <p:spPr>
             <a:xfrm>
               <a:off x="8090916" y="3744278"/>
-              <a:ext cx="2595191" cy="205359"/>
+              <a:ext cx="2739641" cy="205359"/>
             </a:xfrm>
             <a:prstGeom prst="rect">
               <a:avLst/>
@@ -7534,8 +7740,8 @@
           </p:nvSpPr>
           <p:spPr>
             <a:xfrm>
-              <a:off x="8091297" y="3752374"/>
-              <a:ext cx="1427455" cy="190690"/>
+              <a:off x="8091297" y="3952399"/>
+              <a:ext cx="1498332" cy="190690"/>
             </a:xfrm>
             <a:prstGeom prst="rect">
               <a:avLst/>
@@ -7576,9 +7782,9 @@
         <p:grpSpPr>
           <a:xfrm>
             <a:off x="571500" y="4381500"/>
-            <a:ext cx="11854321" cy="1714500"/>
+            <a:ext cx="12333282" cy="1714500"/>
             <a:chOff x="571500" y="4381500"/>
-            <a:chExt cx="11854321" cy="1714500"/>
+            <a:chExt cx="12333282" cy="1714500"/>
           </a:xfrm>
         </p:grpSpPr>
         <p:sp>
@@ -7616,7 +7822,7 @@
           <p:spPr>
             <a:xfrm>
               <a:off x="946404" y="4728210"/>
-              <a:ext cx="1332480" cy="234696"/>
+              <a:ext cx="1419364" cy="234696"/>
             </a:xfrm>
             <a:prstGeom prst="rect">
               <a:avLst/>
@@ -7656,7 +7862,7 @@
           <p:spPr>
             <a:xfrm>
               <a:off x="946785" y="5117306"/>
-              <a:ext cx="6580387" cy="220028"/>
+              <a:ext cx="6689743" cy="220028"/>
             </a:xfrm>
             <a:prstGeom prst="rect">
               <a:avLst/>
@@ -7696,7 +7902,7 @@
           <p:spPr>
             <a:xfrm>
               <a:off x="946785" y="5450681"/>
-              <a:ext cx="6002123" cy="220028"/>
+              <a:ext cx="6161977" cy="220028"/>
             </a:xfrm>
             <a:prstGeom prst="rect">
               <a:avLst/>
@@ -7736,7 +7942,7 @@
           <p:spPr>
             <a:xfrm>
               <a:off x="947166" y="5696902"/>
-              <a:ext cx="11478655" cy="205359"/>
+              <a:ext cx="11957616" cy="205359"/>
             </a:xfrm>
             <a:prstGeom prst="rect">
               <a:avLst/>
@@ -7940,8 +8146,8 @@
         </p:nvSpPr>
         <p:spPr>
           <a:xfrm>
-            <a:off x="9548278" y="6570345"/>
-            <a:ext cx="2267485" cy="176212"/>
+            <a:off x="9523801" y="6570345"/>
+            <a:ext cx="2291961" cy="176212"/>
           </a:xfrm>
           <a:prstGeom prst="rect">
             <a:avLst/>
@@ -7967,7 +8173,7 @@
                 <a:ea typeface="Inter"/>
                 <a:cs typeface="Inter"/>
               </a:rPr>
-              <a:t>Vector Legal · Hermes Agent · Оsmosy</a:t>
+              <a:t>Vector Legal · Hermes Agent · Osmosy</a:t>
             </a:r>
           </a:p>
         </p:txBody>
@@ -7981,7 +8187,7 @@
         <p:spPr>
           <a:xfrm>
             <a:off x="566166" y="553402"/>
-            <a:ext cx="1507950" cy="205359"/>
+            <a:ext cx="1584589" cy="205359"/>
           </a:xfrm>
           <a:prstGeom prst="rect">
             <a:avLst/>
@@ -8021,7 +8227,7 @@
         <p:spPr>
           <a:xfrm>
             <a:off x="556260" y="819150"/>
-            <a:ext cx="7196976" cy="586740"/>
+            <a:ext cx="7540459" cy="586740"/>
           </a:xfrm>
           <a:prstGeom prst="rect">
             <a:avLst/>
@@ -8197,8 +8403,8 @@
           </p:nvSpPr>
           <p:spPr>
             <a:xfrm>
-              <a:off x="1613383" y="2854642"/>
-              <a:ext cx="964235" cy="264033"/>
+              <a:off x="1575938" y="2854642"/>
+              <a:ext cx="1039124" cy="264033"/>
             </a:xfrm>
             <a:prstGeom prst="rect">
               <a:avLst/>
@@ -8237,8 +8443,8 @@
           </p:nvSpPr>
           <p:spPr>
             <a:xfrm>
-              <a:off x="1284465" y="3144202"/>
-              <a:ext cx="1622069" cy="205359"/>
+              <a:off x="1261142" y="3144202"/>
+              <a:ext cx="1668715" cy="205359"/>
             </a:xfrm>
             <a:prstGeom prst="rect">
               <a:avLst/>
@@ -8277,8 +8483,8 @@
           </p:nvSpPr>
           <p:spPr>
             <a:xfrm>
-              <a:off x="1562233" y="3353752"/>
-              <a:ext cx="1066533" cy="205359"/>
+              <a:off x="1560093" y="3353752"/>
+              <a:ext cx="1070814" cy="205359"/>
             </a:xfrm>
             <a:prstGeom prst="rect">
               <a:avLst/>
@@ -8422,8 +8628,8 @@
           </p:nvSpPr>
           <p:spPr>
             <a:xfrm>
-              <a:off x="4184132" y="2854642"/>
-              <a:ext cx="1918735" cy="264033"/>
+              <a:off x="4161157" y="2854642"/>
+              <a:ext cx="1964685" cy="264033"/>
             </a:xfrm>
             <a:prstGeom prst="rect">
               <a:avLst/>
@@ -8462,8 +8668,8 @@
           </p:nvSpPr>
           <p:spPr>
             <a:xfrm>
-              <a:off x="4198182" y="3172778"/>
-              <a:ext cx="1890636" cy="205359"/>
+              <a:off x="4172739" y="3172778"/>
+              <a:ext cx="1941523" cy="205359"/>
             </a:xfrm>
             <a:prstGeom prst="rect">
               <a:avLst/>
@@ -8502,8 +8708,8 @@
           </p:nvSpPr>
           <p:spPr>
             <a:xfrm>
-              <a:off x="4178254" y="3382328"/>
-              <a:ext cx="1930491" cy="205359"/>
+              <a:off x="4135749" y="3382328"/>
+              <a:ext cx="2015502" cy="205359"/>
             </a:xfrm>
             <a:prstGeom prst="rect">
               <a:avLst/>
@@ -8647,8 +8853,8 @@
           </p:nvSpPr>
           <p:spPr>
             <a:xfrm>
-              <a:off x="7470728" y="2854642"/>
-              <a:ext cx="1441544" cy="264033"/>
+              <a:off x="7421856" y="2854642"/>
+              <a:ext cx="1539288" cy="264033"/>
             </a:xfrm>
             <a:prstGeom prst="rect">
               <a:avLst/>
@@ -8687,8 +8893,8 @@
           </p:nvSpPr>
           <p:spPr>
             <a:xfrm>
-              <a:off x="7360055" y="3172778"/>
-              <a:ext cx="1662890" cy="205359"/>
+              <a:off x="7315381" y="3172778"/>
+              <a:ext cx="1752238" cy="205359"/>
             </a:xfrm>
             <a:prstGeom prst="rect">
               <a:avLst/>
@@ -8727,8 +8933,8 @@
           </p:nvSpPr>
           <p:spPr>
             <a:xfrm>
-              <a:off x="7366330" y="3382328"/>
-              <a:ext cx="1650340" cy="205359"/>
+              <a:off x="7323925" y="3382328"/>
+              <a:ext cx="1735150" cy="205359"/>
             </a:xfrm>
             <a:prstGeom prst="rect">
               <a:avLst/>
@@ -8872,8 +9078,8 @@
           </p:nvSpPr>
           <p:spPr>
             <a:xfrm>
-              <a:off x="10704906" y="2854642"/>
-              <a:ext cx="1069188" cy="264033"/>
+              <a:off x="10664606" y="2854642"/>
+              <a:ext cx="1149788" cy="264033"/>
             </a:xfrm>
             <a:prstGeom prst="rect">
               <a:avLst/>
@@ -8912,8 +9118,8 @@
           </p:nvSpPr>
           <p:spPr>
             <a:xfrm>
-              <a:off x="10707634" y="3172778"/>
-              <a:ext cx="1063733" cy="205359"/>
+              <a:off x="10692792" y="3172778"/>
+              <a:ext cx="1093417" cy="205359"/>
             </a:xfrm>
             <a:prstGeom prst="rect">
               <a:avLst/>
@@ -8952,8 +9158,8 @@
           </p:nvSpPr>
           <p:spPr>
             <a:xfrm>
-              <a:off x="10402572" y="3382328"/>
-              <a:ext cx="1673856" cy="205359"/>
+              <a:off x="10340470" y="3382328"/>
+              <a:ext cx="1798060" cy="205359"/>
             </a:xfrm>
             <a:prstGeom prst="rect">
               <a:avLst/>
@@ -9102,9 +9308,9 @@
         <p:grpSpPr>
           <a:xfrm>
             <a:off x="762000" y="4667250"/>
-            <a:ext cx="10668000" cy="1663637"/>
+            <a:ext cx="10668000" cy="1619250"/>
             <a:chOff x="762000" y="4667250"/>
-            <a:chExt cx="10668000" cy="1663637"/>
+            <a:chExt cx="10668000" cy="1619250"/>
           </a:xfrm>
         </p:grpSpPr>
         <p:sp>
@@ -9142,7 +9348,7 @@
           <p:spPr>
             <a:xfrm>
               <a:off x="1040892" y="4902518"/>
-              <a:ext cx="2136361" cy="264033"/>
+              <a:ext cx="2280432" cy="264033"/>
             </a:xfrm>
             <a:prstGeom prst="rect">
               <a:avLst/>
@@ -9182,7 +9388,7 @@
           <p:spPr>
             <a:xfrm>
               <a:off x="1042035" y="5307806"/>
-              <a:ext cx="4690958" cy="220028"/>
+              <a:ext cx="4918857" cy="220028"/>
             </a:xfrm>
             <a:prstGeom prst="rect">
               <a:avLst/>
@@ -9222,7 +9428,7 @@
           <p:spPr>
             <a:xfrm>
               <a:off x="1042035" y="5574506"/>
-              <a:ext cx="4070223" cy="220028"/>
+              <a:ext cx="4256503" cy="220028"/>
             </a:xfrm>
             <a:prstGeom prst="rect">
               <a:avLst/>
@@ -9261,8 +9467,8 @@
           </p:nvSpPr>
           <p:spPr>
             <a:xfrm>
-              <a:off x="1042035" y="5841206"/>
-              <a:ext cx="4832913" cy="220028"/>
+              <a:off x="1042035" y="5822156"/>
+              <a:ext cx="5078535" cy="220028"/>
             </a:xfrm>
             <a:prstGeom prst="rect">
               <a:avLst/>
@@ -9301,8 +9507,8 @@
           </p:nvSpPr>
           <p:spPr>
             <a:xfrm>
-              <a:off x="1042416" y="6125528"/>
-              <a:ext cx="4714363" cy="205359"/>
+              <a:off x="1042416" y="6039802"/>
+              <a:ext cx="4880126" cy="205359"/>
             </a:xfrm>
             <a:prstGeom prst="rect">
               <a:avLst/>
@@ -9328,7 +9534,7 @@
                   <a:ea typeface="Inter"/>
                   <a:cs typeface="Inter"/>
                 </a:rPr>
-                <a:t>Для калибровки — cold-start interview. Юрист отвечает 2-15 минут,</a:t>
+                <a:t>Для калибровки — cold-start interview. Юрист отвечает 2–15 минут.</a:t>
               </a:r>
             </a:p>
           </p:txBody>
@@ -9506,8 +9712,8 @@
         </p:nvSpPr>
         <p:spPr>
           <a:xfrm>
-            <a:off x="9548278" y="6570345"/>
-            <a:ext cx="2267485" cy="176212"/>
+            <a:off x="9523801" y="6570345"/>
+            <a:ext cx="2291961" cy="176212"/>
           </a:xfrm>
           <a:prstGeom prst="rect">
             <a:avLst/>
@@ -9533,7 +9739,7 @@
                 <a:ea typeface="Inter"/>
                 <a:cs typeface="Inter"/>
               </a:rPr>
-              <a:t>Vector Legal · Hermes Agent · Оsmosy</a:t>
+              <a:t>Vector Legal · Hermes Agent · Osmosy</a:t>
             </a:r>
           </a:p>
         </p:txBody>
@@ -9547,7 +9753,7 @@
         <p:spPr>
           <a:xfrm>
             <a:off x="566166" y="553402"/>
-            <a:ext cx="1202084" cy="205359"/>
+            <a:ext cx="1244889" cy="205359"/>
           </a:xfrm>
           <a:prstGeom prst="rect">
             <a:avLst/>
@@ -9587,7 +9793,7 @@
         <p:spPr>
           <a:xfrm>
             <a:off x="556260" y="819150"/>
-            <a:ext cx="4949495" cy="586740"/>
+            <a:ext cx="5191205" cy="586740"/>
           </a:xfrm>
           <a:prstGeom prst="rect">
             <a:avLst/>
@@ -9700,7 +9906,7 @@
           <p:spPr>
             <a:xfrm>
               <a:off x="802767" y="1968818"/>
-              <a:ext cx="2176128" cy="264033"/>
+              <a:ext cx="2313910" cy="264033"/>
             </a:xfrm>
             <a:prstGeom prst="rect">
               <a:avLst/>
@@ -9739,8 +9945,8 @@
           </p:nvSpPr>
           <p:spPr>
             <a:xfrm>
-              <a:off x="804672" y="2295049"/>
-              <a:ext cx="3656956" cy="190690"/>
+              <a:off x="804291" y="2286952"/>
+              <a:ext cx="4104455" cy="205359"/>
             </a:xfrm>
             <a:prstGeom prst="rect">
               <a:avLst/>
@@ -9758,47 +9964,47 @@
             <a:p>
               <a:pPr algn="l"/>
               <a:r>
+                <a:rPr lang="en-US" sz="1050" dirty="0">
+                  <a:solidFill>
+                    <a:srgbClr val="E2E8F0"/>
+                  </a:solidFill>
+                  <a:latin typeface="Inter"/>
+                  <a:ea typeface="Inter"/>
+                  <a:cs typeface="Inter"/>
+                </a:rPr>
+                <a:t>Ревизия входящих договоров против playbook, NDA-триаж</a:t>
+              </a:r>
+            </a:p>
+          </p:txBody>
+        </p:sp>
+        <p:sp>
+          <p:nvSpPr>
+            <p:cNvPr id="12" name="TextBox 12"/>
+            <p:cNvSpPr txBox="1"/>
+            <p:nvPr/>
+          </p:nvSpPr>
+          <p:spPr>
+            <a:xfrm>
+              <a:off x="804672" y="2704624"/>
+              <a:ext cx="2726506" cy="190690"/>
+            </a:xfrm>
+            <a:prstGeom prst="rect">
+              <a:avLst/>
+            </a:prstGeom>
+            <a:noFill/>
+            <a:ln>
+              <a:noFill/>
+            </a:ln>
+          </p:spPr>
+          <p:txBody>
+            <a:bodyPr wrap="none" lIns="0" tIns="0" rIns="0" bIns="0" anchor="t" anchorCtr="0">
+              <a:spAutoFit/>
+            </a:bodyPr>
+            <a:lstStyle/>
+            <a:p>
+              <a:pPr algn="l"/>
+              <a:r>
                 <a:rPr lang="en-US" sz="980" dirty="0">
-                  <a:solidFill>
-                    <a:srgbClr val="E2E8F0"/>
-                  </a:solidFill>
-                  <a:latin typeface="Inter"/>
-                  <a:ea typeface="Inter"/>
-                  <a:cs typeface="Inter"/>
-                </a:rPr>
-                <a:t>Ревизия входящих договоров против playbook, NDA-триаж</a:t>
-              </a:r>
-            </a:p>
-          </p:txBody>
-        </p:sp>
-        <p:sp>
-          <p:nvSpPr>
-            <p:cNvPr id="12" name="TextBox 12"/>
-            <p:cNvSpPr txBox="1"/>
-            <p:nvPr/>
-          </p:nvSpPr>
-          <p:spPr>
-            <a:xfrm>
-              <a:off x="804862" y="2712720"/>
-              <a:ext cx="2411782" cy="176212"/>
-            </a:xfrm>
-            <a:prstGeom prst="rect">
-              <a:avLst/>
-            </a:prstGeom>
-            <a:noFill/>
-            <a:ln>
-              <a:noFill/>
-            </a:ln>
-          </p:spPr>
-          <p:txBody>
-            <a:bodyPr wrap="none" lIns="0" tIns="0" rIns="0" bIns="0" anchor="t" anchorCtr="0">
-              <a:spAutoFit/>
-            </a:bodyPr>
-            <a:lstStyle/>
-            <a:p>
-              <a:pPr algn="l"/>
-              <a:r>
-                <a:rPr lang="en-US" sz="900" dirty="0">
                   <a:solidFill>
                     <a:srgbClr val="94A3B8"/>
                   </a:solidFill>
@@ -9861,7 +10067,7 @@
           <p:spPr>
             <a:xfrm>
               <a:off x="6517767" y="1968818"/>
-              <a:ext cx="1966240" cy="264033"/>
+              <a:ext cx="2092580" cy="264033"/>
             </a:xfrm>
             <a:prstGeom prst="rect">
               <a:avLst/>
@@ -9900,8 +10106,8 @@
           </p:nvSpPr>
           <p:spPr>
             <a:xfrm>
-              <a:off x="6519672" y="2295049"/>
-              <a:ext cx="3787064" cy="190690"/>
+              <a:off x="6519291" y="2286952"/>
+              <a:ext cx="4290974" cy="205359"/>
             </a:xfrm>
             <a:prstGeom prst="rect">
               <a:avLst/>
@@ -9919,47 +10125,47 @@
             <a:p>
               <a:pPr algn="l"/>
               <a:r>
+                <a:rPr lang="en-US" sz="1050" dirty="0">
+                  <a:solidFill>
+                    <a:srgbClr val="E2E8F0"/>
+                  </a:solidFill>
+                  <a:latin typeface="Inter"/>
+                  <a:ea typeface="Inter"/>
+                  <a:cs typeface="Inter"/>
+                </a:rPr>
+                <a:t>152-ФЗ: оператор/поручитель, запросы субъектов, утечки</a:t>
+              </a:r>
+            </a:p>
+          </p:txBody>
+        </p:sp>
+        <p:sp>
+          <p:nvSpPr>
+            <p:cNvPr id="17" name="TextBox 17"/>
+            <p:cNvSpPr txBox="1"/>
+            <p:nvPr/>
+          </p:nvSpPr>
+          <p:spPr>
+            <a:xfrm>
+              <a:off x="6519672" y="2704624"/>
+              <a:ext cx="3575685" cy="190690"/>
+            </a:xfrm>
+            <a:prstGeom prst="rect">
+              <a:avLst/>
+            </a:prstGeom>
+            <a:noFill/>
+            <a:ln>
+              <a:noFill/>
+            </a:ln>
+          </p:spPr>
+          <p:txBody>
+            <a:bodyPr wrap="none" lIns="0" tIns="0" rIns="0" bIns="0" anchor="t" anchorCtr="0">
+              <a:spAutoFit/>
+            </a:bodyPr>
+            <a:lstStyle/>
+            <a:p>
+              <a:pPr algn="l"/>
+              <a:r>
                 <a:rPr lang="en-US" sz="980" dirty="0">
-                  <a:solidFill>
-                    <a:srgbClr val="E2E8F0"/>
-                  </a:solidFill>
-                  <a:latin typeface="Inter"/>
-                  <a:ea typeface="Inter"/>
-                  <a:cs typeface="Inter"/>
-                </a:rPr>
-                <a:t>152-ФЗ: оператор/поручитель, запросы субъектов, утечки</a:t>
-              </a:r>
-            </a:p>
-          </p:txBody>
-        </p:sp>
-        <p:sp>
-          <p:nvSpPr>
-            <p:cNvPr id="17" name="TextBox 17"/>
-            <p:cNvSpPr txBox="1"/>
-            <p:nvPr/>
-          </p:nvSpPr>
-          <p:spPr>
-            <a:xfrm>
-              <a:off x="6519862" y="2712720"/>
-              <a:ext cx="3061655" cy="176212"/>
-            </a:xfrm>
-            <a:prstGeom prst="rect">
-              <a:avLst/>
-            </a:prstGeom>
-            <a:noFill/>
-            <a:ln>
-              <a:noFill/>
-            </a:ln>
-          </p:spPr>
-          <p:txBody>
-            <a:bodyPr wrap="none" lIns="0" tIns="0" rIns="0" bIns="0" anchor="t" anchorCtr="0">
-              <a:spAutoFit/>
-            </a:bodyPr>
-            <a:lstStyle/>
-            <a:p>
-              <a:pPr algn="l"/>
-              <a:r>
-                <a:rPr lang="en-US" sz="900" dirty="0">
                   <a:solidFill>
                     <a:srgbClr val="94A3B8"/>
                   </a:solidFill>
@@ -10022,7 +10228,7 @@
           <p:spPr>
             <a:xfrm>
               <a:off x="802767" y="3492818"/>
-              <a:ext cx="1966240" cy="264033"/>
+              <a:ext cx="2092580" cy="264033"/>
             </a:xfrm>
             <a:prstGeom prst="rect">
               <a:avLst/>
@@ -10061,8 +10267,8 @@
           </p:nvSpPr>
           <p:spPr>
             <a:xfrm>
-              <a:off x="804672" y="3819049"/>
-              <a:ext cx="3881476" cy="190690"/>
+              <a:off x="804291" y="3810952"/>
+              <a:ext cx="4347112" cy="205359"/>
             </a:xfrm>
             <a:prstGeom prst="rect">
               <a:avLst/>
@@ -10080,47 +10286,47 @@
             <a:p>
               <a:pPr algn="l"/>
               <a:r>
+                <a:rPr lang="en-US" sz="1050" dirty="0">
+                  <a:solidFill>
+                    <a:srgbClr val="E2E8F0"/>
+                  </a:solidFill>
+                  <a:latin typeface="Inter"/>
+                  <a:ea typeface="Inter"/>
+                  <a:cs typeface="Inter"/>
+                </a:rPr>
+                <a:t>Одобрения, протоколы 181.2 ГК, DD dataroom, M&amp;A с эскроу</a:t>
+              </a:r>
+            </a:p>
+          </p:txBody>
+        </p:sp>
+        <p:sp>
+          <p:nvSpPr>
+            <p:cNvPr id="22" name="TextBox 22"/>
+            <p:cNvSpPr txBox="1"/>
+            <p:nvPr/>
+          </p:nvSpPr>
+          <p:spPr>
+            <a:xfrm>
+              <a:off x="804672" y="4228624"/>
+              <a:ext cx="3654461" cy="190690"/>
+            </a:xfrm>
+            <a:prstGeom prst="rect">
+              <a:avLst/>
+            </a:prstGeom>
+            <a:noFill/>
+            <a:ln>
+              <a:noFill/>
+            </a:ln>
+          </p:spPr>
+          <p:txBody>
+            <a:bodyPr wrap="none" lIns="0" tIns="0" rIns="0" bIns="0" anchor="t" anchorCtr="0">
+              <a:spAutoFit/>
+            </a:bodyPr>
+            <a:lstStyle/>
+            <a:p>
+              <a:pPr algn="l"/>
+              <a:r>
                 <a:rPr lang="en-US" sz="980" dirty="0">
-                  <a:solidFill>
-                    <a:srgbClr val="E2E8F0"/>
-                  </a:solidFill>
-                  <a:latin typeface="Inter"/>
-                  <a:ea typeface="Inter"/>
-                  <a:cs typeface="Inter"/>
-                </a:rPr>
-                <a:t>Одобрения, протоколы 181.2 ГК, DD dataroom, M&amp;A с эскроу</a:t>
-              </a:r>
-            </a:p>
-          </p:txBody>
-        </p:sp>
-        <p:sp>
-          <p:nvSpPr>
-            <p:cNvPr id="22" name="TextBox 22"/>
-            <p:cNvSpPr txBox="1"/>
-            <p:nvPr/>
-          </p:nvSpPr>
-          <p:spPr>
-            <a:xfrm>
-              <a:off x="804862" y="4236720"/>
-              <a:ext cx="3188648" cy="176212"/>
-            </a:xfrm>
-            <a:prstGeom prst="rect">
-              <a:avLst/>
-            </a:prstGeom>
-            <a:noFill/>
-            <a:ln>
-              <a:noFill/>
-            </a:ln>
-          </p:spPr>
-          <p:txBody>
-            <a:bodyPr wrap="none" lIns="0" tIns="0" rIns="0" bIns="0" anchor="t" anchorCtr="0">
-              <a:spAutoFit/>
-            </a:bodyPr>
-            <a:lstStyle/>
-            <a:p>
-              <a:pPr algn="l"/>
-              <a:r>
-                <a:rPr lang="en-US" sz="900" dirty="0">
                   <a:solidFill>
                     <a:srgbClr val="94A3B8"/>
                   </a:solidFill>
@@ -10183,7 +10389,7 @@
           <p:spPr>
             <a:xfrm>
               <a:off x="6517767" y="3492818"/>
-              <a:ext cx="1441544" cy="264033"/>
+              <a:ext cx="1539288" cy="264033"/>
             </a:xfrm>
             <a:prstGeom prst="rect">
               <a:avLst/>
@@ -10222,8 +10428,8 @@
           </p:nvSpPr>
           <p:spPr>
             <a:xfrm>
-              <a:off x="6519672" y="3819049"/>
-              <a:ext cx="4359722" cy="190690"/>
+              <a:off x="6519291" y="3810952"/>
+              <a:ext cx="4989371" cy="205359"/>
             </a:xfrm>
             <a:prstGeom prst="rect">
               <a:avLst/>
@@ -10241,47 +10447,47 @@
             <a:p>
               <a:pPr algn="l"/>
               <a:r>
+                <a:rPr lang="en-US" sz="1050" dirty="0">
+                  <a:solidFill>
+                    <a:srgbClr val="E2E8F0"/>
+                  </a:solidFill>
+                  <a:latin typeface="Inter"/>
+                  <a:ea typeface="Inter"/>
+                  <a:cs typeface="Inter"/>
+                </a:rPr>
+                <a:t>Найм → увольнение → ЛНА. Ат-вилл не работает (закрытый перечень)</a:t>
+              </a:r>
+            </a:p>
+          </p:txBody>
+        </p:sp>
+        <p:sp>
+          <p:nvSpPr>
+            <p:cNvPr id="27" name="TextBox 27"/>
+            <p:cNvSpPr txBox="1"/>
+            <p:nvPr/>
+          </p:nvSpPr>
+          <p:spPr>
+            <a:xfrm>
+              <a:off x="6519672" y="4228624"/>
+              <a:ext cx="3303156" cy="190690"/>
+            </a:xfrm>
+            <a:prstGeom prst="rect">
+              <a:avLst/>
+            </a:prstGeom>
+            <a:noFill/>
+            <a:ln>
+              <a:noFill/>
+            </a:ln>
+          </p:spPr>
+          <p:txBody>
+            <a:bodyPr wrap="none" lIns="0" tIns="0" rIns="0" bIns="0" anchor="t" anchorCtr="0">
+              <a:spAutoFit/>
+            </a:bodyPr>
+            <a:lstStyle/>
+            <a:p>
+              <a:pPr algn="l"/>
+              <a:r>
                 <a:rPr lang="en-US" sz="980" dirty="0">
-                  <a:solidFill>
-                    <a:srgbClr val="E2E8F0"/>
-                  </a:solidFill>
-                  <a:latin typeface="Inter"/>
-                  <a:ea typeface="Inter"/>
-                  <a:cs typeface="Inter"/>
-                </a:rPr>
-                <a:t>Найм → увольнение → ЛНА. Ат-вилл не работает (закрытый перечень)</a:t>
-              </a:r>
-            </a:p>
-          </p:txBody>
-        </p:sp>
-        <p:sp>
-          <p:nvSpPr>
-            <p:cNvPr id="27" name="TextBox 27"/>
-            <p:cNvSpPr txBox="1"/>
-            <p:nvPr/>
-          </p:nvSpPr>
-          <p:spPr>
-            <a:xfrm>
-              <a:off x="6519862" y="4236720"/>
-              <a:ext cx="2937319" cy="176212"/>
-            </a:xfrm>
-            <a:prstGeom prst="rect">
-              <a:avLst/>
-            </a:prstGeom>
-            <a:noFill/>
-            <a:ln>
-              <a:noFill/>
-            </a:ln>
-          </p:spPr>
-          <p:txBody>
-            <a:bodyPr wrap="none" lIns="0" tIns="0" rIns="0" bIns="0" anchor="t" anchorCtr="0">
-              <a:spAutoFit/>
-            </a:bodyPr>
-            <a:lstStyle/>
-            <a:p>
-              <a:pPr algn="l"/>
-              <a:r>
-                <a:rPr lang="en-US" sz="900" dirty="0">
                   <a:solidFill>
                     <a:srgbClr val="94A3B8"/>
                   </a:solidFill>
@@ -10344,7 +10550,7 @@
           <p:spPr>
             <a:xfrm>
               <a:off x="802767" y="5016818"/>
-              <a:ext cx="1546479" cy="264033"/>
+              <a:ext cx="1649941" cy="264033"/>
             </a:xfrm>
             <a:prstGeom prst="rect">
               <a:avLst/>
@@ -10383,8 +10589,8 @@
           </p:nvSpPr>
           <p:spPr>
             <a:xfrm>
-              <a:off x="804672" y="5343049"/>
-              <a:ext cx="3882993" cy="190690"/>
+              <a:off x="804291" y="5334952"/>
+              <a:ext cx="4347957" cy="205359"/>
             </a:xfrm>
             <a:prstGeom prst="rect">
               <a:avLst/>
@@ -10402,47 +10608,47 @@
             <a:p>
               <a:pPr algn="l"/>
               <a:r>
+                <a:rPr lang="en-US" sz="1050" dirty="0">
+                  <a:solidFill>
+                    <a:srgbClr val="E2E8F0"/>
+                  </a:solidFill>
+                  <a:latin typeface="Inter"/>
+                  <a:ea typeface="Inter"/>
+                  <a:cs typeface="Inter"/>
+                </a:rPr>
+                <a:t>Досудебный порядок ч. 5 ст. 4 АПК, kad.arbitr, claim-chart</a:t>
+              </a:r>
+            </a:p>
+          </p:txBody>
+        </p:sp>
+        <p:sp>
+          <p:nvSpPr>
+            <p:cNvPr id="32" name="TextBox 32"/>
+            <p:cNvSpPr txBox="1"/>
+            <p:nvPr/>
+          </p:nvSpPr>
+          <p:spPr>
+            <a:xfrm>
+              <a:off x="804672" y="5752624"/>
+              <a:ext cx="3455669" cy="190690"/>
+            </a:xfrm>
+            <a:prstGeom prst="rect">
+              <a:avLst/>
+            </a:prstGeom>
+            <a:noFill/>
+            <a:ln>
+              <a:noFill/>
+            </a:ln>
+          </p:spPr>
+          <p:txBody>
+            <a:bodyPr wrap="none" lIns="0" tIns="0" rIns="0" bIns="0" anchor="t" anchorCtr="0">
+              <a:spAutoFit/>
+            </a:bodyPr>
+            <a:lstStyle/>
+            <a:p>
+              <a:pPr algn="l"/>
+              <a:r>
                 <a:rPr lang="en-US" sz="980" dirty="0">
-                  <a:solidFill>
-                    <a:srgbClr val="E2E8F0"/>
-                  </a:solidFill>
-                  <a:latin typeface="Inter"/>
-                  <a:ea typeface="Inter"/>
-                  <a:cs typeface="Inter"/>
-                </a:rPr>
-                <a:t>Досудебный порядок ч. 5 ст. 4 АПК, kad.arbitr, claim-chart</a:t>
-              </a:r>
-            </a:p>
-          </p:txBody>
-        </p:sp>
-        <p:sp>
-          <p:nvSpPr>
-            <p:cNvPr id="32" name="TextBox 32"/>
-            <p:cNvSpPr txBox="1"/>
-            <p:nvPr/>
-          </p:nvSpPr>
-          <p:spPr>
-            <a:xfrm>
-              <a:off x="804862" y="5760720"/>
-              <a:ext cx="3017623" cy="176212"/>
-            </a:xfrm>
-            <a:prstGeom prst="rect">
-              <a:avLst/>
-            </a:prstGeom>
-            <a:noFill/>
-            <a:ln>
-              <a:noFill/>
-            </a:ln>
-          </p:spPr>
-          <p:txBody>
-            <a:bodyPr wrap="none" lIns="0" tIns="0" rIns="0" bIns="0" anchor="t" anchorCtr="0">
-              <a:spAutoFit/>
-            </a:bodyPr>
-            <a:lstStyle/>
-            <a:p>
-              <a:pPr algn="l"/>
-              <a:r>
-                <a:rPr lang="en-US" sz="900" dirty="0">
                   <a:solidFill>
                     <a:srgbClr val="94A3B8"/>
                   </a:solidFill>
@@ -10505,7 +10711,7 @@
           <p:spPr>
             <a:xfrm>
               <a:off x="6517767" y="5016818"/>
-              <a:ext cx="1286115" cy="264033"/>
+              <a:ext cx="1396004" cy="264033"/>
             </a:xfrm>
             <a:prstGeom prst="rect">
               <a:avLst/>
@@ -10544,8 +10750,8 @@
           </p:nvSpPr>
           <p:spPr>
             <a:xfrm>
-              <a:off x="6519672" y="5343049"/>
-              <a:ext cx="3897392" cy="190690"/>
+              <a:off x="6519291" y="5334952"/>
+              <a:ext cx="4429060" cy="205359"/>
             </a:xfrm>
             <a:prstGeom prst="rect">
               <a:avLst/>
@@ -10563,55 +10769,55 @@
             <a:p>
               <a:pPr algn="l"/>
               <a:r>
+                <a:rPr lang="en-US" sz="1050" dirty="0">
+                  <a:solidFill>
+                    <a:srgbClr val="E2E8F0"/>
+                  </a:solidFill>
+                  <a:latin typeface="Inter"/>
+                  <a:ea typeface="Inter"/>
+                  <a:cs typeface="Inter"/>
+                </a:rPr>
+                <a:t>Реестр ИИ-систем, AIA, вендорские ИИ-оговорки, shadow-AI</a:t>
+              </a:r>
+            </a:p>
+          </p:txBody>
+        </p:sp>
+        <p:sp>
+          <p:nvSpPr>
+            <p:cNvPr id="37" name="TextBox 37"/>
+            <p:cNvSpPr txBox="1"/>
+            <p:nvPr/>
+          </p:nvSpPr>
+          <p:spPr>
+            <a:xfrm>
+              <a:off x="6519672" y="5752624"/>
+              <a:ext cx="4160143" cy="190690"/>
+            </a:xfrm>
+            <a:prstGeom prst="rect">
+              <a:avLst/>
+            </a:prstGeom>
+            <a:noFill/>
+            <a:ln>
+              <a:noFill/>
+            </a:ln>
+          </p:spPr>
+          <p:txBody>
+            <a:bodyPr wrap="none" lIns="0" tIns="0" rIns="0" bIns="0" anchor="t" anchorCtr="0">
+              <a:spAutoFit/>
+            </a:bodyPr>
+            <a:lstStyle/>
+            <a:p>
+              <a:pPr algn="l"/>
+              <a:r>
                 <a:rPr lang="en-US" sz="980" dirty="0">
                   <a:solidFill>
-                    <a:srgbClr val="E2E8F0"/>
-                  </a:solidFill>
-                  <a:latin typeface="Inter"/>
-                  <a:ea typeface="Inter"/>
-                  <a:cs typeface="Inter"/>
-                </a:rPr>
-                <a:t>Реестр ИИ-систем, AIA, вендорские ИИ-оговорки, shadow-AI</a:t>
-              </a:r>
-            </a:p>
-          </p:txBody>
-        </p:sp>
-        <p:sp>
-          <p:nvSpPr>
-            <p:cNvPr id="37" name="TextBox 37"/>
-            <p:cNvSpPr txBox="1"/>
-            <p:nvPr/>
-          </p:nvSpPr>
-          <p:spPr>
-            <a:xfrm>
-              <a:off x="6519862" y="5760720"/>
-              <a:ext cx="3518634" cy="176212"/>
-            </a:xfrm>
-            <a:prstGeom prst="rect">
-              <a:avLst/>
-            </a:prstGeom>
-            <a:noFill/>
-            <a:ln>
-              <a:noFill/>
-            </a:ln>
-          </p:spPr>
-          <p:txBody>
-            <a:bodyPr wrap="none" lIns="0" tIns="0" rIns="0" bIns="0" anchor="t" anchorCtr="0">
-              <a:spAutoFit/>
-            </a:bodyPr>
-            <a:lstStyle/>
-            <a:p>
-              <a:pPr algn="l"/>
-              <a:r>
-                <a:rPr lang="en-US" sz="900" dirty="0">
-                  <a:solidFill>
                     <a:srgbClr val="94A3B8"/>
                   </a:solidFill>
                   <a:latin typeface="Inter"/>
                   <a:ea typeface="Inter"/>
                   <a:cs typeface="Inter"/>
                 </a:rPr>
-                <a:t>ЭПР ФЗ-123 [verify] — ГОСТ Р 59276 — 152-ФЗ — 187-ФЗ КИИ</a:t>
+                <a:t>ЭПР ФЗ-258 [verify] — ГОСТ Р 59276 — 152-ФЗ — 187-ФЗ КИИ</a:t>
               </a:r>
             </a:p>
           </p:txBody>
@@ -10789,8 +10995,8 @@
         </p:nvSpPr>
         <p:spPr>
           <a:xfrm>
-            <a:off x="9548278" y="6570345"/>
-            <a:ext cx="2267485" cy="176212"/>
+            <a:off x="9523801" y="6570345"/>
+            <a:ext cx="2291961" cy="176212"/>
           </a:xfrm>
           <a:prstGeom prst="rect">
             <a:avLst/>
@@ -10816,7 +11022,7 @@
                 <a:ea typeface="Inter"/>
                 <a:cs typeface="Inter"/>
               </a:rPr>
-              <a:t>Vector Legal · Hermes Agent · Оsmosy</a:t>
+              <a:t>Vector Legal · Hermes Agent · Osmosy</a:t>
             </a:r>
           </a:p>
         </p:txBody>
@@ -10830,7 +11036,7 @@
         <p:spPr>
           <a:xfrm>
             <a:off x="566166" y="553402"/>
-            <a:ext cx="1202084" cy="205359"/>
+            <a:ext cx="1244889" cy="205359"/>
           </a:xfrm>
           <a:prstGeom prst="rect">
             <a:avLst/>
@@ -10870,7 +11076,7 @@
         <p:spPr>
           <a:xfrm>
             <a:off x="556260" y="819150"/>
-            <a:ext cx="6348870" cy="586740"/>
+            <a:ext cx="6666909" cy="586740"/>
           </a:xfrm>
           <a:prstGeom prst="rect">
             <a:avLst/>
@@ -10983,7 +11189,7 @@
           <p:spPr>
             <a:xfrm>
               <a:off x="802767" y="1968818"/>
-              <a:ext cx="2386020" cy="264033"/>
+              <a:ext cx="2535245" cy="264033"/>
             </a:xfrm>
             <a:prstGeom prst="rect">
               <a:avLst/>
@@ -11022,8 +11228,8 @@
           </p:nvSpPr>
           <p:spPr>
             <a:xfrm>
-              <a:off x="804672" y="2295049"/>
-              <a:ext cx="3591526" cy="190690"/>
+              <a:off x="804291" y="2286952"/>
+              <a:ext cx="4100953" cy="205359"/>
             </a:xfrm>
             <a:prstGeom prst="rect">
               <a:avLst/>
@@ -11041,47 +11247,47 @@
             <a:p>
               <a:pPr algn="l"/>
               <a:r>
+                <a:rPr lang="en-US" sz="1050" dirty="0">
+                  <a:solidFill>
+                    <a:srgbClr val="E2E8F0"/>
+                  </a:solidFill>
+                  <a:latin typeface="Inter"/>
+                  <a:ea typeface="Inter"/>
+                  <a:cs typeface="Inter"/>
+                </a:rPr>
+                <a:t>pravo.gov.ru, гильотина ПП №1128, 44-ФЗ/223-ФЗ, ФАС</a:t>
+              </a:r>
+            </a:p>
+          </p:txBody>
+        </p:sp>
+        <p:sp>
+          <p:nvSpPr>
+            <p:cNvPr id="12" name="TextBox 12"/>
+            <p:cNvSpPr txBox="1"/>
+            <p:nvPr/>
+          </p:nvSpPr>
+          <p:spPr>
+            <a:xfrm>
+              <a:off x="804672" y="2704624"/>
+              <a:ext cx="4083889" cy="190690"/>
+            </a:xfrm>
+            <a:prstGeom prst="rect">
+              <a:avLst/>
+            </a:prstGeom>
+            <a:noFill/>
+            <a:ln>
+              <a:noFill/>
+            </a:ln>
+          </p:spPr>
+          <p:txBody>
+            <a:bodyPr wrap="none" lIns="0" tIns="0" rIns="0" bIns="0" anchor="t" anchorCtr="0">
+              <a:spAutoFit/>
+            </a:bodyPr>
+            <a:lstStyle/>
+            <a:p>
+              <a:pPr algn="l"/>
+              <a:r>
                 <a:rPr lang="en-US" sz="980" dirty="0">
-                  <a:solidFill>
-                    <a:srgbClr val="E2E8F0"/>
-                  </a:solidFill>
-                  <a:latin typeface="Inter"/>
-                  <a:ea typeface="Inter"/>
-                  <a:cs typeface="Inter"/>
-                </a:rPr>
-                <a:t>pravo.gov.ru, гильотина ПП №1128, 44-ФЗ/223-ФЗ, ФАС</a:t>
-              </a:r>
-            </a:p>
-          </p:txBody>
-        </p:sp>
-        <p:sp>
-          <p:nvSpPr>
-            <p:cNvPr id="12" name="TextBox 12"/>
-            <p:cNvSpPr txBox="1"/>
-            <p:nvPr/>
-          </p:nvSpPr>
-          <p:spPr>
-            <a:xfrm>
-              <a:off x="804862" y="2712720"/>
-              <a:ext cx="3540033" cy="176212"/>
-            </a:xfrm>
-            <a:prstGeom prst="rect">
-              <a:avLst/>
-            </a:prstGeom>
-            <a:noFill/>
-            <a:ln>
-              <a:noFill/>
-            </a:ln>
-          </p:spPr>
-          <p:txBody>
-            <a:bodyPr wrap="none" lIns="0" tIns="0" rIns="0" bIns="0" anchor="t" anchorCtr="0">
-              <a:spAutoFit/>
-            </a:bodyPr>
-            <a:lstStyle/>
-            <a:p>
-              <a:pPr algn="l"/>
-              <a:r>
-                <a:rPr lang="en-US" sz="900" dirty="0">
                   <a:solidFill>
                     <a:srgbClr val="94A3B8"/>
                   </a:solidFill>
@@ -11144,7 +11350,7 @@
           <p:spPr>
             <a:xfrm>
               <a:off x="6517767" y="1968818"/>
-              <a:ext cx="3120656" cy="264033"/>
+              <a:ext cx="3309940" cy="264033"/>
             </a:xfrm>
             <a:prstGeom prst="rect">
               <a:avLst/>
@@ -11183,8 +11389,8 @@
           </p:nvSpPr>
           <p:spPr>
             <a:xfrm>
-              <a:off x="6519672" y="2295049"/>
-              <a:ext cx="3991031" cy="190690"/>
+              <a:off x="6519291" y="2286952"/>
+              <a:ext cx="4456666" cy="205359"/>
             </a:xfrm>
             <a:prstGeom prst="rect">
               <a:avLst/>
@@ -11202,47 +11408,47 @@
             <a:p>
               <a:pPr algn="l"/>
               <a:r>
+                <a:rPr lang="en-US" sz="1050" dirty="0">
+                  <a:solidFill>
+                    <a:srgbClr val="E2E8F0"/>
+                  </a:solidFill>
+                  <a:latin typeface="Inter"/>
+                  <a:ea typeface="Inter"/>
+                  <a:cs typeface="Inter"/>
+                </a:rPr>
+                <a:t>Clearance по ФИПС, takedown ст. 1253.1, OSS-совместимость</a:t>
+              </a:r>
+            </a:p>
+          </p:txBody>
+        </p:sp>
+        <p:sp>
+          <p:nvSpPr>
+            <p:cNvPr id="17" name="TextBox 17"/>
+            <p:cNvSpPr txBox="1"/>
+            <p:nvPr/>
+          </p:nvSpPr>
+          <p:spPr>
+            <a:xfrm>
+              <a:off x="6519672" y="2704624"/>
+              <a:ext cx="4264914" cy="190690"/>
+            </a:xfrm>
+            <a:prstGeom prst="rect">
+              <a:avLst/>
+            </a:prstGeom>
+            <a:noFill/>
+            <a:ln>
+              <a:noFill/>
+            </a:ln>
+          </p:spPr>
+          <p:txBody>
+            <a:bodyPr wrap="none" lIns="0" tIns="0" rIns="0" bIns="0" anchor="t" anchorCtr="0">
+              <a:spAutoFit/>
+            </a:bodyPr>
+            <a:lstStyle/>
+            <a:p>
+              <a:pPr algn="l"/>
+              <a:r>
                 <a:rPr lang="en-US" sz="980" dirty="0">
-                  <a:solidFill>
-                    <a:srgbClr val="E2E8F0"/>
-                  </a:solidFill>
-                  <a:latin typeface="Inter"/>
-                  <a:ea typeface="Inter"/>
-                  <a:cs typeface="Inter"/>
-                </a:rPr>
-                <a:t>Clearance по ФИПС, takedown ст. 1253.1, OSS-совместимость</a:t>
-              </a:r>
-            </a:p>
-          </p:txBody>
-        </p:sp>
-        <p:sp>
-          <p:nvSpPr>
-            <p:cNvPr id="17" name="TextBox 17"/>
-            <p:cNvSpPr txBox="1"/>
-            <p:nvPr/>
-          </p:nvSpPr>
-          <p:spPr>
-            <a:xfrm>
-              <a:off x="6519862" y="2712720"/>
-              <a:ext cx="3753114" cy="176212"/>
-            </a:xfrm>
-            <a:prstGeom prst="rect">
-              <a:avLst/>
-            </a:prstGeom>
-            <a:noFill/>
-            <a:ln>
-              <a:noFill/>
-            </a:ln>
-          </p:spPr>
-          <p:txBody>
-            <a:bodyPr wrap="none" lIns="0" tIns="0" rIns="0" bIns="0" anchor="t" anchorCtr="0">
-              <a:spAutoFit/>
-            </a:bodyPr>
-            <a:lstStyle/>
-            <a:p>
-              <a:pPr algn="l"/>
-              <a:r>
-                <a:rPr lang="en-US" sz="900" dirty="0">
                   <a:solidFill>
                     <a:srgbClr val="94A3B8"/>
                   </a:solidFill>
@@ -11305,7 +11511,7 @@
           <p:spPr>
             <a:xfrm>
               <a:off x="802767" y="3492818"/>
-              <a:ext cx="1918735" cy="264033"/>
+              <a:ext cx="2039355" cy="264033"/>
             </a:xfrm>
             <a:prstGeom prst="rect">
               <a:avLst/>
@@ -11344,8 +11550,8 @@
           </p:nvSpPr>
           <p:spPr>
             <a:xfrm>
-              <a:off x="804672" y="3819049"/>
-              <a:ext cx="3722245" cy="190690"/>
+              <a:off x="804291" y="3810952"/>
+              <a:ext cx="4301416" cy="205359"/>
             </a:xfrm>
             <a:prstGeom prst="rect">
               <a:avLst/>
@@ -11363,47 +11569,47 @@
             <a:p>
               <a:pPr algn="l"/>
               <a:r>
+                <a:rPr lang="en-US" sz="1050" dirty="0">
+                  <a:solidFill>
+                    <a:srgbClr val="E2E8F0"/>
+                  </a:solidFill>
+                  <a:latin typeface="Inter"/>
+                  <a:ea typeface="Inter"/>
+                  <a:cs typeface="Inter"/>
+                </a:rPr>
+                <a:t>Launch-review, реклама ФЗ-38 + ЕРИР-маркировка, ЗоЗПП</a:t>
+              </a:r>
+            </a:p>
+          </p:txBody>
+        </p:sp>
+        <p:sp>
+          <p:nvSpPr>
+            <p:cNvPr id="22" name="TextBox 22"/>
+            <p:cNvSpPr txBox="1"/>
+            <p:nvPr/>
+          </p:nvSpPr>
+          <p:spPr>
+            <a:xfrm>
+              <a:off x="804672" y="4228624"/>
+              <a:ext cx="3723039" cy="190690"/>
+            </a:xfrm>
+            <a:prstGeom prst="rect">
+              <a:avLst/>
+            </a:prstGeom>
+            <a:noFill/>
+            <a:ln>
+              <a:noFill/>
+            </a:ln>
+          </p:spPr>
+          <p:txBody>
+            <a:bodyPr wrap="none" lIns="0" tIns="0" rIns="0" bIns="0" anchor="t" anchorCtr="0">
+              <a:spAutoFit/>
+            </a:bodyPr>
+            <a:lstStyle/>
+            <a:p>
+              <a:pPr algn="l"/>
+              <a:r>
                 <a:rPr lang="en-US" sz="980" dirty="0">
-                  <a:solidFill>
-                    <a:srgbClr val="E2E8F0"/>
-                  </a:solidFill>
-                  <a:latin typeface="Inter"/>
-                  <a:ea typeface="Inter"/>
-                  <a:cs typeface="Inter"/>
-                </a:rPr>
-                <a:t>Launch-review, реклама ФЗ-38 + ЕРИР-маркировка, ЗоЗПП</a:t>
-              </a:r>
-            </a:p>
-          </p:txBody>
-        </p:sp>
-        <p:sp>
-          <p:nvSpPr>
-            <p:cNvPr id="22" name="TextBox 22"/>
-            <p:cNvSpPr txBox="1"/>
-            <p:nvPr/>
-          </p:nvSpPr>
-          <p:spPr>
-            <a:xfrm>
-              <a:off x="804862" y="4236720"/>
-              <a:ext cx="3259108" cy="176212"/>
-            </a:xfrm>
-            <a:prstGeom prst="rect">
-              <a:avLst/>
-            </a:prstGeom>
-            <a:noFill/>
-            <a:ln>
-              <a:noFill/>
-            </a:ln>
-          </p:spPr>
-          <p:txBody>
-            <a:bodyPr wrap="none" lIns="0" tIns="0" rIns="0" bIns="0" anchor="t" anchorCtr="0">
-              <a:spAutoFit/>
-            </a:bodyPr>
-            <a:lstStyle/>
-            <a:p>
-              <a:pPr algn="l"/>
-              <a:r>
-                <a:rPr lang="en-US" sz="900" dirty="0">
                   <a:solidFill>
                     <a:srgbClr val="94A3B8"/>
                   </a:solidFill>
@@ -11466,7 +11672,7 @@
           <p:spPr>
             <a:xfrm>
               <a:off x="6517767" y="3492818"/>
-              <a:ext cx="1861298" cy="264033"/>
+              <a:ext cx="1981917" cy="264033"/>
             </a:xfrm>
             <a:prstGeom prst="rect">
               <a:avLst/>
@@ -11505,8 +11711,8 @@
           </p:nvSpPr>
           <p:spPr>
             <a:xfrm>
-              <a:off x="6519672" y="3819049"/>
-              <a:ext cx="3923568" cy="190690"/>
+              <a:off x="6519291" y="3810952"/>
+              <a:ext cx="4347253" cy="205359"/>
             </a:xfrm>
             <a:prstGeom prst="rect">
               <a:avLst/>
@@ -11524,47 +11730,47 @@
             <a:p>
               <a:pPr algn="l"/>
               <a:r>
+                <a:rPr lang="en-US" sz="1050" dirty="0">
+                  <a:solidFill>
+                    <a:srgbClr val="E2E8F0"/>
+                  </a:solidFill>
+                  <a:latin typeface="Inter"/>
+                  <a:ea typeface="Inter"/>
+                  <a:cs typeface="Inter"/>
+                </a:rPr>
+                <a:t>LEARNING MODE — Socratic, IRAC-анализ, case brief по ВС РФ</a:t>
+              </a:r>
+            </a:p>
+          </p:txBody>
+        </p:sp>
+        <p:sp>
+          <p:nvSpPr>
+            <p:cNvPr id="27" name="TextBox 27"/>
+            <p:cNvSpPr txBox="1"/>
+            <p:nvPr/>
+          </p:nvSpPr>
+          <p:spPr>
+            <a:xfrm>
+              <a:off x="6519672" y="4228624"/>
+              <a:ext cx="2872080" cy="190690"/>
+            </a:xfrm>
+            <a:prstGeom prst="rect">
+              <a:avLst/>
+            </a:prstGeom>
+            <a:noFill/>
+            <a:ln>
+              <a:noFill/>
+            </a:ln>
+          </p:spPr>
+          <p:txBody>
+            <a:bodyPr wrap="none" lIns="0" tIns="0" rIns="0" bIns="0" anchor="t" anchorCtr="0">
+              <a:spAutoFit/>
+            </a:bodyPr>
+            <a:lstStyle/>
+            <a:p>
+              <a:pPr algn="l"/>
+              <a:r>
                 <a:rPr lang="en-US" sz="980" dirty="0">
-                  <a:solidFill>
-                    <a:srgbClr val="E2E8F0"/>
-                  </a:solidFill>
-                  <a:latin typeface="Inter"/>
-                  <a:ea typeface="Inter"/>
-                  <a:cs typeface="Inter"/>
-                </a:rPr>
-                <a:t>LEARNING MODE — Socratic, IRAC-анализ, case brief по ВС РФ</a:t>
-              </a:r>
-            </a:p>
-          </p:txBody>
-        </p:sp>
-        <p:sp>
-          <p:nvSpPr>
-            <p:cNvPr id="27" name="TextBox 27"/>
-            <p:cNvSpPr txBox="1"/>
-            <p:nvPr/>
-          </p:nvSpPr>
-          <p:spPr>
-            <a:xfrm>
-              <a:off x="6519862" y="4236720"/>
-              <a:ext cx="2508885" cy="176212"/>
-            </a:xfrm>
-            <a:prstGeom prst="rect">
-              <a:avLst/>
-            </a:prstGeom>
-            <a:noFill/>
-            <a:ln>
-              <a:noFill/>
-            </a:ln>
-          </p:spPr>
-          <p:txBody>
-            <a:bodyPr wrap="none" lIns="0" tIns="0" rIns="0" bIns="0" anchor="t" anchorCtr="0">
-              <a:spAutoFit/>
-            </a:bodyPr>
-            <a:lstStyle/>
-            <a:p>
-              <a:pPr algn="l"/>
-              <a:r>
-                <a:rPr lang="en-US" sz="900" dirty="0">
                   <a:solidFill>
                     <a:srgbClr val="94A3B8"/>
                   </a:solidFill>
@@ -11627,7 +11833,7 @@
           <p:spPr>
             <a:xfrm>
               <a:off x="802767" y="5016818"/>
-              <a:ext cx="1966240" cy="264033"/>
+              <a:ext cx="2092580" cy="264033"/>
             </a:xfrm>
             <a:prstGeom prst="rect">
               <a:avLst/>
@@ -11666,8 +11872,8 @@
           </p:nvSpPr>
           <p:spPr>
             <a:xfrm>
-              <a:off x="804672" y="5343049"/>
-              <a:ext cx="3465088" cy="190690"/>
+              <a:off x="804291" y="5334952"/>
+              <a:ext cx="3935755" cy="205359"/>
             </a:xfrm>
             <a:prstGeom prst="rect">
               <a:avLst/>
@@ -11685,47 +11891,47 @@
             <a:p>
               <a:pPr algn="l"/>
               <a:r>
+                <a:rPr lang="en-US" sz="1050" dirty="0">
+                  <a:solidFill>
+                    <a:srgbClr val="E2E8F0"/>
+                  </a:solidFill>
+                  <a:latin typeface="Inter"/>
+                  <a:ea typeface="Inter"/>
+                  <a:cs typeface="Inter"/>
+                </a:rPr>
+                <a:t>ФЗ-324, супервизор проверяет каждое письмо клиенту</a:t>
+              </a:r>
+            </a:p>
+          </p:txBody>
+        </p:sp>
+        <p:sp>
+          <p:nvSpPr>
+            <p:cNvPr id="32" name="TextBox 32"/>
+            <p:cNvSpPr txBox="1"/>
+            <p:nvPr/>
+          </p:nvSpPr>
+          <p:spPr>
+            <a:xfrm>
+              <a:off x="804672" y="5752624"/>
+              <a:ext cx="3502795" cy="190690"/>
+            </a:xfrm>
+            <a:prstGeom prst="rect">
+              <a:avLst/>
+            </a:prstGeom>
+            <a:noFill/>
+            <a:ln>
+              <a:noFill/>
+            </a:ln>
+          </p:spPr>
+          <p:txBody>
+            <a:bodyPr wrap="none" lIns="0" tIns="0" rIns="0" bIns="0" anchor="t" anchorCtr="0">
+              <a:spAutoFit/>
+            </a:bodyPr>
+            <a:lstStyle/>
+            <a:p>
+              <a:pPr algn="l"/>
+              <a:r>
                 <a:rPr lang="en-US" sz="980" dirty="0">
-                  <a:solidFill>
-                    <a:srgbClr val="E2E8F0"/>
-                  </a:solidFill>
-                  <a:latin typeface="Inter"/>
-                  <a:ea typeface="Inter"/>
-                  <a:cs typeface="Inter"/>
-                </a:rPr>
-                <a:t>ФЗ-324, супервизор проверяет каждое письмо клиенту</a:t>
-              </a:r>
-            </a:p>
-          </p:txBody>
-        </p:sp>
-        <p:sp>
-          <p:nvSpPr>
-            <p:cNvPr id="32" name="TextBox 32"/>
-            <p:cNvSpPr txBox="1"/>
-            <p:nvPr/>
-          </p:nvSpPr>
-          <p:spPr>
-            <a:xfrm>
-              <a:off x="804862" y="5760720"/>
-              <a:ext cx="3076719" cy="176212"/>
-            </a:xfrm>
-            <a:prstGeom prst="rect">
-              <a:avLst/>
-            </a:prstGeom>
-            <a:noFill/>
-            <a:ln>
-              <a:noFill/>
-            </a:ln>
-          </p:spPr>
-          <p:txBody>
-            <a:bodyPr wrap="none" lIns="0" tIns="0" rIns="0" bIns="0" anchor="t" anchorCtr="0">
-              <a:spAutoFit/>
-            </a:bodyPr>
-            <a:lstStyle/>
-            <a:p>
-              <a:pPr algn="l"/>
-              <a:r>
-                <a:rPr lang="en-US" sz="900" dirty="0">
                   <a:solidFill>
                     <a:srgbClr val="94A3B8"/>
                   </a:solidFill>
@@ -11788,7 +11994,7 @@
           <p:spPr>
             <a:xfrm>
               <a:off x="6517767" y="5016818"/>
-              <a:ext cx="1546479" cy="264033"/>
+              <a:ext cx="1649941" cy="264033"/>
             </a:xfrm>
             <a:prstGeom prst="rect">
               <a:avLst/>
@@ -11827,8 +12033,8 @@
           </p:nvSpPr>
           <p:spPr>
             <a:xfrm>
-              <a:off x="6519672" y="5343049"/>
-              <a:ext cx="3560712" cy="190690"/>
+              <a:off x="6519291" y="5334952"/>
+              <a:ext cx="3954468" cy="205359"/>
             </a:xfrm>
             <a:prstGeom prst="rect">
               <a:avLst/>
@@ -11846,47 +12052,47 @@
             <a:p>
               <a:pPr algn="l"/>
               <a:r>
+                <a:rPr lang="en-US" sz="1050" dirty="0">
+                  <a:solidFill>
+                    <a:srgbClr val="E2E8F0"/>
+                  </a:solidFill>
+                  <a:latin typeface="Inter"/>
+                  <a:ea typeface="Inter"/>
+                  <a:cs typeface="Inter"/>
+                </a:rPr>
+                <a:t>Установка, QA 740 строк (13 параметров), SHA-pinning</a:t>
+              </a:r>
+            </a:p>
+          </p:txBody>
+        </p:sp>
+        <p:sp>
+          <p:nvSpPr>
+            <p:cNvPr id="37" name="TextBox 37"/>
+            <p:cNvSpPr txBox="1"/>
+            <p:nvPr/>
+          </p:nvSpPr>
+          <p:spPr>
+            <a:xfrm>
+              <a:off x="6519672" y="5752624"/>
+              <a:ext cx="3483425" cy="190690"/>
+            </a:xfrm>
+            <a:prstGeom prst="rect">
+              <a:avLst/>
+            </a:prstGeom>
+            <a:noFill/>
+            <a:ln>
+              <a:noFill/>
+            </a:ln>
+          </p:spPr>
+          <p:txBody>
+            <a:bodyPr wrap="none" lIns="0" tIns="0" rIns="0" bIns="0" anchor="t" anchorCtr="0">
+              <a:spAutoFit/>
+            </a:bodyPr>
+            <a:lstStyle/>
+            <a:p>
+              <a:pPr algn="l"/>
+              <a:r>
                 <a:rPr lang="en-US" sz="980" dirty="0">
-                  <a:solidFill>
-                    <a:srgbClr val="E2E8F0"/>
-                  </a:solidFill>
-                  <a:latin typeface="Inter"/>
-                  <a:ea typeface="Inter"/>
-                  <a:cs typeface="Inter"/>
-                </a:rPr>
-                <a:t>Установка, QA 740 строк (13 параметров), SHA-pinning</a:t>
-              </a:r>
-            </a:p>
-          </p:txBody>
-        </p:sp>
-        <p:sp>
-          <p:nvSpPr>
-            <p:cNvPr id="37" name="TextBox 37"/>
-            <p:cNvSpPr txBox="1"/>
-            <p:nvPr/>
-          </p:nvSpPr>
-          <p:spPr>
-            <a:xfrm>
-              <a:off x="6519862" y="5760720"/>
-              <a:ext cx="3103029" cy="176212"/>
-            </a:xfrm>
-            <a:prstGeom prst="rect">
-              <a:avLst/>
-            </a:prstGeom>
-            <a:noFill/>
-            <a:ln>
-              <a:noFill/>
-            </a:ln>
-          </p:spPr>
-          <p:txBody>
-            <a:bodyPr wrap="none" lIns="0" tIns="0" rIns="0" bIns="0" anchor="t" anchorCtr="0">
-              <a:spAutoFit/>
-            </a:bodyPr>
-            <a:lstStyle/>
-            <a:p>
-              <a:pPr algn="l"/>
-              <a:r>
-                <a:rPr lang="en-US" sz="900" dirty="0">
                   <a:solidFill>
                     <a:srgbClr val="94A3B8"/>
                   </a:solidFill>
@@ -11933,7 +12139,7 @@
         <p:spPr>
           <a:xfrm>
             <a:off x="566547" y="6295549"/>
-            <a:ext cx="8405330" cy="190690"/>
+            <a:ext cx="8503945" cy="190690"/>
           </a:xfrm>
           <a:prstGeom prst="rect">
             <a:avLst/>
@@ -12136,8 +12342,8 @@
         </p:nvSpPr>
         <p:spPr>
           <a:xfrm>
-            <a:off x="9548278" y="6570345"/>
-            <a:ext cx="2267485" cy="176212"/>
+            <a:off x="9523801" y="6570345"/>
+            <a:ext cx="2291961" cy="176212"/>
           </a:xfrm>
           <a:prstGeom prst="rect">
             <a:avLst/>
@@ -12163,7 +12369,7 @@
                 <a:ea typeface="Inter"/>
                 <a:cs typeface="Inter"/>
               </a:rPr>
-              <a:t>Vector Legal · Hermes Agent · Оsmosy</a:t>
+              <a:t>Vector Legal · Hermes Agent · Osmosy</a:t>
             </a:r>
           </a:p>
         </p:txBody>
@@ -12177,7 +12383,7 @@
         <p:spPr>
           <a:xfrm>
             <a:off x="566166" y="553402"/>
-            <a:ext cx="1189918" cy="205359"/>
+            <a:ext cx="1253854" cy="205359"/>
           </a:xfrm>
           <a:prstGeom prst="rect">
             <a:avLst/>
@@ -12217,7 +12423,7 @@
         <p:spPr>
           <a:xfrm>
             <a:off x="556260" y="819150"/>
-            <a:ext cx="6151871" cy="586740"/>
+            <a:ext cx="6742069" cy="586740"/>
           </a:xfrm>
           <a:prstGeom prst="rect">
             <a:avLst/>
@@ -12243,7 +12449,7 @@
                 <a:ea typeface="Inter"/>
                 <a:cs typeface="Inter"/>
               </a:rPr>
-              <a:t>Профиль практики — ядро всея</a:t>
+              <a:t>Профиль практики — ядро всего</a:t>
             </a:r>
           </a:p>
         </p:txBody>
@@ -12290,7 +12496,7 @@
         <p:spPr>
           <a:xfrm>
             <a:off x="564642" y="1664018"/>
-            <a:ext cx="7387084" cy="264033"/>
+            <a:ext cx="7698404" cy="264033"/>
           </a:xfrm>
           <a:prstGeom prst="rect">
             <a:avLst/>
@@ -12330,9 +12536,9 @@
         <p:grpSpPr>
           <a:xfrm>
             <a:off x="762000" y="2190750"/>
-            <a:ext cx="10668000" cy="1927384"/>
+            <a:ext cx="10668000" cy="1905000"/>
             <a:chOff x="762000" y="2190750"/>
-            <a:chExt cx="10668000" cy="1927384"/>
+            <a:chExt cx="10668000" cy="1905000"/>
           </a:xfrm>
         </p:grpSpPr>
         <p:sp>
@@ -12370,7 +12576,7 @@
           <p:spPr>
             <a:xfrm>
               <a:off x="1136142" y="2473642"/>
-              <a:ext cx="5049035" cy="264033"/>
+              <a:ext cx="5170578" cy="264033"/>
             </a:xfrm>
             <a:prstGeom prst="rect">
               <a:avLst/>
@@ -12410,7 +12616,7 @@
           <p:spPr>
             <a:xfrm>
               <a:off x="1137285" y="2878931"/>
-              <a:ext cx="5844649" cy="220028"/>
+              <a:ext cx="6113524" cy="220028"/>
             </a:xfrm>
             <a:prstGeom prst="rect">
               <a:avLst/>
@@ -12450,7 +12656,7 @@
           <p:spPr>
             <a:xfrm>
               <a:off x="1137285" y="3164681"/>
-              <a:ext cx="3159197" cy="220028"/>
+              <a:ext cx="3332135" cy="220028"/>
             </a:xfrm>
             <a:prstGeom prst="rect">
               <a:avLst/>
@@ -12490,7 +12696,7 @@
           <p:spPr>
             <a:xfrm>
               <a:off x="1137285" y="3450431"/>
-              <a:ext cx="4795008" cy="220028"/>
+              <a:ext cx="5040631" cy="220028"/>
             </a:xfrm>
             <a:prstGeom prst="rect">
               <a:avLst/>
@@ -12529,8 +12735,8 @@
           </p:nvSpPr>
           <p:spPr>
             <a:xfrm>
-              <a:off x="1137285" y="3898106"/>
-              <a:ext cx="6180881" cy="220028"/>
+              <a:off x="1137285" y="3840956"/>
+              <a:ext cx="6444637" cy="220028"/>
             </a:xfrm>
             <a:prstGeom prst="rect">
               <a:avLst/>
@@ -12611,7 +12817,7 @@
           <p:spPr>
             <a:xfrm>
               <a:off x="1040892" y="4664392"/>
-              <a:ext cx="3035559" cy="264033"/>
+              <a:ext cx="3201952" cy="264033"/>
             </a:xfrm>
             <a:prstGeom prst="rect">
               <a:avLst/>
@@ -12651,7 +12857,7 @@
           <p:spPr>
             <a:xfrm>
               <a:off x="1042416" y="5077778"/>
-              <a:ext cx="3697945" cy="205359"/>
+              <a:ext cx="3889032" cy="205359"/>
             </a:xfrm>
             <a:prstGeom prst="rect">
               <a:avLst/>
@@ -12691,7 +12897,7 @@
           <p:spPr>
             <a:xfrm>
               <a:off x="1042416" y="5363528"/>
-              <a:ext cx="2051359" cy="205359"/>
+              <a:ext cx="2161897" cy="205359"/>
             </a:xfrm>
             <a:prstGeom prst="rect">
               <a:avLst/>
@@ -12731,7 +12937,7 @@
           <p:spPr>
             <a:xfrm>
               <a:off x="1042416" y="5649278"/>
-              <a:ext cx="3294771" cy="205359"/>
+              <a:ext cx="3477378" cy="205359"/>
             </a:xfrm>
             <a:prstGeom prst="rect">
               <a:avLst/>
@@ -12771,7 +12977,7 @@
           <p:spPr>
             <a:xfrm>
               <a:off x="1042416" y="5935028"/>
-              <a:ext cx="4001780" cy="205359"/>
+              <a:ext cx="4209827" cy="205359"/>
             </a:xfrm>
             <a:prstGeom prst="rect">
               <a:avLst/>
@@ -12852,7 +13058,7 @@
           <p:spPr>
             <a:xfrm>
               <a:off x="6565392" y="4664392"/>
-              <a:ext cx="1966240" cy="264033"/>
+              <a:ext cx="2092580" cy="264033"/>
             </a:xfrm>
             <a:prstGeom prst="rect">
               <a:avLst/>
@@ -12892,7 +13098,7 @@
           <p:spPr>
             <a:xfrm>
               <a:off x="6566916" y="5077778"/>
-              <a:ext cx="4284721" cy="205359"/>
+              <a:ext cx="4497008" cy="205359"/>
             </a:xfrm>
             <a:prstGeom prst="rect">
               <a:avLst/>
@@ -12932,7 +13138,7 @@
           <p:spPr>
             <a:xfrm>
               <a:off x="6566916" y="5363528"/>
-              <a:ext cx="2638226" cy="205359"/>
+              <a:ext cx="2769958" cy="205359"/>
             </a:xfrm>
             <a:prstGeom prst="rect">
               <a:avLst/>
@@ -12972,7 +13178,7 @@
           <p:spPr>
             <a:xfrm>
               <a:off x="6566916" y="5649278"/>
-              <a:ext cx="3350044" cy="205359"/>
+              <a:ext cx="3537617" cy="205359"/>
             </a:xfrm>
             <a:prstGeom prst="rect">
               <a:avLst/>
@@ -13012,7 +13218,7 @@
           <p:spPr>
             <a:xfrm>
               <a:off x="6566916" y="5935028"/>
-              <a:ext cx="4111633" cy="205359"/>
+              <a:ext cx="4385030" cy="205359"/>
             </a:xfrm>
             <a:prstGeom prst="rect">
               <a:avLst/>
@@ -13038,7 +13244,7 @@
                   <a:ea typeface="Inter"/>
                   <a:cs typeface="Inter"/>
                 </a:rPr>
-                <a:t>Заявки Росpatent, споры СИПН — intake, дальше специалист</a:t>
+                <a:t>Заявки Роспатент, споры СИПН — intake, дальше специалист</a:t>
               </a:r>
             </a:p>
           </p:txBody>
@@ -13216,8 +13422,8 @@
         </p:nvSpPr>
         <p:spPr>
           <a:xfrm>
-            <a:off x="9548278" y="6570345"/>
-            <a:ext cx="2267485" cy="176212"/>
+            <a:off x="9333408" y="6562249"/>
+            <a:ext cx="2482545" cy="190690"/>
           </a:xfrm>
           <a:prstGeom prst="rect">
             <a:avLst/>
@@ -13235,7 +13441,7 @@
           <a:p>
             <a:pPr algn="r"/>
             <a:r>
-              <a:rPr lang="en-US" sz="900" dirty="0">
+              <a:rPr lang="en-US" sz="980" dirty="0">
                 <a:solidFill>
                   <a:srgbClr val="64748B"/>
                 </a:solidFill>
@@ -13243,7 +13449,7 @@
                 <a:ea typeface="Inter"/>
                 <a:cs typeface="Inter"/>
               </a:rPr>
-              <a:t>Vector Legal · Hermes Agent · Оsmosy</a:t>
+              <a:t>Vector Legal · Hermes Agent · Osmosy</a:t>
             </a:r>
           </a:p>
         </p:txBody>
@@ -13257,7 +13463,7 @@
         <p:spPr>
           <a:xfrm>
             <a:off x="566166" y="553402"/>
-            <a:ext cx="1698346" cy="205359"/>
+            <a:ext cx="1787693" cy="205359"/>
           </a:xfrm>
           <a:prstGeom prst="rect">
             <a:avLst/>
@@ -13297,7 +13503,7 @@
         <p:spPr>
           <a:xfrm>
             <a:off x="556260" y="819150"/>
-            <a:ext cx="7536218" cy="586740"/>
+            <a:ext cx="7905144" cy="586740"/>
           </a:xfrm>
           <a:prstGeom prst="rect">
             <a:avLst/>
@@ -13409,8 +13615,8 @@
           </p:nvSpPr>
           <p:spPr>
             <a:xfrm>
-              <a:off x="1041273" y="2100739"/>
-              <a:ext cx="1081912" cy="249364"/>
+              <a:off x="1040892" y="2092642"/>
+              <a:ext cx="1297766" cy="264033"/>
             </a:xfrm>
             <a:prstGeom prst="rect">
               <a:avLst/>
@@ -13428,7 +13634,7 @@
             <a:p>
               <a:pPr algn="l"/>
               <a:r>
-                <a:rPr lang="en-US" sz="1280" b="1" dirty="0">
+                <a:rPr lang="en-US" sz="1350" b="1" dirty="0">
                   <a:solidFill>
                     <a:srgbClr val="38BDF8"/>
                   </a:solidFill>
@@ -13449,8 +13655,8 @@
           </p:nvSpPr>
           <p:spPr>
             <a:xfrm>
-              <a:off x="1042797" y="2466499"/>
-              <a:ext cx="3500192" cy="190690"/>
+              <a:off x="1042416" y="2458402"/>
+              <a:ext cx="3833146" cy="205359"/>
             </a:xfrm>
             <a:prstGeom prst="rect">
               <a:avLst/>
@@ -13468,87 +13674,87 @@
             <a:p>
               <a:pPr algn="l"/>
               <a:r>
+                <a:rPr lang="en-US" sz="1050" dirty="0">
+                  <a:solidFill>
+                    <a:srgbClr val="E2E8F0"/>
+                  </a:solidFill>
+                  <a:latin typeface="Inter"/>
+                  <a:ea typeface="Inter"/>
+                  <a:cs typeface="Inter"/>
+                </a:rPr>
+                <a:t>Понедельник 09:00 — pravo.gov.ru, regulation.gov.ru</a:t>
+              </a:r>
+            </a:p>
+          </p:txBody>
+        </p:sp>
+        <p:sp>
+          <p:nvSpPr>
+            <p:cNvPr id="12" name="TextBox 12"/>
+            <p:cNvSpPr txBox="1"/>
+            <p:nvPr/>
+          </p:nvSpPr>
+          <p:spPr>
+            <a:xfrm>
+              <a:off x="1042416" y="2696528"/>
+              <a:ext cx="4150164" cy="205359"/>
+            </a:xfrm>
+            <a:prstGeom prst="rect">
+              <a:avLst/>
+            </a:prstGeom>
+            <a:noFill/>
+            <a:ln>
+              <a:noFill/>
+            </a:ln>
+          </p:spPr>
+          <p:txBody>
+            <a:bodyPr wrap="none" lIns="0" tIns="0" rIns="0" bIns="0" anchor="t" anchorCtr="0">
+              <a:spAutoFit/>
+            </a:bodyPr>
+            <a:lstStyle/>
+            <a:p>
+              <a:pPr algn="l"/>
+              <a:r>
+                <a:rPr lang="en-US" sz="1050" dirty="0">
+                  <a:solidFill>
+                    <a:srgbClr val="94A3B8"/>
+                  </a:solidFill>
+                  <a:latin typeface="Inter"/>
+                  <a:ea typeface="Inter"/>
+                  <a:cs typeface="Inter"/>
+                </a:rPr>
+                <a:t>Проверка материальности, разрывы, еженедельный digest</a:t>
+              </a:r>
+            </a:p>
+          </p:txBody>
+        </p:sp>
+        <p:sp>
+          <p:nvSpPr>
+            <p:cNvPr id="13" name="TextBox 13"/>
+            <p:cNvSpPr txBox="1"/>
+            <p:nvPr/>
+          </p:nvSpPr>
+          <p:spPr>
+            <a:xfrm>
+              <a:off x="1042797" y="2942749"/>
+              <a:ext cx="2693405" cy="190690"/>
+            </a:xfrm>
+            <a:prstGeom prst="rect">
+              <a:avLst/>
+            </a:prstGeom>
+            <a:noFill/>
+            <a:ln>
+              <a:noFill/>
+            </a:ln>
+          </p:spPr>
+          <p:txBody>
+            <a:bodyPr wrap="none" lIns="0" tIns="0" rIns="0" bIns="0" anchor="t" anchorCtr="0">
+              <a:spAutoFit/>
+            </a:bodyPr>
+            <a:lstStyle/>
+            <a:p>
+              <a:pPr algn="l"/>
+              <a:r>
                 <a:rPr lang="en-US" sz="980" dirty="0">
-                  <a:solidFill>
-                    <a:srgbClr val="E2E8F0"/>
-                  </a:solidFill>
-                  <a:latin typeface="Inter"/>
-                  <a:ea typeface="Inter"/>
-                  <a:cs typeface="Inter"/>
-                </a:rPr>
-                <a:t>Понедельник 09:00 — pravo.gov.ru, regulation.gov.ru</a:t>
-              </a:r>
-            </a:p>
-          </p:txBody>
-        </p:sp>
-        <p:sp>
-          <p:nvSpPr>
-            <p:cNvPr id="12" name="TextBox 12"/>
-            <p:cNvSpPr txBox="1"/>
-            <p:nvPr/>
-          </p:nvSpPr>
-          <p:spPr>
-            <a:xfrm>
-              <a:off x="1042797" y="2704624"/>
-              <a:ext cx="3676317" cy="190690"/>
-            </a:xfrm>
-            <a:prstGeom prst="rect">
-              <a:avLst/>
-            </a:prstGeom>
-            <a:noFill/>
-            <a:ln>
-              <a:noFill/>
-            </a:ln>
-          </p:spPr>
-          <p:txBody>
-            <a:bodyPr wrap="none" lIns="0" tIns="0" rIns="0" bIns="0" anchor="t" anchorCtr="0">
-              <a:spAutoFit/>
-            </a:bodyPr>
-            <a:lstStyle/>
-            <a:p>
-              <a:pPr algn="l"/>
-              <a:r>
-                <a:rPr lang="en-US" sz="980" dirty="0">
-                  <a:solidFill>
-                    <a:srgbClr val="94A3B8"/>
-                  </a:solidFill>
-                  <a:latin typeface="Inter"/>
-                  <a:ea typeface="Inter"/>
-                  <a:cs typeface="Inter"/>
-                </a:rPr>
-                <a:t>Проверка материальности, разрывы, еженедельный digest</a:t>
-              </a:r>
-            </a:p>
-          </p:txBody>
-        </p:sp>
-        <p:sp>
-          <p:nvSpPr>
-            <p:cNvPr id="13" name="TextBox 13"/>
-            <p:cNvSpPr txBox="1"/>
-            <p:nvPr/>
-          </p:nvSpPr>
-          <p:spPr>
-            <a:xfrm>
-              <a:off x="1042988" y="2950845"/>
-              <a:ext cx="2351885" cy="176212"/>
-            </a:xfrm>
-            <a:prstGeom prst="rect">
-              <a:avLst/>
-            </a:prstGeom>
-            <a:noFill/>
-            <a:ln>
-              <a:noFill/>
-            </a:ln>
-          </p:spPr>
-          <p:txBody>
-            <a:bodyPr wrap="none" lIns="0" tIns="0" rIns="0" bIns="0" anchor="t" anchorCtr="0">
-              <a:spAutoFit/>
-            </a:bodyPr>
-            <a:lstStyle/>
-            <a:p>
-              <a:pPr algn="l"/>
-              <a:r>
-                <a:rPr lang="en-US" sz="900" dirty="0">
                   <a:solidFill>
                     <a:srgbClr val="64748B"/>
                   </a:solidFill>
@@ -13610,8 +13816,8 @@
           </p:nvSpPr>
           <p:spPr>
             <a:xfrm>
-              <a:off x="6565773" y="2100739"/>
-              <a:ext cx="1658781" cy="249364"/>
+              <a:off x="6565392" y="2092642"/>
+              <a:ext cx="1871256" cy="264033"/>
             </a:xfrm>
             <a:prstGeom prst="rect">
               <a:avLst/>
@@ -13629,7 +13835,7 @@
             <a:p>
               <a:pPr algn="l"/>
               <a:r>
-                <a:rPr lang="en-US" sz="1280" b="1" dirty="0">
+                <a:rPr lang="en-US" sz="1350" b="1" dirty="0">
                   <a:solidFill>
                     <a:srgbClr val="38BDF8"/>
                   </a:solidFill>
@@ -13650,8 +13856,8 @@
           </p:nvSpPr>
           <p:spPr>
             <a:xfrm>
-              <a:off x="6567297" y="2466499"/>
-              <a:ext cx="3211274" cy="190690"/>
+              <a:off x="6566916" y="2458402"/>
+              <a:ext cx="3585723" cy="205359"/>
             </a:xfrm>
             <a:prstGeom prst="rect">
               <a:avLst/>
@@ -13669,87 +13875,87 @@
             <a:p>
               <a:pPr algn="l"/>
               <a:r>
+                <a:rPr lang="en-US" sz="1050" dirty="0">
+                  <a:solidFill>
+                    <a:srgbClr val="E2E8F0"/>
+                  </a:solidFill>
+                  <a:latin typeface="Inter"/>
+                  <a:ea typeface="Inter"/>
+                  <a:cs typeface="Inter"/>
+                </a:rPr>
+                <a:t>Понедельник 09:00 — договоры, дедлайн cancel-by</a:t>
+              </a:r>
+            </a:p>
+          </p:txBody>
+        </p:sp>
+        <p:sp>
+          <p:nvSpPr>
+            <p:cNvPr id="18" name="TextBox 18"/>
+            <p:cNvSpPr txBox="1"/>
+            <p:nvPr/>
+          </p:nvSpPr>
+          <p:spPr>
+            <a:xfrm>
+              <a:off x="6566916" y="2696528"/>
+              <a:ext cx="2908603" cy="205359"/>
+            </a:xfrm>
+            <a:prstGeom prst="rect">
+              <a:avLst/>
+            </a:prstGeom>
+            <a:noFill/>
+            <a:ln>
+              <a:noFill/>
+            </a:ln>
+          </p:spPr>
+          <p:txBody>
+            <a:bodyPr wrap="none" lIns="0" tIns="0" rIns="0" bIns="0" anchor="t" anchorCtr="0">
+              <a:spAutoFit/>
+            </a:bodyPr>
+            <a:lstStyle/>
+            <a:p>
+              <a:pPr algn="l"/>
+              <a:r>
+                <a:rPr lang="en-US" sz="1050" dirty="0">
+                  <a:solidFill>
+                    <a:srgbClr val="94A3B8"/>
+                  </a:solidFill>
+                  <a:latin typeface="Inter"/>
+                  <a:ea typeface="Inter"/>
+                  <a:cs typeface="Inter"/>
+                </a:rPr>
+                <a:t>Дата отправки с учётом бизнес-дней РФ</a:t>
+              </a:r>
+            </a:p>
+          </p:txBody>
+        </p:sp>
+        <p:sp>
+          <p:nvSpPr>
+            <p:cNvPr id="19" name="TextBox 19"/>
+            <p:cNvSpPr txBox="1"/>
+            <p:nvPr/>
+          </p:nvSpPr>
+          <p:spPr>
+            <a:xfrm>
+              <a:off x="6567297" y="2942749"/>
+              <a:ext cx="2541169" cy="190690"/>
+            </a:xfrm>
+            <a:prstGeom prst="rect">
+              <a:avLst/>
+            </a:prstGeom>
+            <a:noFill/>
+            <a:ln>
+              <a:noFill/>
+            </a:ln>
+          </p:spPr>
+          <p:txBody>
+            <a:bodyPr wrap="none" lIns="0" tIns="0" rIns="0" bIns="0" anchor="t" anchorCtr="0">
+              <a:spAutoFit/>
+            </a:bodyPr>
+            <a:lstStyle/>
+            <a:p>
+              <a:pPr algn="l"/>
+              <a:r>
                 <a:rPr lang="en-US" sz="980" dirty="0">
-                  <a:solidFill>
-                    <a:srgbClr val="E2E8F0"/>
-                  </a:solidFill>
-                  <a:latin typeface="Inter"/>
-                  <a:ea typeface="Inter"/>
-                  <a:cs typeface="Inter"/>
-                </a:rPr>
-                <a:t>Понедельник 09:00 — договоры, дедлайн cancel-by</a:t>
-              </a:r>
-            </a:p>
-          </p:txBody>
-        </p:sp>
-        <p:sp>
-          <p:nvSpPr>
-            <p:cNvPr id="18" name="TextBox 18"/>
-            <p:cNvSpPr txBox="1"/>
-            <p:nvPr/>
-          </p:nvSpPr>
-          <p:spPr>
-            <a:xfrm>
-              <a:off x="6567297" y="2704624"/>
-              <a:ext cx="2530600" cy="190690"/>
-            </a:xfrm>
-            <a:prstGeom prst="rect">
-              <a:avLst/>
-            </a:prstGeom>
-            <a:noFill/>
-            <a:ln>
-              <a:noFill/>
-            </a:ln>
-          </p:spPr>
-          <p:txBody>
-            <a:bodyPr wrap="none" lIns="0" tIns="0" rIns="0" bIns="0" anchor="t" anchorCtr="0">
-              <a:spAutoFit/>
-            </a:bodyPr>
-            <a:lstStyle/>
-            <a:p>
-              <a:pPr algn="l"/>
-              <a:r>
-                <a:rPr lang="en-US" sz="980" dirty="0">
-                  <a:solidFill>
-                    <a:srgbClr val="94A3B8"/>
-                  </a:solidFill>
-                  <a:latin typeface="Inter"/>
-                  <a:ea typeface="Inter"/>
-                  <a:cs typeface="Inter"/>
-                </a:rPr>
-                <a:t>Дата отправки с учётом бизнес-дней РФ</a:t>
-              </a:r>
-            </a:p>
-          </p:txBody>
-        </p:sp>
-        <p:sp>
-          <p:nvSpPr>
-            <p:cNvPr id="19" name="TextBox 19"/>
-            <p:cNvSpPr txBox="1"/>
-            <p:nvPr/>
-          </p:nvSpPr>
-          <p:spPr>
-            <a:xfrm>
-              <a:off x="6567488" y="2950845"/>
-              <a:ext cx="2218627" cy="176212"/>
-            </a:xfrm>
-            <a:prstGeom prst="rect">
-              <a:avLst/>
-            </a:prstGeom>
-            <a:noFill/>
-            <a:ln>
-              <a:noFill/>
-            </a:ln>
-          </p:spPr>
-          <p:txBody>
-            <a:bodyPr wrap="none" lIns="0" tIns="0" rIns="0" bIns="0" anchor="t" anchorCtr="0">
-              <a:spAutoFit/>
-            </a:bodyPr>
-            <a:lstStyle/>
-            <a:p>
-              <a:pPr algn="l"/>
-              <a:r>
-                <a:rPr lang="en-US" sz="900" dirty="0">
                   <a:solidFill>
                     <a:srgbClr val="64748B"/>
                   </a:solidFill>
@@ -13811,8 +14017,8 @@
           </p:nvSpPr>
           <p:spPr>
             <a:xfrm>
-              <a:off x="1041273" y="3767614"/>
-              <a:ext cx="1911241" cy="249364"/>
+              <a:off x="1040892" y="3759518"/>
+              <a:ext cx="2150007" cy="264033"/>
             </a:xfrm>
             <a:prstGeom prst="rect">
               <a:avLst/>
@@ -13830,7 +14036,7 @@
             <a:p>
               <a:pPr algn="l"/>
               <a:r>
-                <a:rPr lang="en-US" sz="1280" b="1" dirty="0">
+                <a:rPr lang="en-US" sz="1350" b="1" dirty="0">
                   <a:solidFill>
                     <a:srgbClr val="38BDF8"/>
                   </a:solidFill>
@@ -13851,8 +14057,8 @@
           </p:nvSpPr>
           <p:spPr>
             <a:xfrm>
-              <a:off x="1042797" y="4133374"/>
-              <a:ext cx="3235132" cy="190690"/>
+              <a:off x="1042416" y="4125278"/>
+              <a:ext cx="3625203" cy="205359"/>
             </a:xfrm>
             <a:prstGeom prst="rect">
               <a:avLst/>
@@ -13870,87 +14076,87 @@
             <a:p>
               <a:pPr algn="l"/>
               <a:r>
+                <a:rPr lang="en-US" sz="1050" dirty="0">
+                  <a:solidFill>
+                    <a:srgbClr val="E2E8F0"/>
+                  </a:solidFill>
+                  <a:latin typeface="Inter"/>
+                  <a:ea typeface="Inter"/>
+                  <a:cs typeface="Inter"/>
+                </a:rPr>
+                <a:t>Ежедневно 08:00 — kad.arbitr.ru, sudrf.ru, ФИПС</a:t>
+              </a:r>
+            </a:p>
+          </p:txBody>
+        </p:sp>
+        <p:sp>
+          <p:nvSpPr>
+            <p:cNvPr id="24" name="TextBox 24"/>
+            <p:cNvSpPr txBox="1"/>
+            <p:nvPr/>
+          </p:nvSpPr>
+          <p:spPr>
+            <a:xfrm>
+              <a:off x="1042416" y="4363402"/>
+              <a:ext cx="2938977" cy="205359"/>
+            </a:xfrm>
+            <a:prstGeom prst="rect">
+              <a:avLst/>
+            </a:prstGeom>
+            <a:noFill/>
+            <a:ln>
+              <a:noFill/>
+            </a:ln>
+          </p:spPr>
+          <p:txBody>
+            <a:bodyPr wrap="none" lIns="0" tIns="0" rIns="0" bIns="0" anchor="t" anchorCtr="0">
+              <a:spAutoFit/>
+            </a:bodyPr>
+            <a:lstStyle/>
+            <a:p>
+              <a:pPr algn="l"/>
+              <a:r>
+                <a:rPr lang="en-US" sz="1050" dirty="0">
+                  <a:solidFill>
+                    <a:srgbClr val="94A3B8"/>
+                  </a:solidFill>
+                  <a:latin typeface="Inter"/>
+                  <a:ea typeface="Inter"/>
+                  <a:cs typeface="Inter"/>
+                </a:rPr>
+                <a:t>Новые подачи, дедлайны, постановления</a:t>
+              </a:r>
+            </a:p>
+          </p:txBody>
+        </p:sp>
+        <p:sp>
+          <p:nvSpPr>
+            <p:cNvPr id="25" name="TextBox 25"/>
+            <p:cNvSpPr txBox="1"/>
+            <p:nvPr/>
+          </p:nvSpPr>
+          <p:spPr>
+            <a:xfrm>
+              <a:off x="1042797" y="4609624"/>
+              <a:ext cx="3650430" cy="190690"/>
+            </a:xfrm>
+            <a:prstGeom prst="rect">
+              <a:avLst/>
+            </a:prstGeom>
+            <a:noFill/>
+            <a:ln>
+              <a:noFill/>
+            </a:ln>
+          </p:spPr>
+          <p:txBody>
+            <a:bodyPr wrap="none" lIns="0" tIns="0" rIns="0" bIns="0" anchor="t" anchorCtr="0">
+              <a:spAutoFit/>
+            </a:bodyPr>
+            <a:lstStyle/>
+            <a:p>
+              <a:pPr algn="l"/>
+              <a:r>
                 <a:rPr lang="en-US" sz="980" dirty="0">
-                  <a:solidFill>
-                    <a:srgbClr val="E2E8F0"/>
-                  </a:solidFill>
-                  <a:latin typeface="Inter"/>
-                  <a:ea typeface="Inter"/>
-                  <a:cs typeface="Inter"/>
-                </a:rPr>
-                <a:t>Ежедневно 08:00 — kad.arbitr.ru, sudrf.ru, ФИПС</a:t>
-              </a:r>
-            </a:p>
-          </p:txBody>
-        </p:sp>
-        <p:sp>
-          <p:nvSpPr>
-            <p:cNvPr id="24" name="TextBox 24"/>
-            <p:cNvSpPr txBox="1"/>
-            <p:nvPr/>
-          </p:nvSpPr>
-          <p:spPr>
-            <a:xfrm>
-              <a:off x="1042797" y="4371499"/>
-              <a:ext cx="2587045" cy="190690"/>
-            </a:xfrm>
-            <a:prstGeom prst="rect">
-              <a:avLst/>
-            </a:prstGeom>
-            <a:noFill/>
-            <a:ln>
-              <a:noFill/>
-            </a:ln>
-          </p:spPr>
-          <p:txBody>
-            <a:bodyPr wrap="none" lIns="0" tIns="0" rIns="0" bIns="0" anchor="t" anchorCtr="0">
-              <a:spAutoFit/>
-            </a:bodyPr>
-            <a:lstStyle/>
-            <a:p>
-              <a:pPr algn="l"/>
-              <a:r>
-                <a:rPr lang="en-US" sz="980" dirty="0">
-                  <a:solidFill>
-                    <a:srgbClr val="94A3B8"/>
-                  </a:solidFill>
-                  <a:latin typeface="Inter"/>
-                  <a:ea typeface="Inter"/>
-                  <a:cs typeface="Inter"/>
-                </a:rPr>
-                <a:t>Новые подачи, дедлайны, постановления</a:t>
-              </a:r>
-            </a:p>
-          </p:txBody>
-        </p:sp>
-        <p:sp>
-          <p:nvSpPr>
-            <p:cNvPr id="25" name="TextBox 25"/>
-            <p:cNvSpPr txBox="1"/>
-            <p:nvPr/>
-          </p:nvSpPr>
-          <p:spPr>
-            <a:xfrm>
-              <a:off x="1042988" y="4617720"/>
-              <a:ext cx="3235152" cy="176212"/>
-            </a:xfrm>
-            <a:prstGeom prst="rect">
-              <a:avLst/>
-            </a:prstGeom>
-            <a:noFill/>
-            <a:ln>
-              <a:noFill/>
-            </a:ln>
-          </p:spPr>
-          <p:txBody>
-            <a:bodyPr wrap="none" lIns="0" tIns="0" rIns="0" bIns="0" anchor="t" anchorCtr="0">
-              <a:spAutoFit/>
-            </a:bodyPr>
-            <a:lstStyle/>
-            <a:p>
-              <a:pPr algn="l"/>
-              <a:r>
-                <a:rPr lang="en-US" sz="900" dirty="0">
                   <a:solidFill>
                     <a:srgbClr val="64748B"/>
                   </a:solidFill>
@@ -14012,8 +14218,8 @@
           </p:nvSpPr>
           <p:spPr>
             <a:xfrm>
-              <a:off x="6565773" y="3767614"/>
-              <a:ext cx="2505891" cy="249364"/>
+              <a:off x="6565392" y="3759518"/>
+              <a:ext cx="2813966" cy="264033"/>
             </a:xfrm>
             <a:prstGeom prst="rect">
               <a:avLst/>
@@ -14031,7 +14237,7 @@
             <a:p>
               <a:pPr algn="l"/>
               <a:r>
-                <a:rPr lang="en-US" sz="1280" b="1" dirty="0">
+                <a:rPr lang="en-US" sz="1350" b="1" dirty="0">
                   <a:solidFill>
                     <a:srgbClr val="38BDF8"/>
                   </a:solidFill>
@@ -14052,8 +14258,8 @@
           </p:nvSpPr>
           <p:spPr>
             <a:xfrm>
-              <a:off x="6567297" y="4133374"/>
-              <a:ext cx="2627151" cy="190690"/>
+              <a:off x="6566916" y="4125278"/>
+              <a:ext cx="2965211" cy="205359"/>
             </a:xfrm>
             <a:prstGeom prst="rect">
               <a:avLst/>
@@ -14071,87 +14277,87 @@
             <a:p>
               <a:pPr algn="l"/>
               <a:r>
+                <a:rPr lang="en-US" sz="1050" dirty="0">
+                  <a:solidFill>
+                    <a:srgbClr val="E2E8F0"/>
+                  </a:solidFill>
+                  <a:latin typeface="Inter"/>
+                  <a:ea typeface="Inter"/>
+                  <a:cs typeface="Inter"/>
+                </a:rPr>
+                <a:t>Понедельник 10:00 — продуктовый трекер</a:t>
+              </a:r>
+            </a:p>
+          </p:txBody>
+        </p:sp>
+        <p:sp>
+          <p:nvSpPr>
+            <p:cNvPr id="30" name="TextBox 30"/>
+            <p:cNvSpPr txBox="1"/>
+            <p:nvPr/>
+          </p:nvSpPr>
+          <p:spPr>
+            <a:xfrm>
+              <a:off x="6566916" y="4363402"/>
+              <a:ext cx="3564232" cy="205359"/>
+            </a:xfrm>
+            <a:prstGeom prst="rect">
+              <a:avLst/>
+            </a:prstGeom>
+            <a:noFill/>
+            <a:ln>
+              <a:noFill/>
+            </a:ln>
+          </p:spPr>
+          <p:txBody>
+            <a:bodyPr wrap="none" lIns="0" tIns="0" rIns="0" bIns="0" anchor="t" anchorCtr="0">
+              <a:spAutoFit/>
+            </a:bodyPr>
+            <a:lstStyle/>
+            <a:p>
+              <a:pPr algn="l"/>
+              <a:r>
+                <a:rPr lang="en-US" sz="1050" dirty="0">
+                  <a:solidFill>
+                    <a:srgbClr val="94A3B8"/>
+                  </a:solidFill>
+                  <a:latin typeface="Inter"/>
+                  <a:ea typeface="Inter"/>
+                  <a:cs typeface="Inter"/>
+                </a:rPr>
+                <a:t>9-категорийный фреймворк — риск-классификация</a:t>
+              </a:r>
+            </a:p>
+          </p:txBody>
+        </p:sp>
+        <p:sp>
+          <p:nvSpPr>
+            <p:cNvPr id="31" name="TextBox 31"/>
+            <p:cNvSpPr txBox="1"/>
+            <p:nvPr/>
+          </p:nvSpPr>
+          <p:spPr>
+            <a:xfrm>
+              <a:off x="6567297" y="4609624"/>
+              <a:ext cx="2236703" cy="190690"/>
+            </a:xfrm>
+            <a:prstGeom prst="rect">
+              <a:avLst/>
+            </a:prstGeom>
+            <a:noFill/>
+            <a:ln>
+              <a:noFill/>
+            </a:ln>
+          </p:spPr>
+          <p:txBody>
+            <a:bodyPr wrap="none" lIns="0" tIns="0" rIns="0" bIns="0" anchor="t" anchorCtr="0">
+              <a:spAutoFit/>
+            </a:bodyPr>
+            <a:lstStyle/>
+            <a:p>
+              <a:pPr algn="l"/>
+              <a:r>
                 <a:rPr lang="en-US" sz="980" dirty="0">
-                  <a:solidFill>
-                    <a:srgbClr val="E2E8F0"/>
-                  </a:solidFill>
-                  <a:latin typeface="Inter"/>
-                  <a:ea typeface="Inter"/>
-                  <a:cs typeface="Inter"/>
-                </a:rPr>
-                <a:t>Понедельник 10:00 — продуктовый трекер</a:t>
-              </a:r>
-            </a:p>
-          </p:txBody>
-        </p:sp>
-        <p:sp>
-          <p:nvSpPr>
-            <p:cNvPr id="30" name="TextBox 30"/>
-            <p:cNvSpPr txBox="1"/>
-            <p:nvPr/>
-          </p:nvSpPr>
-          <p:spPr>
-            <a:xfrm>
-              <a:off x="6567297" y="4371499"/>
-              <a:ext cx="3160014" cy="190690"/>
-            </a:xfrm>
-            <a:prstGeom prst="rect">
-              <a:avLst/>
-            </a:prstGeom>
-            <a:noFill/>
-            <a:ln>
-              <a:noFill/>
-            </a:ln>
-          </p:spPr>
-          <p:txBody>
-            <a:bodyPr wrap="none" lIns="0" tIns="0" rIns="0" bIns="0" anchor="t" anchorCtr="0">
-              <a:spAutoFit/>
-            </a:bodyPr>
-            <a:lstStyle/>
-            <a:p>
-              <a:pPr algn="l"/>
-              <a:r>
-                <a:rPr lang="en-US" sz="980" dirty="0">
-                  <a:solidFill>
-                    <a:srgbClr val="94A3B8"/>
-                  </a:solidFill>
-                  <a:latin typeface="Inter"/>
-                  <a:ea typeface="Inter"/>
-                  <a:cs typeface="Inter"/>
-                </a:rPr>
-                <a:t>9-категорийный фреймворк — риск-классификация</a:t>
-              </a:r>
-            </a:p>
-          </p:txBody>
-        </p:sp>
-        <p:sp>
-          <p:nvSpPr>
-            <p:cNvPr id="31" name="TextBox 31"/>
-            <p:cNvSpPr txBox="1"/>
-            <p:nvPr/>
-          </p:nvSpPr>
-          <p:spPr>
-            <a:xfrm>
-              <a:off x="6567488" y="4617720"/>
-              <a:ext cx="1952117" cy="176212"/>
-            </a:xfrm>
-            <a:prstGeom prst="rect">
-              <a:avLst/>
-            </a:prstGeom>
-            <a:noFill/>
-            <a:ln>
-              <a:noFill/>
-            </a:ln>
-          </p:spPr>
-          <p:txBody>
-            <a:bodyPr wrap="none" lIns="0" tIns="0" rIns="0" bIns="0" anchor="t" anchorCtr="0">
-              <a:spAutoFit/>
-            </a:bodyPr>
-            <a:lstStyle/>
-            <a:p>
-              <a:pPr algn="l"/>
-              <a:r>
-                <a:rPr lang="en-US" sz="900" dirty="0">
                   <a:solidFill>
                     <a:srgbClr val="64748B"/>
                   </a:solidFill>
@@ -14213,8 +14419,8 @@
           </p:nvSpPr>
           <p:spPr>
             <a:xfrm>
-              <a:off x="1041273" y="5482114"/>
-              <a:ext cx="1860485" cy="249364"/>
+              <a:off x="1040892" y="5474018"/>
+              <a:ext cx="2033526" cy="264033"/>
             </a:xfrm>
             <a:prstGeom prst="rect">
               <a:avLst/>
@@ -14232,7 +14438,7 @@
             <a:p>
               <a:pPr algn="l"/>
               <a:r>
-                <a:rPr lang="en-US" sz="1280" b="1" dirty="0">
+                <a:rPr lang="en-US" sz="1350" b="1" dirty="0">
                   <a:solidFill>
                     <a:srgbClr val="38BDF8"/>
                   </a:solidFill>
@@ -14253,8 +14459,8 @@
           </p:nvSpPr>
           <p:spPr>
             <a:xfrm>
-              <a:off x="1042797" y="5847874"/>
-              <a:ext cx="3151899" cy="190690"/>
+              <a:off x="1042416" y="5839778"/>
+              <a:ext cx="3564958" cy="205359"/>
             </a:xfrm>
             <a:prstGeom prst="rect">
               <a:avLst/>
@@ -14272,47 +14478,47 @@
             <a:p>
               <a:pPr algn="l"/>
               <a:r>
+                <a:rPr lang="en-US" sz="1050" dirty="0">
+                  <a:solidFill>
+                    <a:srgbClr val="E2E8F0"/>
+                  </a:solidFill>
+                  <a:latin typeface="Inter"/>
+                  <a:ea typeface="Inter"/>
+                  <a:cs typeface="Inter"/>
+                </a:rPr>
+                <a:t>Под конкретную сделку — пакетная обработка VDR</a:t>
+              </a:r>
+            </a:p>
+          </p:txBody>
+        </p:sp>
+        <p:sp>
+          <p:nvSpPr>
+            <p:cNvPr id="36" name="TextBox 36"/>
+            <p:cNvSpPr txBox="1"/>
+            <p:nvPr/>
+          </p:nvSpPr>
+          <p:spPr>
+            <a:xfrm>
+              <a:off x="1042797" y="6085999"/>
+              <a:ext cx="1027128" cy="190690"/>
+            </a:xfrm>
+            <a:prstGeom prst="rect">
+              <a:avLst/>
+            </a:prstGeom>
+            <a:noFill/>
+            <a:ln>
+              <a:noFill/>
+            </a:ln>
+          </p:spPr>
+          <p:txBody>
+            <a:bodyPr wrap="none" lIns="0" tIns="0" rIns="0" bIns="0" anchor="t" anchorCtr="0">
+              <a:spAutoFit/>
+            </a:bodyPr>
+            <a:lstStyle/>
+            <a:p>
+              <a:pPr algn="l"/>
+              <a:r>
                 <a:rPr lang="en-US" sz="980" dirty="0">
-                  <a:solidFill>
-                    <a:srgbClr val="E2E8F0"/>
-                  </a:solidFill>
-                  <a:latin typeface="Inter"/>
-                  <a:ea typeface="Inter"/>
-                  <a:cs typeface="Inter"/>
-                </a:rPr>
-                <a:t>Под конкретную сделку — пакетная обработка VDR</a:t>
-              </a:r>
-            </a:p>
-          </p:txBody>
-        </p:sp>
-        <p:sp>
-          <p:nvSpPr>
-            <p:cNvPr id="36" name="TextBox 36"/>
-            <p:cNvSpPr txBox="1"/>
-            <p:nvPr/>
-          </p:nvSpPr>
-          <p:spPr>
-            <a:xfrm>
-              <a:off x="1042988" y="6094095"/>
-              <a:ext cx="948499" cy="176212"/>
-            </a:xfrm>
-            <a:prstGeom prst="rect">
-              <a:avLst/>
-            </a:prstGeom>
-            <a:noFill/>
-            <a:ln>
-              <a:noFill/>
-            </a:ln>
-          </p:spPr>
-          <p:txBody>
-            <a:bodyPr wrap="none" lIns="0" tIns="0" rIns="0" bIns="0" anchor="t" anchorCtr="0">
-              <a:spAutoFit/>
-            </a:bodyPr>
-            <a:lstStyle/>
-            <a:p>
-              <a:pPr algn="l"/>
-              <a:r>
-                <a:rPr lang="en-US" sz="900" dirty="0">
                   <a:solidFill>
                     <a:srgbClr val="64748B"/>
                   </a:solidFill>
@@ -14374,8 +14580,8 @@
           </p:nvSpPr>
           <p:spPr>
             <a:xfrm>
-              <a:off x="6565773" y="5482114"/>
-              <a:ext cx="1857004" cy="249364"/>
+              <a:off x="6565392" y="5474018"/>
+              <a:ext cx="2092580" cy="264033"/>
             </a:xfrm>
             <a:prstGeom prst="rect">
               <a:avLst/>
@@ -14393,7 +14599,7 @@
             <a:p>
               <a:pPr algn="l"/>
               <a:r>
-                <a:rPr lang="en-US" sz="1280" b="1" dirty="0">
+                <a:rPr lang="en-US" sz="1350" b="1" dirty="0">
                   <a:solidFill>
                     <a:srgbClr val="38BDF8"/>
                   </a:solidFill>
@@ -14414,8 +14620,8 @@
           </p:nvSpPr>
           <p:spPr>
             <a:xfrm>
-              <a:off x="6567297" y="5800249"/>
-              <a:ext cx="3840683" cy="190690"/>
+              <a:off x="6566916" y="5792152"/>
+              <a:ext cx="4331424" cy="205359"/>
             </a:xfrm>
             <a:prstGeom prst="rect">
               <a:avLst/>
@@ -14433,7 +14639,7 @@
             <a:p>
               <a:pPr algn="l"/>
               <a:r>
-                <a:rPr lang="en-US" sz="980" dirty="0">
+                <a:rPr lang="en-US" sz="1050" dirty="0">
                   <a:solidFill>
                     <a:srgbClr val="94A3B8"/>
                   </a:solidFill>
@@ -14454,8 +14660,8 @@
           </p:nvSpPr>
           <p:spPr>
             <a:xfrm>
-              <a:off x="6567297" y="6038374"/>
-              <a:ext cx="3368088" cy="190690"/>
+              <a:off x="6566916" y="6030278"/>
+              <a:ext cx="3724839" cy="205359"/>
             </a:xfrm>
             <a:prstGeom prst="rect">
               <a:avLst/>
@@ -14473,7 +14679,7 @@
             <a:p>
               <a:pPr algn="l"/>
               <a:r>
-                <a:rPr lang="en-US" sz="980" dirty="0">
+                <a:rPr lang="en-US" sz="1050" dirty="0">
                   <a:solidFill>
                     <a:srgbClr val="94A3B8"/>
                   </a:solidFill>
@@ -14495,8 +14701,8 @@
         </p:nvSpPr>
         <p:spPr>
           <a:xfrm>
-            <a:off x="566738" y="6570345"/>
-            <a:ext cx="348767" cy="176212"/>
+            <a:off x="566547" y="6562249"/>
+            <a:ext cx="377419" cy="190690"/>
           </a:xfrm>
           <a:prstGeom prst="rect">
             <a:avLst/>
@@ -14514,7 +14720,7 @@
           <a:p>
             <a:pPr algn="l"/>
             <a:r>
-              <a:rPr lang="en-US" sz="900" dirty="0">
+              <a:rPr lang="en-US" sz="980" dirty="0">
                 <a:solidFill>
                   <a:srgbClr val="64748B"/>
                 </a:solidFill>
@@ -14659,8 +14865,8 @@
         </p:nvSpPr>
         <p:spPr>
           <a:xfrm>
-            <a:off x="9548278" y="6570345"/>
-            <a:ext cx="2267485" cy="176212"/>
+            <a:off x="9523801" y="6570345"/>
+            <a:ext cx="2291961" cy="176212"/>
           </a:xfrm>
           <a:prstGeom prst="rect">
             <a:avLst/>
@@ -14686,7 +14892,7 @@
                 <a:ea typeface="Inter"/>
                 <a:cs typeface="Inter"/>
               </a:rPr>
-              <a:t>Vector Legal · Hermes Agent · Оsmosy</a:t>
+              <a:t>Vector Legal · Hermes Agent · Osmosy</a:t>
             </a:r>
           </a:p>
         </p:txBody>
@@ -14700,7 +14906,7 @@
         <p:spPr>
           <a:xfrm>
             <a:off x="566166" y="553402"/>
-            <a:ext cx="2129302" cy="205359"/>
+            <a:ext cx="2239840" cy="205359"/>
           </a:xfrm>
           <a:prstGeom prst="rect">
             <a:avLst/>
@@ -14740,7 +14946,7 @@
         <p:spPr>
           <a:xfrm>
             <a:off x="556260" y="819150"/>
-            <a:ext cx="5810860" cy="586740"/>
+            <a:ext cx="6146079" cy="586740"/>
           </a:xfrm>
           <a:prstGeom prst="rect">
             <a:avLst/>
@@ -14813,7 +15019,7 @@
         <p:spPr>
           <a:xfrm>
             <a:off x="565404" y="1680210"/>
-            <a:ext cx="5768771" cy="234696"/>
+            <a:ext cx="6025877" cy="234696"/>
           </a:xfrm>
           <a:prstGeom prst="rect">
             <a:avLst/>
@@ -14853,7 +15059,7 @@
         <p:spPr>
           <a:xfrm>
             <a:off x="565785" y="1974056"/>
-            <a:ext cx="6592606" cy="220028"/>
+            <a:ext cx="6852209" cy="220028"/>
           </a:xfrm>
           <a:prstGeom prst="rect">
             <a:avLst/>
@@ -14893,7 +15099,7 @@
         <p:spPr>
           <a:xfrm>
             <a:off x="564642" y="2521268"/>
-            <a:ext cx="1651417" cy="264033"/>
+            <a:ext cx="1760597" cy="264033"/>
           </a:xfrm>
           <a:prstGeom prst="rect">
             <a:avLst/>
@@ -14933,9 +15139,9 @@
         <p:grpSpPr>
           <a:xfrm>
             <a:off x="762000" y="2952750"/>
-            <a:ext cx="5143500" cy="1619250"/>
+            <a:ext cx="5448123" cy="1619250"/>
             <a:chOff x="762000" y="2952750"/>
-            <a:chExt cx="5143500" cy="1619250"/>
+            <a:chExt cx="5448123" cy="1619250"/>
           </a:xfrm>
         </p:grpSpPr>
         <p:sp>
@@ -14973,7 +15179,7 @@
           <p:spPr>
             <a:xfrm>
               <a:off x="1041654" y="3251835"/>
-              <a:ext cx="3382829" cy="234696"/>
+              <a:ext cx="3423892" cy="234696"/>
             </a:xfrm>
             <a:prstGeom prst="rect">
               <a:avLst/>
@@ -15012,8 +15218,8 @@
           </p:nvSpPr>
           <p:spPr>
             <a:xfrm>
-              <a:off x="1042797" y="3609499"/>
-              <a:ext cx="2916911" cy="190690"/>
+              <a:off x="1042416" y="3601402"/>
+              <a:ext cx="3505684" cy="205359"/>
             </a:xfrm>
             <a:prstGeom prst="rect">
               <a:avLst/>
@@ -15031,135 +15237,135 @@
             <a:p>
               <a:pPr algn="l"/>
               <a:r>
+                <a:rPr lang="en-US" sz="1050" dirty="0">
+                  <a:solidFill>
+                    <a:srgbClr val="E2E8F0"/>
+                  </a:solidFill>
+                  <a:latin typeface="Inter"/>
+                  <a:ea typeface="Inter"/>
+                  <a:cs typeface="Inter"/>
+                </a:rPr>
+                <a:t>• ЕГРЮЛ / ЕГРИП — через ФНС открытые данные</a:t>
+              </a:r>
+            </a:p>
+          </p:txBody>
+        </p:sp>
+        <p:sp>
+          <p:nvSpPr>
+            <p:cNvPr id="15" name="TextBox 15"/>
+            <p:cNvSpPr txBox="1"/>
+            <p:nvPr/>
+          </p:nvSpPr>
+          <p:spPr>
+            <a:xfrm>
+              <a:off x="1042416" y="3887152"/>
+              <a:ext cx="4147816" cy="205359"/>
+            </a:xfrm>
+            <a:prstGeom prst="rect">
+              <a:avLst/>
+            </a:prstGeom>
+            <a:noFill/>
+            <a:ln>
+              <a:noFill/>
+            </a:ln>
+          </p:spPr>
+          <p:txBody>
+            <a:bodyPr wrap="none" lIns="0" tIns="0" rIns="0" bIns="0" anchor="t" anchorCtr="0">
+              <a:spAutoFit/>
+            </a:bodyPr>
+            <a:lstStyle/>
+            <a:p>
+              <a:pPr algn="l"/>
+              <a:r>
+                <a:rPr lang="en-US" sz="1050" dirty="0">
+                  <a:solidFill>
+                    <a:srgbClr val="E2E8F0"/>
+                  </a:solidFill>
+                  <a:latin typeface="Inter"/>
+                  <a:ea typeface="Inter"/>
+                  <a:cs typeface="Inter"/>
+                </a:rPr>
+                <a:t>• Контрагент одним вызовом — ЕФРСБ, Картотека, ФССП</a:t>
+              </a:r>
+            </a:p>
+          </p:txBody>
+        </p:sp>
+        <p:sp>
+          <p:nvSpPr>
+            <p:cNvPr id="16" name="TextBox 16"/>
+            <p:cNvSpPr txBox="1"/>
+            <p:nvPr/>
+          </p:nvSpPr>
+          <p:spPr>
+            <a:xfrm>
+              <a:off x="1042416" y="4153852"/>
+              <a:ext cx="2365322" cy="205359"/>
+            </a:xfrm>
+            <a:prstGeom prst="rect">
+              <a:avLst/>
+            </a:prstGeom>
+            <a:noFill/>
+            <a:ln>
+              <a:noFill/>
+            </a:ln>
+          </p:spPr>
+          <p:txBody>
+            <a:bodyPr wrap="none" lIns="0" tIns="0" rIns="0" bIns="0" anchor="t" anchorCtr="0">
+              <a:spAutoFit/>
+            </a:bodyPr>
+            <a:lstStyle/>
+            <a:p>
+              <a:pPr algn="l"/>
+              <a:r>
+                <a:rPr lang="en-US" sz="1050" dirty="0">
+                  <a:solidFill>
+                    <a:srgbClr val="E2E8F0"/>
+                  </a:solidFill>
+                  <a:latin typeface="Inter"/>
+                  <a:ea typeface="Inter"/>
+                  <a:cs typeface="Inter"/>
+                </a:rPr>
+                <a:t>• sudact — судебная практика РФ</a:t>
+              </a:r>
+            </a:p>
+          </p:txBody>
+        </p:sp>
+        <p:sp>
+          <p:nvSpPr>
+            <p:cNvPr id="17" name="TextBox 17"/>
+            <p:cNvSpPr txBox="1"/>
+            <p:nvPr/>
+          </p:nvSpPr>
+          <p:spPr>
+            <a:xfrm>
+              <a:off x="1042797" y="4333399"/>
+              <a:ext cx="5167326" cy="190690"/>
+            </a:xfrm>
+            <a:prstGeom prst="rect">
+              <a:avLst/>
+            </a:prstGeom>
+            <a:noFill/>
+            <a:ln>
+              <a:noFill/>
+            </a:ln>
+          </p:spPr>
+          <p:txBody>
+            <a:bodyPr wrap="none" lIns="0" tIns="0" rIns="0" bIns="0" anchor="t" anchorCtr="0">
+              <a:spAutoFit/>
+            </a:bodyPr>
+            <a:lstStyle/>
+            <a:p>
+              <a:pPr algn="l"/>
+              <a:r>
                 <a:rPr lang="en-US" sz="980" dirty="0">
                   <a:solidFill>
-                    <a:srgbClr val="E2E8F0"/>
-                  </a:solidFill>
-                  <a:latin typeface="Inter"/>
-                  <a:ea typeface="Inter"/>
-                  <a:cs typeface="Inter"/>
-                </a:rPr>
-                <a:t>• ЕГРЮЛ / ЕГРИП — через ФНС открытые данные</a:t>
-              </a:r>
-            </a:p>
-          </p:txBody>
-        </p:sp>
-        <p:sp>
-          <p:nvSpPr>
-            <p:cNvPr id="15" name="TextBox 15"/>
-            <p:cNvSpPr txBox="1"/>
-            <p:nvPr/>
-          </p:nvSpPr>
-          <p:spPr>
-            <a:xfrm>
-              <a:off x="1042797" y="3895249"/>
-              <a:ext cx="3515633" cy="190690"/>
-            </a:xfrm>
-            <a:prstGeom prst="rect">
-              <a:avLst/>
-            </a:prstGeom>
-            <a:noFill/>
-            <a:ln>
-              <a:noFill/>
-            </a:ln>
-          </p:spPr>
-          <p:txBody>
-            <a:bodyPr wrap="none" lIns="0" tIns="0" rIns="0" bIns="0" anchor="t" anchorCtr="0">
-              <a:spAutoFit/>
-            </a:bodyPr>
-            <a:lstStyle/>
-            <a:p>
-              <a:pPr algn="l"/>
-              <a:r>
-                <a:rPr lang="en-US" sz="980" dirty="0">
-                  <a:solidFill>
-                    <a:srgbClr val="E2E8F0"/>
-                  </a:solidFill>
-                  <a:latin typeface="Inter"/>
-                  <a:ea typeface="Inter"/>
-                  <a:cs typeface="Inter"/>
-                </a:rPr>
-                <a:t>• Контрагент одним вызовом — ЕФРСБ, Картотека, ФССП</a:t>
-              </a:r>
-            </a:p>
-          </p:txBody>
-        </p:sp>
-        <p:sp>
-          <p:nvSpPr>
-            <p:cNvPr id="16" name="TextBox 16"/>
-            <p:cNvSpPr txBox="1"/>
-            <p:nvPr/>
-          </p:nvSpPr>
-          <p:spPr>
-            <a:xfrm>
-              <a:off x="1042797" y="4180999"/>
-              <a:ext cx="2093509" cy="190690"/>
-            </a:xfrm>
-            <a:prstGeom prst="rect">
-              <a:avLst/>
-            </a:prstGeom>
-            <a:noFill/>
-            <a:ln>
-              <a:noFill/>
-            </a:ln>
-          </p:spPr>
-          <p:txBody>
-            <a:bodyPr wrap="none" lIns="0" tIns="0" rIns="0" bIns="0" anchor="t" anchorCtr="0">
-              <a:spAutoFit/>
-            </a:bodyPr>
-            <a:lstStyle/>
-            <a:p>
-              <a:pPr algn="l"/>
-              <a:r>
-                <a:rPr lang="en-US" sz="980" dirty="0">
-                  <a:solidFill>
-                    <a:srgbClr val="E2E8F0"/>
-                  </a:solidFill>
-                  <a:latin typeface="Inter"/>
-                  <a:ea typeface="Inter"/>
-                  <a:cs typeface="Inter"/>
-                </a:rPr>
-                <a:t>• sudact — судебная практика РФ</a:t>
-              </a:r>
-            </a:p>
-          </p:txBody>
-        </p:sp>
-        <p:sp>
-          <p:nvSpPr>
-            <p:cNvPr id="17" name="TextBox 17"/>
-            <p:cNvSpPr txBox="1"/>
-            <p:nvPr/>
-          </p:nvSpPr>
-          <p:spPr>
-            <a:xfrm>
-              <a:off x="1042988" y="4379595"/>
-              <a:ext cx="4327365" cy="176212"/>
-            </a:xfrm>
-            <a:prstGeom prst="rect">
-              <a:avLst/>
-            </a:prstGeom>
-            <a:noFill/>
-            <a:ln>
-              <a:noFill/>
-            </a:ln>
-          </p:spPr>
-          <p:txBody>
-            <a:bodyPr wrap="none" lIns="0" tIns="0" rIns="0" bIns="0" anchor="t" anchorCtr="0">
-              <a:spAutoFit/>
-            </a:bodyPr>
-            <a:lstStyle/>
-            <a:p>
-              <a:pPr algn="l"/>
-              <a:r>
-                <a:rPr lang="en-US" sz="900" dirty="0">
-                  <a:solidFill>
                     <a:srgbClr val="94A3B8"/>
                   </a:solidFill>
                   <a:latin typeface="Inter"/>
                   <a:ea typeface="Inter"/>
                   <a:cs typeface="Inter"/>
                 </a:rPr>
-                <a:t>+ Товарные знаки ФИПС.Роспатент, Росреестр, закупки 44/223-ФЗ, ЕРИР</a:t>
+                <a:t>+ Товарные знаки ФИПС / Роспатент, Росреестр, закупки 44/223-ФЗ, ЕРИР</a:t>
               </a:r>
             </a:p>
           </p:txBody>
@@ -15293,8 +15499,8 @@
           </p:nvSpPr>
           <p:spPr>
             <a:xfrm>
-              <a:off x="6566916" y="3934778"/>
-              <a:ext cx="3261741" cy="205359"/>
+              <a:off x="6566916" y="3906202"/>
+              <a:ext cx="3376235" cy="205359"/>
             </a:xfrm>
             <a:prstGeom prst="rect">
               <a:avLst/>
@@ -15333,8 +15539,8 @@
           </p:nvSpPr>
           <p:spPr>
             <a:xfrm>
-              <a:off x="6566916" y="4172902"/>
-              <a:ext cx="2067070" cy="205359"/>
+              <a:off x="6566916" y="4153852"/>
+              <a:ext cx="2187027" cy="205359"/>
             </a:xfrm>
             <a:prstGeom prst="rect">
               <a:avLst/>
@@ -15373,8 +15579,8 @@
           </p:nvSpPr>
           <p:spPr>
             <a:xfrm>
-              <a:off x="6567488" y="4379595"/>
-              <a:ext cx="2564275" cy="176212"/>
+              <a:off x="6567297" y="4333399"/>
+              <a:ext cx="2923495" cy="190690"/>
             </a:xfrm>
             <a:prstGeom prst="rect">
               <a:avLst/>
@@ -15392,7 +15598,7 @@
             <a:p>
               <a:pPr algn="l"/>
               <a:r>
-                <a:rPr lang="en-US" sz="900" dirty="0">
+                <a:rPr lang="en-US" sz="980" dirty="0">
                   <a:solidFill>
                     <a:srgbClr val="94A3B8"/>
                   </a:solidFill>
@@ -15455,7 +15661,7 @@
           <p:spPr>
             <a:xfrm>
               <a:off x="1041654" y="5109210"/>
-              <a:ext cx="2561798" cy="234696"/>
+              <a:ext cx="2776593" cy="234696"/>
             </a:xfrm>
             <a:prstGeom prst="rect">
               <a:avLst/>
@@ -15494,8 +15700,8 @@
           </p:nvSpPr>
           <p:spPr>
             <a:xfrm>
-              <a:off x="1042797" y="5466874"/>
-              <a:ext cx="2667893" cy="190690"/>
+              <a:off x="1042416" y="5439728"/>
+              <a:ext cx="3069155" cy="205359"/>
             </a:xfrm>
             <a:prstGeom prst="rect">
               <a:avLst/>
@@ -15513,7 +15719,7 @@
             <a:p>
               <a:pPr algn="l"/>
               <a:r>
-                <a:rPr lang="en-US" sz="980" dirty="0">
+                <a:rPr lang="en-US" sz="1050" dirty="0">
                   <a:solidFill>
                     <a:srgbClr val="E2E8F0"/>
                   </a:solidFill>
@@ -15534,8 +15740,8 @@
           </p:nvSpPr>
           <p:spPr>
             <a:xfrm>
-              <a:off x="1042797" y="5752624"/>
-              <a:ext cx="3175981" cy="190690"/>
+              <a:off x="1042416" y="5687378"/>
+              <a:ext cx="3615933" cy="205359"/>
             </a:xfrm>
             <a:prstGeom prst="rect">
               <a:avLst/>
@@ -15553,7 +15759,7 @@
             <a:p>
               <a:pPr algn="l"/>
               <a:r>
-                <a:rPr lang="en-US" sz="980" dirty="0">
+                <a:rPr lang="en-US" sz="1050" dirty="0">
                   <a:solidFill>
                     <a:srgbClr val="94A3B8"/>
                   </a:solidFill>
@@ -15574,8 +15780,8 @@
           </p:nvSpPr>
           <p:spPr>
             <a:xfrm>
-              <a:off x="1042797" y="5943124"/>
-              <a:ext cx="3354835" cy="190690"/>
+              <a:off x="1042416" y="5896928"/>
+              <a:ext cx="3744533" cy="205359"/>
             </a:xfrm>
             <a:prstGeom prst="rect">
               <a:avLst/>
@@ -15593,7 +15799,7 @@
             <a:p>
               <a:pPr algn="l"/>
               <a:r>
-                <a:rPr lang="en-US" sz="980" dirty="0">
+                <a:rPr lang="en-US" sz="1050" dirty="0">
                   <a:solidFill>
                     <a:srgbClr val="94A3B8"/>
                   </a:solidFill>
@@ -15656,7 +15862,7 @@
           <p:spPr>
             <a:xfrm>
               <a:off x="6566154" y="5109210"/>
-              <a:ext cx="3385745" cy="234696"/>
+              <a:ext cx="3477519" cy="234696"/>
             </a:xfrm>
             <a:prstGeom prst="rect">
               <a:avLst/>
@@ -15695,8 +15901,8 @@
           </p:nvSpPr>
           <p:spPr>
             <a:xfrm>
-              <a:off x="6567297" y="5466874"/>
-              <a:ext cx="3042864" cy="190690"/>
+              <a:off x="6566916" y="5439728"/>
+              <a:ext cx="3422098" cy="205359"/>
             </a:xfrm>
             <a:prstGeom prst="rect">
               <a:avLst/>
@@ -15714,7 +15920,7 @@
             <a:p>
               <a:pPr algn="l"/>
               <a:r>
-                <a:rPr lang="en-US" sz="980" dirty="0">
+                <a:rPr lang="en-US" sz="1050" dirty="0">
                   <a:solidFill>
                     <a:srgbClr val="E2E8F0"/>
                   </a:solidFill>
@@ -15735,8 +15941,8 @@
           </p:nvSpPr>
           <p:spPr>
             <a:xfrm>
-              <a:off x="6567297" y="5752624"/>
-              <a:ext cx="4089729" cy="190690"/>
+              <a:off x="6566916" y="5706428"/>
+              <a:ext cx="4717238" cy="205359"/>
             </a:xfrm>
             <a:prstGeom prst="rect">
               <a:avLst/>
@@ -15754,7 +15960,7 @@
             <a:p>
               <a:pPr algn="l"/>
               <a:r>
-                <a:rPr lang="en-US" sz="980" dirty="0">
+                <a:rPr lang="en-US" sz="1050" dirty="0">
                   <a:solidFill>
                     <a:srgbClr val="94A3B8"/>
                   </a:solidFill>
@@ -15940,8 +16146,8 @@
         </p:nvSpPr>
         <p:spPr>
           <a:xfrm>
-            <a:off x="9548278" y="6570345"/>
-            <a:ext cx="2267485" cy="176212"/>
+            <a:off x="9523801" y="6570345"/>
+            <a:ext cx="2291961" cy="176212"/>
           </a:xfrm>
           <a:prstGeom prst="rect">
             <a:avLst/>
@@ -15967,7 +16173,7 @@
                 <a:ea typeface="Inter"/>
                 <a:cs typeface="Inter"/>
               </a:rPr>
-              <a:t>Vector Legal · Hermes Agent · Оsmosy</a:t>
+              <a:t>Vector Legal · Hermes Agent · Osmosy</a:t>
             </a:r>
           </a:p>
         </p:txBody>
@@ -15981,7 +16187,7 @@
         <p:spPr>
           <a:xfrm>
             <a:off x="566166" y="553402"/>
-            <a:ext cx="2242197" cy="205359"/>
+            <a:ext cx="2361212" cy="205359"/>
           </a:xfrm>
           <a:prstGeom prst="rect">
             <a:avLst/>
@@ -16021,7 +16227,7 @@
         <p:spPr>
           <a:xfrm>
             <a:off x="556260" y="819150"/>
-            <a:ext cx="6151245" cy="586740"/>
+            <a:ext cx="6508290" cy="586740"/>
           </a:xfrm>
           <a:prstGeom prst="rect">
             <a:avLst/>
@@ -16134,7 +16340,7 @@
           <p:spPr>
             <a:xfrm>
               <a:off x="803910" y="2021681"/>
-              <a:ext cx="1813440" cy="220028"/>
+              <a:ext cx="1928259" cy="220028"/>
             </a:xfrm>
             <a:prstGeom prst="rect">
               <a:avLst/>
@@ -16173,8 +16379,8 @@
           </p:nvSpPr>
           <p:spPr>
             <a:xfrm>
-              <a:off x="804672" y="2371249"/>
-              <a:ext cx="3929320" cy="190690"/>
+              <a:off x="804291" y="2363152"/>
+              <a:ext cx="4529268" cy="205359"/>
             </a:xfrm>
             <a:prstGeom prst="rect">
               <a:avLst/>
@@ -16192,7 +16398,7 @@
             <a:p>
               <a:pPr algn="l"/>
               <a:r>
-                <a:rPr lang="en-US" sz="980" dirty="0">
+                <a:rPr lang="en-US" sz="1050" dirty="0">
                   <a:solidFill>
                     <a:srgbClr val="E2E8F0"/>
                   </a:solidFill>
@@ -16255,7 +16461,7 @@
           <p:spPr>
             <a:xfrm>
               <a:off x="6518910" y="2021681"/>
-              <a:ext cx="1638533" cy="220028"/>
+              <a:ext cx="1743817" cy="220028"/>
             </a:xfrm>
             <a:prstGeom prst="rect">
               <a:avLst/>
@@ -16294,8 +16500,8 @@
           </p:nvSpPr>
           <p:spPr>
             <a:xfrm>
-              <a:off x="6519672" y="2371249"/>
-              <a:ext cx="2575706" cy="190690"/>
+              <a:off x="6519291" y="2363152"/>
+              <a:ext cx="2876920" cy="205359"/>
             </a:xfrm>
             <a:prstGeom prst="rect">
               <a:avLst/>
@@ -16313,7 +16519,7 @@
             <a:p>
               <a:pPr algn="l"/>
               <a:r>
-                <a:rPr lang="en-US" sz="980" dirty="0">
+                <a:rPr lang="en-US" sz="1050" dirty="0">
                   <a:solidFill>
                     <a:srgbClr val="E2E8F0"/>
                   </a:solidFill>
@@ -16376,7 +16582,7 @@
           <p:spPr>
             <a:xfrm>
               <a:off x="803910" y="3069431"/>
-              <a:ext cx="1725986" cy="220028"/>
+              <a:ext cx="1836037" cy="220028"/>
             </a:xfrm>
             <a:prstGeom prst="rect">
               <a:avLst/>
@@ -16415,8 +16621,8 @@
           </p:nvSpPr>
           <p:spPr>
             <a:xfrm>
-              <a:off x="804672" y="3418999"/>
-              <a:ext cx="3075480" cy="190690"/>
+              <a:off x="804291" y="3410902"/>
+              <a:ext cx="3545095" cy="205359"/>
             </a:xfrm>
             <a:prstGeom prst="rect">
               <a:avLst/>
@@ -16434,7 +16640,7 @@
             <a:p>
               <a:pPr algn="l"/>
               <a:r>
-                <a:rPr lang="en-US" sz="980" dirty="0">
+                <a:rPr lang="en-US" sz="1050" dirty="0">
                   <a:solidFill>
                     <a:srgbClr val="E2E8F0"/>
                   </a:solidFill>
@@ -16497,7 +16703,7 @@
           <p:spPr>
             <a:xfrm>
               <a:off x="6518910" y="3069431"/>
-              <a:ext cx="1201286" cy="220028"/>
+              <a:ext cx="1282740" cy="220028"/>
             </a:xfrm>
             <a:prstGeom prst="rect">
               <a:avLst/>
@@ -16536,8 +16742,8 @@
           </p:nvSpPr>
           <p:spPr>
             <a:xfrm>
-              <a:off x="6519672" y="3418999"/>
-              <a:ext cx="3742819" cy="190690"/>
+              <a:off x="6519291" y="3410902"/>
+              <a:ext cx="4341959" cy="205359"/>
             </a:xfrm>
             <a:prstGeom prst="rect">
               <a:avLst/>
@@ -16555,7 +16761,7 @@
             <a:p>
               <a:pPr algn="l"/>
               <a:r>
-                <a:rPr lang="en-US" sz="980" dirty="0">
+                <a:rPr lang="en-US" sz="1050" dirty="0">
                   <a:solidFill>
                     <a:srgbClr val="E2E8F0"/>
                   </a:solidFill>
@@ -16618,7 +16824,7 @@
           <p:spPr>
             <a:xfrm>
               <a:off x="803910" y="4117181"/>
-              <a:ext cx="1288732" cy="220028"/>
+              <a:ext cx="1374950" cy="220028"/>
             </a:xfrm>
             <a:prstGeom prst="rect">
               <a:avLst/>
@@ -16657,8 +16863,8 @@
           </p:nvSpPr>
           <p:spPr>
             <a:xfrm>
-              <a:off x="804672" y="4466749"/>
-              <a:ext cx="3663814" cy="190690"/>
+              <a:off x="804291" y="4458652"/>
+              <a:ext cx="4116114" cy="205359"/>
             </a:xfrm>
             <a:prstGeom prst="rect">
               <a:avLst/>
@@ -16676,7 +16882,7 @@
             <a:p>
               <a:pPr algn="l"/>
               <a:r>
-                <a:rPr lang="en-US" sz="980" dirty="0">
+                <a:rPr lang="en-US" sz="1050" dirty="0">
                   <a:solidFill>
                     <a:srgbClr val="E2E8F0"/>
                   </a:solidFill>
@@ -16739,7 +16945,7 @@
           <p:spPr>
             <a:xfrm>
               <a:off x="6518910" y="4117181"/>
-              <a:ext cx="1071763" cy="220028"/>
+              <a:ext cx="1163337" cy="220028"/>
             </a:xfrm>
             <a:prstGeom prst="rect">
               <a:avLst/>
@@ -16778,8 +16984,8 @@
           </p:nvSpPr>
           <p:spPr>
             <a:xfrm>
-              <a:off x="6519672" y="4466749"/>
-              <a:ext cx="3436848" cy="190690"/>
+              <a:off x="6519291" y="4458652"/>
+              <a:ext cx="3761139" cy="205359"/>
             </a:xfrm>
             <a:prstGeom prst="rect">
               <a:avLst/>
@@ -16797,7 +17003,7 @@
             <a:p>
               <a:pPr algn="l"/>
               <a:r>
-                <a:rPr lang="en-US" sz="980" dirty="0">
+                <a:rPr lang="en-US" sz="1050" dirty="0">
                   <a:solidFill>
                     <a:srgbClr val="E2E8F0"/>
                   </a:solidFill>
@@ -16805,7 +17011,7 @@
                   <a:ea typeface="Inter"/>
                   <a:cs typeface="Inter"/>
                 </a:rPr>
-                <a:t>Russian-Law (152-ФЗ) · + реестр ЭПР ИИ [проверить]</a:t>
+                <a:t>Russian-Law (152-ФЗ) · + реестр ЭПР ИИ — в работе</a:t>
               </a:r>
             </a:p>
           </p:txBody>
@@ -16860,7 +17066,7 @@
           <p:spPr>
             <a:xfrm>
               <a:off x="803910" y="5164931"/>
-              <a:ext cx="1988350" cy="220028"/>
+              <a:ext cx="2112704" cy="220028"/>
             </a:xfrm>
             <a:prstGeom prst="rect">
               <a:avLst/>
@@ -16899,8 +17105,8 @@
           </p:nvSpPr>
           <p:spPr>
             <a:xfrm>
-              <a:off x="804672" y="5514499"/>
-              <a:ext cx="3762146" cy="190690"/>
+              <a:off x="804291" y="5506402"/>
+              <a:ext cx="4124364" cy="205359"/>
             </a:xfrm>
             <a:prstGeom prst="rect">
               <a:avLst/>
@@ -16918,7 +17124,7 @@
             <a:p>
               <a:pPr algn="l"/>
               <a:r>
-                <a:rPr lang="en-US" sz="980" dirty="0">
+                <a:rPr lang="en-US" sz="1050" dirty="0">
                   <a:solidFill>
                     <a:srgbClr val="E2E8F0"/>
                   </a:solidFill>
@@ -16981,7 +17187,7 @@
           <p:spPr>
             <a:xfrm>
               <a:off x="6518910" y="5164931"/>
-              <a:ext cx="2600547" cy="220028"/>
+              <a:ext cx="2758284" cy="220028"/>
             </a:xfrm>
             <a:prstGeom prst="rect">
               <a:avLst/>
@@ -17020,8 +17226,8 @@
           </p:nvSpPr>
           <p:spPr>
             <a:xfrm>
-              <a:off x="6519672" y="5514499"/>
-              <a:ext cx="3450791" cy="190690"/>
+              <a:off x="6519291" y="5506402"/>
+              <a:ext cx="3968501" cy="205359"/>
             </a:xfrm>
             <a:prstGeom prst="rect">
               <a:avLst/>
@@ -17039,7 +17245,7 @@
             <a:p>
               <a:pPr algn="l"/>
               <a:r>
-                <a:rPr lang="en-US" sz="980" dirty="0">
+                <a:rPr lang="en-US" sz="1050" dirty="0">
                   <a:solidFill>
                     <a:srgbClr val="E2E8F0"/>
                   </a:solidFill>
@@ -17047,7 +17253,7 @@
                   <a:ea typeface="Inter"/>
                   <a:cs typeface="Inter"/>
                 </a:rPr>
-                <a:t>sudact · Rospatent/ФИПС товарные знаки · Росреестр</a:t>
+                <a:t>sudact · Роспатент/ФИПС товарные знаки · Росреестр</a:t>
               </a:r>
             </a:p>
           </p:txBody>
@@ -17061,8 +17267,8 @@
         </p:nvSpPr>
         <p:spPr>
           <a:xfrm>
-            <a:off x="756666" y="6030278"/>
-            <a:ext cx="6064532" cy="205359"/>
+            <a:off x="566166" y="6030278"/>
+            <a:ext cx="6533080" cy="205359"/>
           </a:xfrm>
           <a:prstGeom prst="rect">
             <a:avLst/>
